--- a/matlab_app/docs/defaults_guide/デフォルト設定の編集ガイド.pptx
+++ b/matlab_app/docs/defaults_guide/デフォルト設定の編集ガイド.pptx
@@ -728,7 +728,7 @@
           <a:lstStyle/>
           <a:p>
             <a:r>
-              <a:t>補正の式の書き方と、すべての補正の式は「6. ヘルプ」にまとめている。</a:t>
+              <a:t>補正の式の書き方と、すべての補正の式は「7. ヘルプ」にまとめている。</a:t>
             </a:r>
           </a:p>
         </p:txBody>
@@ -16609,7 +16609,7 @@
                 <a:ea typeface="BIZ UDGothic"/>
                 <a:cs typeface="BIZ UDGothic"/>
               </a:rPr>
-              <a:t>cd tests → runAllTests。「成功 142 件、失敗 0 件、未完了 0 件」（2026-10-24 時点の件数）</a:t>
+              <a:t>cd tests → runAllTests。「成功 148 件、失敗 0 件、未完了 0 件」（2026-10-24 時点の件数）</a:t>
             </a:r>
           </a:p>
         </p:txBody>
@@ -18934,7 +18934,7 @@
                 <a:ea typeface="BIZ UDGothic"/>
                 <a:cs typeface="BIZ UDGothic"/>
               </a:rPr>
-              <a:t>「6. ヘルプ」タブ</a:t>
+              <a:t>「7. ヘルプ」タブ</a:t>
             </a:r>
           </a:p>
         </p:txBody>
@@ -28378,7 +28378,7 @@
                           <a:ea typeface="BIZ UDGothic"/>
                           <a:cs typeface="BIZ UDGothic"/>
                         </a:rPr>
-                        <a:t>「6. ヘルプ」の説明（用語・カーネル・補正の式）</a:t>
+                        <a:t>「7. ヘルプ」の説明（用語・カーネル・補正の式）</a:t>
                       </a:r>
                     </a:p>
                   </a:txBody>

--- a/matlab_app/docs/defaults_guide/デフォルト設定の編集ガイド.pptx
+++ b/matlab_app/docs/defaults_guide/デフォルト設定の編集ガイド.pptx
@@ -16609,7 +16609,7 @@
                 <a:ea typeface="BIZ UDGothic"/>
                 <a:cs typeface="BIZ UDGothic"/>
               </a:rPr>
-              <a:t>cd tests → runAllTests。「成功 148 件、失敗 0 件、未完了 0 件」（2026-10-24 時点の件数）</a:t>
+              <a:t>cd tests → runAllTests。「成功 154 件、失敗 0 件、未完了 0 件」（2026-10-25 時点の件数）</a:t>
             </a:r>
           </a:p>
         </p:txBody>
@@ -28778,19 +28778,19 @@
         </p:nvGraphicFramePr>
         <p:xfrm>
           <a:off x="548640" y="1371600"/>
-          <a:ext cx="11091672" cy="4224528"/>
+          <a:ext cx="11091672" cy="4023360"/>
         </p:xfrm>
         <a:graphic>
           <a:graphicData uri="http://schemas.openxmlformats.org/drawingml/2006/table">
             <a:tbl>
               <a:tblPr firstRow="0" bandRow="0"/>
               <a:tblGrid>
-                <a:gridCol w="3108960"/>
-                <a:gridCol w="1691640"/>
-                <a:gridCol w="4645152"/>
-                <a:gridCol w="1645920"/>
+                <a:gridCol w="3429000"/>
+                <a:gridCol w="1737360"/>
+                <a:gridCol w="4370832"/>
+                <a:gridCol w="1554480"/>
               </a:tblGrid>
-              <a:tr h="384048">
+              <a:tr h="402336">
                 <a:tc>
                   <a:txBody>
                     <a:bodyPr wrap="square"/>
@@ -28988,7 +28988,7 @@
                   </a:tcPr>
                 </a:tc>
               </a:tr>
-              <a:tr h="384048">
+              <a:tr h="402336">
                 <a:tc>
                   <a:txBody>
                     <a:bodyPr wrap="square"/>
@@ -29004,7 +29004,7 @@
                           <a:ea typeface="BIZ UDGothic"/>
                           <a:cs typeface="BIZ UDGothic"/>
                         </a:rPr>
-                        <a:t>data.waferRadiusMm</a:t>
+                        <a:t>data.waferRadiusMm・validRadiusMm</a:t>
                       </a:r>
                     </a:p>
                   </a:txBody>
@@ -29053,7 +29053,7 @@
                           <a:ea typeface="BIZ UDGothic"/>
                           <a:cs typeface="BIZ UDGothic"/>
                         </a:rPr>
-                        <a:t>150</a:t>
+                        <a:t>150・150</a:t>
                       </a:r>
                     </a:p>
                   </a:txBody>
@@ -29102,205 +29102,7 @@
                           <a:ea typeface="BIZ UDGothic"/>
                           <a:cs typeface="BIZ UDGothic"/>
                         </a:rPr>
-                        <a:t>座標を割る Wafer 半径 [mm]（300 mm Wafer）</a:t>
-                      </a:r>
-                    </a:p>
-                  </a:txBody>
-                  <a:tcPr marL="109728" marR="109728" marT="45720" marB="45720" anchor="ctr">
-                    <a:lnL w="9525" cap="flat" cmpd="sng" algn="ctr">
-                      <a:solidFill>
-                        <a:srgbClr val="DADDE6"/>
-                      </a:solidFill>
-                      <a:prstDash val="solid"/>
-                    </a:lnL>
-                    <a:lnR w="9525" cap="flat" cmpd="sng" algn="ctr">
-                      <a:solidFill>
-                        <a:srgbClr val="DADDE6"/>
-                      </a:solidFill>
-                      <a:prstDash val="solid"/>
-                    </a:lnR>
-                    <a:lnT w="9525" cap="flat" cmpd="sng" algn="ctr">
-                      <a:solidFill>
-                        <a:srgbClr val="DADDE6"/>
-                      </a:solidFill>
-                      <a:prstDash val="solid"/>
-                    </a:lnT>
-                    <a:lnB w="9525" cap="flat" cmpd="sng" algn="ctr">
-                      <a:solidFill>
-                        <a:srgbClr val="DADDE6"/>
-                      </a:solidFill>
-                      <a:prstDash val="solid"/>
-                    </a:lnB>
-                    <a:solidFill>
-                      <a:srgbClr val="FFFFFF"/>
-                    </a:solidFill>
-                  </a:tcPr>
-                </a:tc>
-                <a:tc>
-                  <a:txBody>
-                    <a:bodyPr wrap="square"/>
-                    <a:lstStyle/>
-                    <a:p>
-                      <a:pPr algn="l"/>
-                      <a:r>
-                        <a:rPr sz="1100" b="0">
-                          <a:solidFill>
-                            <a:srgbClr val="22223B"/>
-                          </a:solidFill>
-                          <a:latin typeface="BIZ UDGothic"/>
-                          <a:ea typeface="BIZ UDGothic"/>
-                          <a:cs typeface="BIZ UDGothic"/>
-                        </a:rPr>
-                        <a:t>（設定ファイルのみ）</a:t>
-                      </a:r>
-                    </a:p>
-                  </a:txBody>
-                  <a:tcPr marL="109728" marR="109728" marT="45720" marB="45720" anchor="ctr">
-                    <a:lnL w="9525" cap="flat" cmpd="sng" algn="ctr">
-                      <a:solidFill>
-                        <a:srgbClr val="DADDE6"/>
-                      </a:solidFill>
-                      <a:prstDash val="solid"/>
-                    </a:lnL>
-                    <a:lnR w="9525" cap="flat" cmpd="sng" algn="ctr">
-                      <a:solidFill>
-                        <a:srgbClr val="DADDE6"/>
-                      </a:solidFill>
-                      <a:prstDash val="solid"/>
-                    </a:lnR>
-                    <a:lnT w="9525" cap="flat" cmpd="sng" algn="ctr">
-                      <a:solidFill>
-                        <a:srgbClr val="DADDE6"/>
-                      </a:solidFill>
-                      <a:prstDash val="solid"/>
-                    </a:lnT>
-                    <a:lnB w="9525" cap="flat" cmpd="sng" algn="ctr">
-                      <a:solidFill>
-                        <a:srgbClr val="DADDE6"/>
-                      </a:solidFill>
-                      <a:prstDash val="solid"/>
-                    </a:lnB>
-                    <a:solidFill>
-                      <a:srgbClr val="FFFFFF"/>
-                    </a:solidFill>
-                  </a:tcPr>
-                </a:tc>
-              </a:tr>
-              <a:tr h="384048">
-                <a:tc>
-                  <a:txBody>
-                    <a:bodyPr wrap="square"/>
-                    <a:lstStyle/>
-                    <a:p>
-                      <a:pPr algn="l"/>
-                      <a:r>
-                        <a:rPr sz="1100" b="0">
-                          <a:solidFill>
-                            <a:srgbClr val="22223B"/>
-                          </a:solidFill>
-                          <a:latin typeface="BIZ UDGothic"/>
-                          <a:ea typeface="BIZ UDGothic"/>
-                          <a:cs typeface="BIZ UDGothic"/>
-                        </a:rPr>
-                        <a:t>data.validRadiusMm</a:t>
-                      </a:r>
-                    </a:p>
-                  </a:txBody>
-                  <a:tcPr marL="109728" marR="109728" marT="45720" marB="45720" anchor="ctr">
-                    <a:lnL w="9525" cap="flat" cmpd="sng" algn="ctr">
-                      <a:solidFill>
-                        <a:srgbClr val="DADDE6"/>
-                      </a:solidFill>
-                      <a:prstDash val="solid"/>
-                    </a:lnL>
-                    <a:lnR w="9525" cap="flat" cmpd="sng" algn="ctr">
-                      <a:solidFill>
-                        <a:srgbClr val="DADDE6"/>
-                      </a:solidFill>
-                      <a:prstDash val="solid"/>
-                    </a:lnR>
-                    <a:lnT w="9525" cap="flat" cmpd="sng" algn="ctr">
-                      <a:solidFill>
-                        <a:srgbClr val="DADDE6"/>
-                      </a:solidFill>
-                      <a:prstDash val="solid"/>
-                    </a:lnT>
-                    <a:lnB w="9525" cap="flat" cmpd="sng" algn="ctr">
-                      <a:solidFill>
-                        <a:srgbClr val="DADDE6"/>
-                      </a:solidFill>
-                      <a:prstDash val="solid"/>
-                    </a:lnB>
-                    <a:solidFill>
-                      <a:srgbClr val="FFFFFF"/>
-                    </a:solidFill>
-                  </a:tcPr>
-                </a:tc>
-                <a:tc>
-                  <a:txBody>
-                    <a:bodyPr wrap="square"/>
-                    <a:lstStyle/>
-                    <a:p>
-                      <a:pPr algn="l"/>
-                      <a:r>
-                        <a:rPr sz="1100" b="0">
-                          <a:solidFill>
-                            <a:srgbClr val="22223B"/>
-                          </a:solidFill>
-                          <a:latin typeface="BIZ UDGothic"/>
-                          <a:ea typeface="BIZ UDGothic"/>
-                          <a:cs typeface="BIZ UDGothic"/>
-                        </a:rPr>
-                        <a:t>150</a:t>
-                      </a:r>
-                    </a:p>
-                  </a:txBody>
-                  <a:tcPr marL="109728" marR="109728" marT="45720" marB="45720" anchor="ctr">
-                    <a:lnL w="9525" cap="flat" cmpd="sng" algn="ctr">
-                      <a:solidFill>
-                        <a:srgbClr val="DADDE6"/>
-                      </a:solidFill>
-                      <a:prstDash val="solid"/>
-                    </a:lnL>
-                    <a:lnR w="9525" cap="flat" cmpd="sng" algn="ctr">
-                      <a:solidFill>
-                        <a:srgbClr val="DADDE6"/>
-                      </a:solidFill>
-                      <a:prstDash val="solid"/>
-                    </a:lnR>
-                    <a:lnT w="9525" cap="flat" cmpd="sng" algn="ctr">
-                      <a:solidFill>
-                        <a:srgbClr val="DADDE6"/>
-                      </a:solidFill>
-                      <a:prstDash val="solid"/>
-                    </a:lnT>
-                    <a:lnB w="9525" cap="flat" cmpd="sng" algn="ctr">
-                      <a:solidFill>
-                        <a:srgbClr val="DADDE6"/>
-                      </a:solidFill>
-                      <a:prstDash val="solid"/>
-                    </a:lnB>
-                    <a:solidFill>
-                      <a:srgbClr val="FFFFFF"/>
-                    </a:solidFill>
-                  </a:tcPr>
-                </a:tc>
-                <a:tc>
-                  <a:txBody>
-                    <a:bodyPr wrap="square"/>
-                    <a:lstStyle/>
-                    <a:p>
-                      <a:pPr algn="l"/>
-                      <a:r>
-                        <a:rPr sz="1100" b="0">
-                          <a:solidFill>
-                            <a:srgbClr val="22223B"/>
-                          </a:solidFill>
-                          <a:latin typeface="BIZ UDGothic"/>
-                          <a:ea typeface="BIZ UDGothic"/>
-                          <a:cs typeface="BIZ UDGothic"/>
-                        </a:rPr>
-                        <a:t>この半径 [mm] 以上の点は除く</a:t>
+                        <a:t>座標を割る Wafer 半径・この半径 [mm] 以上の点は除く</a:t>
                       </a:r>
                     </a:p>
                   </a:txBody>
@@ -29384,7 +29186,7 @@
                   </a:tcPr>
                 </a:tc>
               </a:tr>
-              <a:tr h="384048">
+              <a:tr h="402336">
                 <a:tc>
                   <a:txBody>
                     <a:bodyPr wrap="square"/>
@@ -29582,7 +29384,7 @@
                   </a:tcPr>
                 </a:tc>
               </a:tr>
-              <a:tr h="384048">
+              <a:tr h="402336">
                 <a:tc>
                   <a:txBody>
                     <a:bodyPr wrap="square"/>
@@ -29598,7 +29400,7 @@
                           <a:ea typeface="BIZ UDGothic"/>
                           <a:cs typeface="BIZ UDGothic"/>
                         </a:rPr>
-                        <a:t>data.excludeZeroMeasurements</a:t>
+                        <a:t>data.excludeZeroMeasurements・…Unmeasured…</a:t>
                       </a:r>
                     </a:p>
                   </a:txBody>
@@ -29647,7 +29449,7 @@
                           <a:ea typeface="BIZ UDGothic"/>
                           <a:cs typeface="BIZ UDGothic"/>
                         </a:rPr>
-                        <a:t>false</a:t>
+                        <a:t>false・false</a:t>
                       </a:r>
                     </a:p>
                   </a:txBody>
@@ -29696,7 +29498,7 @@
                           <a:ea typeface="BIZ UDGothic"/>
                           <a:cs typeface="BIZ UDGothic"/>
                         </a:rPr>
-                        <a:t>measX・measY がともに 0 の行を除く</a:t>
+                        <a:t>測定値がともに 0・Sts が −1 の行を除く</a:t>
                       </a:r>
                     </a:p>
                   </a:txBody>
@@ -29780,7 +29582,7 @@
                   </a:tcPr>
                 </a:tc>
               </a:tr>
-              <a:tr h="384048">
+              <a:tr h="402336">
                 <a:tc>
                   <a:txBody>
                     <a:bodyPr wrap="square"/>
@@ -29796,7 +29598,7 @@
                           <a:ea typeface="BIZ UDGothic"/>
                           <a:cs typeface="BIZ UDGothic"/>
                         </a:rPr>
-                        <a:t>data.excludeUnmeasuredRecords</a:t>
+                        <a:t>data.directionRule・invertDirection</a:t>
                       </a:r>
                     </a:p>
                   </a:txBody>
@@ -29845,7 +29647,7 @@
                           <a:ea typeface="BIZ UDGothic"/>
                           <a:cs typeface="BIZ UDGothic"/>
                         </a:rPr>
-                        <a:t>false</a:t>
+                        <a:t>"serpentine"・false</a:t>
                       </a:r>
                     </a:p>
                   </a:txBody>
@@ -29894,205 +29696,7 @@
                           <a:ea typeface="BIZ UDGothic"/>
                           <a:cs typeface="BIZ UDGothic"/>
                         </a:rPr>
-                        <a:t>StsX・StsY のどちらかが −1 の行を除く</a:t>
-                      </a:r>
-                    </a:p>
-                  </a:txBody>
-                  <a:tcPr marL="109728" marR="109728" marT="45720" marB="45720" anchor="ctr">
-                    <a:lnL w="9525" cap="flat" cmpd="sng" algn="ctr">
-                      <a:solidFill>
-                        <a:srgbClr val="DADDE6"/>
-                      </a:solidFill>
-                      <a:prstDash val="solid"/>
-                    </a:lnL>
-                    <a:lnR w="9525" cap="flat" cmpd="sng" algn="ctr">
-                      <a:solidFill>
-                        <a:srgbClr val="DADDE6"/>
-                      </a:solidFill>
-                      <a:prstDash val="solid"/>
-                    </a:lnR>
-                    <a:lnT w="9525" cap="flat" cmpd="sng" algn="ctr">
-                      <a:solidFill>
-                        <a:srgbClr val="DADDE6"/>
-                      </a:solidFill>
-                      <a:prstDash val="solid"/>
-                    </a:lnT>
-                    <a:lnB w="9525" cap="flat" cmpd="sng" algn="ctr">
-                      <a:solidFill>
-                        <a:srgbClr val="DADDE6"/>
-                      </a:solidFill>
-                      <a:prstDash val="solid"/>
-                    </a:lnB>
-                    <a:solidFill>
-                      <a:srgbClr val="FFFFFF"/>
-                    </a:solidFill>
-                  </a:tcPr>
-                </a:tc>
-                <a:tc>
-                  <a:txBody>
-                    <a:bodyPr wrap="square"/>
-                    <a:lstStyle/>
-                    <a:p>
-                      <a:pPr algn="l"/>
-                      <a:r>
-                        <a:rPr sz="1100" b="0">
-                          <a:solidFill>
-                            <a:srgbClr val="22223B"/>
-                          </a:solidFill>
-                          <a:latin typeface="BIZ UDGothic"/>
-                          <a:ea typeface="BIZ UDGothic"/>
-                          <a:cs typeface="BIZ UDGothic"/>
-                        </a:rPr>
-                        <a:t>1. 行の除外</a:t>
-                      </a:r>
-                    </a:p>
-                  </a:txBody>
-                  <a:tcPr marL="109728" marR="109728" marT="45720" marB="45720" anchor="ctr">
-                    <a:lnL w="9525" cap="flat" cmpd="sng" algn="ctr">
-                      <a:solidFill>
-                        <a:srgbClr val="DADDE6"/>
-                      </a:solidFill>
-                      <a:prstDash val="solid"/>
-                    </a:lnL>
-                    <a:lnR w="9525" cap="flat" cmpd="sng" algn="ctr">
-                      <a:solidFill>
-                        <a:srgbClr val="DADDE6"/>
-                      </a:solidFill>
-                      <a:prstDash val="solid"/>
-                    </a:lnR>
-                    <a:lnT w="9525" cap="flat" cmpd="sng" algn="ctr">
-                      <a:solidFill>
-                        <a:srgbClr val="DADDE6"/>
-                      </a:solidFill>
-                      <a:prstDash val="solid"/>
-                    </a:lnT>
-                    <a:lnB w="9525" cap="flat" cmpd="sng" algn="ctr">
-                      <a:solidFill>
-                        <a:srgbClr val="DADDE6"/>
-                      </a:solidFill>
-                      <a:prstDash val="solid"/>
-                    </a:lnB>
-                    <a:solidFill>
-                      <a:srgbClr val="FFFFFF"/>
-                    </a:solidFill>
-                  </a:tcPr>
-                </a:tc>
-              </a:tr>
-              <a:tr h="384048">
-                <a:tc>
-                  <a:txBody>
-                    <a:bodyPr wrap="square"/>
-                    <a:lstStyle/>
-                    <a:p>
-                      <a:pPr algn="l"/>
-                      <a:r>
-                        <a:rPr sz="1100" b="0">
-                          <a:solidFill>
-                            <a:srgbClr val="22223B"/>
-                          </a:solidFill>
-                          <a:latin typeface="BIZ UDGothic"/>
-                          <a:ea typeface="BIZ UDGothic"/>
-                          <a:cs typeface="BIZ UDGothic"/>
-                        </a:rPr>
-                        <a:t>data.directionRule</a:t>
-                      </a:r>
-                    </a:p>
-                  </a:txBody>
-                  <a:tcPr marL="109728" marR="109728" marT="45720" marB="45720" anchor="ctr">
-                    <a:lnL w="9525" cap="flat" cmpd="sng" algn="ctr">
-                      <a:solidFill>
-                        <a:srgbClr val="DADDE6"/>
-                      </a:solidFill>
-                      <a:prstDash val="solid"/>
-                    </a:lnL>
-                    <a:lnR w="9525" cap="flat" cmpd="sng" algn="ctr">
-                      <a:solidFill>
-                        <a:srgbClr val="DADDE6"/>
-                      </a:solidFill>
-                      <a:prstDash val="solid"/>
-                    </a:lnR>
-                    <a:lnT w="9525" cap="flat" cmpd="sng" algn="ctr">
-                      <a:solidFill>
-                        <a:srgbClr val="DADDE6"/>
-                      </a:solidFill>
-                      <a:prstDash val="solid"/>
-                    </a:lnT>
-                    <a:lnB w="9525" cap="flat" cmpd="sng" algn="ctr">
-                      <a:solidFill>
-                        <a:srgbClr val="DADDE6"/>
-                      </a:solidFill>
-                      <a:prstDash val="solid"/>
-                    </a:lnB>
-                    <a:solidFill>
-                      <a:srgbClr val="FFFFFF"/>
-                    </a:solidFill>
-                  </a:tcPr>
-                </a:tc>
-                <a:tc>
-                  <a:txBody>
-                    <a:bodyPr wrap="square"/>
-                    <a:lstStyle/>
-                    <a:p>
-                      <a:pPr algn="l"/>
-                      <a:r>
-                        <a:rPr sz="1100" b="0">
-                          <a:solidFill>
-                            <a:srgbClr val="22223B"/>
-                          </a:solidFill>
-                          <a:latin typeface="BIZ UDGothic"/>
-                          <a:ea typeface="BIZ UDGothic"/>
-                          <a:cs typeface="BIZ UDGothic"/>
-                        </a:rPr>
-                        <a:t>"serpentine"</a:t>
-                      </a:r>
-                    </a:p>
-                  </a:txBody>
-                  <a:tcPr marL="109728" marR="109728" marT="45720" marB="45720" anchor="ctr">
-                    <a:lnL w="9525" cap="flat" cmpd="sng" algn="ctr">
-                      <a:solidFill>
-                        <a:srgbClr val="DADDE6"/>
-                      </a:solidFill>
-                      <a:prstDash val="solid"/>
-                    </a:lnL>
-                    <a:lnR w="9525" cap="flat" cmpd="sng" algn="ctr">
-                      <a:solidFill>
-                        <a:srgbClr val="DADDE6"/>
-                      </a:solidFill>
-                      <a:prstDash val="solid"/>
-                    </a:lnR>
-                    <a:lnT w="9525" cap="flat" cmpd="sng" algn="ctr">
-                      <a:solidFill>
-                        <a:srgbClr val="DADDE6"/>
-                      </a:solidFill>
-                      <a:prstDash val="solid"/>
-                    </a:lnT>
-                    <a:lnB w="9525" cap="flat" cmpd="sng" algn="ctr">
-                      <a:solidFill>
-                        <a:srgbClr val="DADDE6"/>
-                      </a:solidFill>
-                      <a:prstDash val="solid"/>
-                    </a:lnB>
-                    <a:solidFill>
-                      <a:srgbClr val="FFFFFF"/>
-                    </a:solidFill>
-                  </a:tcPr>
-                </a:tc>
-                <a:tc>
-                  <a:txBody>
-                    <a:bodyPr wrap="square"/>
-                    <a:lstStyle/>
-                    <a:p>
-                      <a:pPr algn="l"/>
-                      <a:r>
-                        <a:rPr sz="1100" b="0">
-                          <a:solidFill>
-                            <a:srgbClr val="22223B"/>
-                          </a:solidFill>
-                          <a:latin typeface="BIZ UDGothic"/>
-                          <a:ea typeface="BIZ UDGothic"/>
-                          <a:cs typeface="BIZ UDGothic"/>
-                        </a:rPr>
-                        <a:t>Direction が無い行に付ける Scan 方向（一筆書き）</a:t>
+                        <a:t>Direction が無い行に付ける Scan 方向（一筆書き）・1 と 2 の入れ替え</a:t>
                       </a:r>
                     </a:p>
                   </a:txBody>
@@ -30176,7 +29780,7 @@
                   </a:tcPr>
                 </a:tc>
               </a:tr>
-              <a:tr h="384048">
+              <a:tr h="402336">
                 <a:tc>
                   <a:txBody>
                     <a:bodyPr wrap="square"/>
@@ -30192,7 +29796,7 @@
                           <a:ea typeface="BIZ UDGothic"/>
                           <a:cs typeface="BIZ UDGothic"/>
                         </a:rPr>
-                        <a:t>data.invertDirection</a:t>
+                        <a:t>data.coordinateMode</a:t>
                       </a:r>
                     </a:p>
                   </a:txBody>
@@ -30241,7 +29845,7 @@
                           <a:ea typeface="BIZ UDGothic"/>
                           <a:cs typeface="BIZ UDGothic"/>
                         </a:rPr>
-                        <a:t>false</a:t>
+                        <a:t>"shotMark"</a:t>
                       </a:r>
                     </a:p>
                   </a:txBody>
@@ -30290,7 +29894,7 @@
                           <a:ea typeface="BIZ UDGothic"/>
                           <a:cs typeface="BIZ UDGothic"/>
                         </a:rPr>
-                        <a:t>付ける 1 と 2 を入れ替える</a:t>
+                        <a:t>座標の定義（shotMark：Shot 中心＋Shot 内、absolute：絶対座標だけ）</a:t>
                       </a:r>
                     </a:p>
                   </a:txBody>
@@ -30339,7 +29943,7 @@
                           <a:ea typeface="BIZ UDGothic"/>
                           <a:cs typeface="BIZ UDGothic"/>
                         </a:rPr>
-                        <a:t>1. Scan 方向</a:t>
+                        <a:t>1. 座標の定義</a:t>
                       </a:r>
                     </a:p>
                   </a:txBody>
@@ -30374,7 +29978,205 @@
                   </a:tcPr>
                 </a:tc>
               </a:tr>
-              <a:tr h="384048">
+              <a:tr h="402336">
+                <a:tc>
+                  <a:txBody>
+                    <a:bodyPr wrap="square"/>
+                    <a:lstStyle/>
+                    <a:p>
+                      <a:pPr algn="l"/>
+                      <a:r>
+                        <a:rPr sz="1100" b="0">
+                          <a:solidFill>
+                            <a:srgbClr val="22223B"/>
+                          </a:solidFill>
+                          <a:latin typeface="BIZ UDGothic"/>
+                          <a:ea typeface="BIZ UDGothic"/>
+                          <a:cs typeface="BIZ UDGothic"/>
+                        </a:rPr>
+                        <a:t>data.valueColumn・valueUnit</a:t>
+                      </a:r>
+                    </a:p>
+                  </a:txBody>
+                  <a:tcPr marL="109728" marR="109728" marT="45720" marB="45720" anchor="ctr">
+                    <a:lnL w="9525" cap="flat" cmpd="sng" algn="ctr">
+                      <a:solidFill>
+                        <a:srgbClr val="DADDE6"/>
+                      </a:solidFill>
+                      <a:prstDash val="solid"/>
+                    </a:lnL>
+                    <a:lnR w="9525" cap="flat" cmpd="sng" algn="ctr">
+                      <a:solidFill>
+                        <a:srgbClr val="DADDE6"/>
+                      </a:solidFill>
+                      <a:prstDash val="solid"/>
+                    </a:lnR>
+                    <a:lnT w="9525" cap="flat" cmpd="sng" algn="ctr">
+                      <a:solidFill>
+                        <a:srgbClr val="DADDE6"/>
+                      </a:solidFill>
+                      <a:prstDash val="solid"/>
+                    </a:lnT>
+                    <a:lnB w="9525" cap="flat" cmpd="sng" algn="ctr">
+                      <a:solidFill>
+                        <a:srgbClr val="DADDE6"/>
+                      </a:solidFill>
+                      <a:prstDash val="solid"/>
+                    </a:lnB>
+                    <a:solidFill>
+                      <a:srgbClr val="FFFFFF"/>
+                    </a:solidFill>
+                  </a:tcPr>
+                </a:tc>
+                <a:tc>
+                  <a:txBody>
+                    <a:bodyPr wrap="square"/>
+                    <a:lstStyle/>
+                    <a:p>
+                      <a:pPr algn="l"/>
+                      <a:r>
+                        <a:rPr sz="1100" b="0">
+                          <a:solidFill>
+                            <a:srgbClr val="22223B"/>
+                          </a:solidFill>
+                          <a:latin typeface="BIZ UDGothic"/>
+                          <a:ea typeface="BIZ UDGothic"/>
+                          <a:cs typeface="BIZ UDGothic"/>
+                        </a:rPr>
+                        <a:t>""・"nm"</a:t>
+                      </a:r>
+                    </a:p>
+                  </a:txBody>
+                  <a:tcPr marL="109728" marR="109728" marT="45720" marB="45720" anchor="ctr">
+                    <a:lnL w="9525" cap="flat" cmpd="sng" algn="ctr">
+                      <a:solidFill>
+                        <a:srgbClr val="DADDE6"/>
+                      </a:solidFill>
+                      <a:prstDash val="solid"/>
+                    </a:lnL>
+                    <a:lnR w="9525" cap="flat" cmpd="sng" algn="ctr">
+                      <a:solidFill>
+                        <a:srgbClr val="DADDE6"/>
+                      </a:solidFill>
+                      <a:prstDash val="solid"/>
+                    </a:lnR>
+                    <a:lnT w="9525" cap="flat" cmpd="sng" algn="ctr">
+                      <a:solidFill>
+                        <a:srgbClr val="DADDE6"/>
+                      </a:solidFill>
+                      <a:prstDash val="solid"/>
+                    </a:lnT>
+                    <a:lnB w="9525" cap="flat" cmpd="sng" algn="ctr">
+                      <a:solidFill>
+                        <a:srgbClr val="DADDE6"/>
+                      </a:solidFill>
+                      <a:prstDash val="solid"/>
+                    </a:lnB>
+                    <a:solidFill>
+                      <a:srgbClr val="FFFFFF"/>
+                    </a:solidFill>
+                  </a:tcPr>
+                </a:tc>
+                <a:tc>
+                  <a:txBody>
+                    <a:bodyPr wrap="square"/>
+                    <a:lstStyle/>
+                    <a:p>
+                      <a:pPr algn="l"/>
+                      <a:r>
+                        <a:rPr sz="1100" b="0">
+                          <a:solidFill>
+                            <a:srgbClr val="22223B"/>
+                          </a:solidFill>
+                          <a:latin typeface="BIZ UDGothic"/>
+                          <a:ea typeface="BIZ UDGothic"/>
+                          <a:cs typeface="BIZ UDGothic"/>
+                        </a:rPr>
+                        <a:t>推定する値（空 = X・Y 成分、列の名前 = 膜厚などの1変数）と単位</a:t>
+                      </a:r>
+                    </a:p>
+                  </a:txBody>
+                  <a:tcPr marL="109728" marR="109728" marT="45720" marB="45720" anchor="ctr">
+                    <a:lnL w="9525" cap="flat" cmpd="sng" algn="ctr">
+                      <a:solidFill>
+                        <a:srgbClr val="DADDE6"/>
+                      </a:solidFill>
+                      <a:prstDash val="solid"/>
+                    </a:lnL>
+                    <a:lnR w="9525" cap="flat" cmpd="sng" algn="ctr">
+                      <a:solidFill>
+                        <a:srgbClr val="DADDE6"/>
+                      </a:solidFill>
+                      <a:prstDash val="solid"/>
+                    </a:lnR>
+                    <a:lnT w="9525" cap="flat" cmpd="sng" algn="ctr">
+                      <a:solidFill>
+                        <a:srgbClr val="DADDE6"/>
+                      </a:solidFill>
+                      <a:prstDash val="solid"/>
+                    </a:lnT>
+                    <a:lnB w="9525" cap="flat" cmpd="sng" algn="ctr">
+                      <a:solidFill>
+                        <a:srgbClr val="DADDE6"/>
+                      </a:solidFill>
+                      <a:prstDash val="solid"/>
+                    </a:lnB>
+                    <a:solidFill>
+                      <a:srgbClr val="FFFFFF"/>
+                    </a:solidFill>
+                  </a:tcPr>
+                </a:tc>
+                <a:tc>
+                  <a:txBody>
+                    <a:bodyPr wrap="square"/>
+                    <a:lstStyle/>
+                    <a:p>
+                      <a:pPr algn="l"/>
+                      <a:r>
+                        <a:rPr sz="1100" b="0">
+                          <a:solidFill>
+                            <a:srgbClr val="22223B"/>
+                          </a:solidFill>
+                          <a:latin typeface="BIZ UDGothic"/>
+                          <a:ea typeface="BIZ UDGothic"/>
+                          <a:cs typeface="BIZ UDGothic"/>
+                        </a:rPr>
+                        <a:t>1. 推定する値</a:t>
+                      </a:r>
+                    </a:p>
+                  </a:txBody>
+                  <a:tcPr marL="109728" marR="109728" marT="45720" marB="45720" anchor="ctr">
+                    <a:lnL w="9525" cap="flat" cmpd="sng" algn="ctr">
+                      <a:solidFill>
+                        <a:srgbClr val="DADDE6"/>
+                      </a:solidFill>
+                      <a:prstDash val="solid"/>
+                    </a:lnL>
+                    <a:lnR w="9525" cap="flat" cmpd="sng" algn="ctr">
+                      <a:solidFill>
+                        <a:srgbClr val="DADDE6"/>
+                      </a:solidFill>
+                      <a:prstDash val="solid"/>
+                    </a:lnR>
+                    <a:lnT w="9525" cap="flat" cmpd="sng" algn="ctr">
+                      <a:solidFill>
+                        <a:srgbClr val="DADDE6"/>
+                      </a:solidFill>
+                      <a:prstDash val="solid"/>
+                    </a:lnT>
+                    <a:lnB w="9525" cap="flat" cmpd="sng" algn="ctr">
+                      <a:solidFill>
+                        <a:srgbClr val="DADDE6"/>
+                      </a:solidFill>
+                      <a:prstDash val="solid"/>
+                    </a:lnB>
+                    <a:solidFill>
+                      <a:srgbClr val="FFFFFF"/>
+                    </a:solidFill>
+                  </a:tcPr>
+                </a:tc>
+              </a:tr>
+              <a:tr h="402336">
                 <a:tc>
                   <a:txBody>
                     <a:bodyPr wrap="square"/>
@@ -30572,7 +30374,7 @@
                   </a:tcPr>
                 </a:tc>
               </a:tr>
-              <a:tr h="384048">
+              <a:tr h="402336">
                 <a:tc>
                   <a:txBody>
                     <a:bodyPr wrap="square"/>
@@ -30770,7 +30572,7 @@
                   </a:tcPr>
                 </a:tc>
               </a:tr>
-              <a:tr h="384048">
+              <a:tr h="402336">
                 <a:tc>
                   <a:txBody>
                     <a:bodyPr wrap="square"/>

--- a/matlab_app/docs/defaults_guide/デフォルト設定の編集ガイド.pptx
+++ b/matlab_app/docs/defaults_guide/デフォルト設定の編集ガイド.pptx
@@ -9990,7 +9990,7 @@
                 <a:gridCol w="4206240"/>
                 <a:gridCol w="1536192"/>
               </a:tblGrid>
-              <a:tr h="402336">
+              <a:tr h="365760">
                 <a:tc>
                   <a:txBody>
                     <a:bodyPr wrap="square"/>
@@ -10188,7 +10188,7 @@
                   </a:tcPr>
                 </a:tc>
               </a:tr>
-              <a:tr h="402336">
+              <a:tr h="365760">
                 <a:tc>
                   <a:txBody>
                     <a:bodyPr wrap="square"/>
@@ -10386,7 +10386,7 @@
                   </a:tcPr>
                 </a:tc>
               </a:tr>
-              <a:tr h="402336">
+              <a:tr h="365760">
                 <a:tc>
                   <a:txBody>
                     <a:bodyPr wrap="square"/>
@@ -10584,7 +10584,7 @@
                   </a:tcPr>
                 </a:tc>
               </a:tr>
-              <a:tr h="402336">
+              <a:tr h="365760">
                 <a:tc>
                   <a:txBody>
                     <a:bodyPr wrap="square"/>
@@ -10782,7 +10782,7 @@
                   </a:tcPr>
                 </a:tc>
               </a:tr>
-              <a:tr h="402336">
+              <a:tr h="365760">
                 <a:tc>
                   <a:txBody>
                     <a:bodyPr wrap="square"/>
@@ -10980,7 +10980,7 @@
                   </a:tcPr>
                 </a:tc>
               </a:tr>
-              <a:tr h="402336">
+              <a:tr h="365760">
                 <a:tc>
                   <a:txBody>
                     <a:bodyPr wrap="square"/>
@@ -11178,7 +11178,205 @@
                   </a:tcPr>
                 </a:tc>
               </a:tr>
-              <a:tr h="402336">
+              <a:tr h="365760">
+                <a:tc>
+                  <a:txBody>
+                    <a:bodyPr wrap="square"/>
+                    <a:lstStyle/>
+                    <a:p>
+                      <a:pPr algn="l"/>
+                      <a:r>
+                        <a:rPr sz="1100" b="0">
+                          <a:solidFill>
+                            <a:srgbClr val="22223B"/>
+                          </a:solidFill>
+                          <a:latin typeface="BIZ UDGothic"/>
+                          <a:ea typeface="BIZ UDGothic"/>
+                          <a:cs typeface="BIZ UDGothic"/>
+                        </a:rPr>
+                        <a:t>methods.rbfe</a:t>
+                      </a:r>
+                    </a:p>
+                  </a:txBody>
+                  <a:tcPr marL="109728" marR="109728" marT="45720" marB="45720" anchor="ctr">
+                    <a:lnL w="9525" cap="flat" cmpd="sng" algn="ctr">
+                      <a:solidFill>
+                        <a:srgbClr val="DADDE6"/>
+                      </a:solidFill>
+                      <a:prstDash val="solid"/>
+                    </a:lnL>
+                    <a:lnR w="9525" cap="flat" cmpd="sng" algn="ctr">
+                      <a:solidFill>
+                        <a:srgbClr val="DADDE6"/>
+                      </a:solidFill>
+                      <a:prstDash val="solid"/>
+                    </a:lnR>
+                    <a:lnT w="9525" cap="flat" cmpd="sng" algn="ctr">
+                      <a:solidFill>
+                        <a:srgbClr val="DADDE6"/>
+                      </a:solidFill>
+                      <a:prstDash val="solid"/>
+                    </a:lnT>
+                    <a:lnB w="9525" cap="flat" cmpd="sng" algn="ctr">
+                      <a:solidFill>
+                        <a:srgbClr val="DADDE6"/>
+                      </a:solidFill>
+                      <a:prstDash val="solid"/>
+                    </a:lnB>
+                    <a:solidFill>
+                      <a:srgbClr val="FFFFFF"/>
+                    </a:solidFill>
+                  </a:tcPr>
+                </a:tc>
+                <a:tc>
+                  <a:txBody>
+                    <a:bodyPr wrap="square"/>
+                    <a:lstStyle/>
+                    <a:p>
+                      <a:pPr algn="l"/>
+                      <a:r>
+                        <a:rPr sz="1100" b="0">
+                          <a:solidFill>
+                            <a:srgbClr val="22223B"/>
+                          </a:solidFill>
+                          <a:latin typeface="BIZ UDGothic"/>
+                          <a:ea typeface="BIZ UDGothic"/>
+                          <a:cs typeface="BIZ UDGothic"/>
+                        </a:rPr>
+                        <a:t>false（4 領域）</a:t>
+                      </a:r>
+                    </a:p>
+                  </a:txBody>
+                  <a:tcPr marL="109728" marR="109728" marT="45720" marB="45720" anchor="ctr">
+                    <a:lnL w="9525" cap="flat" cmpd="sng" algn="ctr">
+                      <a:solidFill>
+                        <a:srgbClr val="DADDE6"/>
+                      </a:solidFill>
+                      <a:prstDash val="solid"/>
+                    </a:lnL>
+                    <a:lnR w="9525" cap="flat" cmpd="sng" algn="ctr">
+                      <a:solidFill>
+                        <a:srgbClr val="DADDE6"/>
+                      </a:solidFill>
+                      <a:prstDash val="solid"/>
+                    </a:lnR>
+                    <a:lnT w="9525" cap="flat" cmpd="sng" algn="ctr">
+                      <a:solidFill>
+                        <a:srgbClr val="DADDE6"/>
+                      </a:solidFill>
+                      <a:prstDash val="solid"/>
+                    </a:lnT>
+                    <a:lnB w="9525" cap="flat" cmpd="sng" algn="ctr">
+                      <a:solidFill>
+                        <a:srgbClr val="DADDE6"/>
+                      </a:solidFill>
+                      <a:prstDash val="solid"/>
+                    </a:lnB>
+                    <a:solidFill>
+                      <a:srgbClr val="FFFFFF"/>
+                    </a:solidFill>
+                  </a:tcPr>
+                </a:tc>
+                <a:tc>
+                  <a:txBody>
+                    <a:bodyPr wrap="square"/>
+                    <a:lstStyle/>
+                    <a:p>
+                      <a:pPr algn="l"/>
+                      <a:r>
+                        <a:rPr sz="1100" b="0">
+                          <a:solidFill>
+                            <a:srgbClr val="22223B"/>
+                          </a:solidFill>
+                          <a:latin typeface="BIZ UDGothic"/>
+                          <a:ea typeface="BIZ UDGothic"/>
+                          <a:cs typeface="BIZ UDGothic"/>
+                        </a:rPr>
+                        <a:t>RBFe（仮）：領域分割 TPS の GAM（regions：領域の数）</a:t>
+                      </a:r>
+                    </a:p>
+                  </a:txBody>
+                  <a:tcPr marL="109728" marR="109728" marT="45720" marB="45720" anchor="ctr">
+                    <a:lnL w="9525" cap="flat" cmpd="sng" algn="ctr">
+                      <a:solidFill>
+                        <a:srgbClr val="DADDE6"/>
+                      </a:solidFill>
+                      <a:prstDash val="solid"/>
+                    </a:lnL>
+                    <a:lnR w="9525" cap="flat" cmpd="sng" algn="ctr">
+                      <a:solidFill>
+                        <a:srgbClr val="DADDE6"/>
+                      </a:solidFill>
+                      <a:prstDash val="solid"/>
+                    </a:lnR>
+                    <a:lnT w="9525" cap="flat" cmpd="sng" algn="ctr">
+                      <a:solidFill>
+                        <a:srgbClr val="DADDE6"/>
+                      </a:solidFill>
+                      <a:prstDash val="solid"/>
+                    </a:lnT>
+                    <a:lnB w="9525" cap="flat" cmpd="sng" algn="ctr">
+                      <a:solidFill>
+                        <a:srgbClr val="DADDE6"/>
+                      </a:solidFill>
+                      <a:prstDash val="solid"/>
+                    </a:lnB>
+                    <a:solidFill>
+                      <a:srgbClr val="FFFFFF"/>
+                    </a:solidFill>
+                  </a:tcPr>
+                </a:tc>
+                <a:tc>
+                  <a:txBody>
+                    <a:bodyPr wrap="square"/>
+                    <a:lstStyle/>
+                    <a:p>
+                      <a:pPr algn="l"/>
+                      <a:r>
+                        <a:rPr sz="1100" b="0">
+                          <a:solidFill>
+                            <a:srgbClr val="22223B"/>
+                          </a:solidFill>
+                          <a:latin typeface="BIZ UDGothic"/>
+                          <a:ea typeface="BIZ UDGothic"/>
+                          <a:cs typeface="BIZ UDGothic"/>
+                        </a:rPr>
+                        <a:t>2. RBFe（仮）</a:t>
+                      </a:r>
+                    </a:p>
+                  </a:txBody>
+                  <a:tcPr marL="109728" marR="109728" marT="45720" marB="45720" anchor="ctr">
+                    <a:lnL w="9525" cap="flat" cmpd="sng" algn="ctr">
+                      <a:solidFill>
+                        <a:srgbClr val="DADDE6"/>
+                      </a:solidFill>
+                      <a:prstDash val="solid"/>
+                    </a:lnL>
+                    <a:lnR w="9525" cap="flat" cmpd="sng" algn="ctr">
+                      <a:solidFill>
+                        <a:srgbClr val="DADDE6"/>
+                      </a:solidFill>
+                      <a:prstDash val="solid"/>
+                    </a:lnR>
+                    <a:lnT w="9525" cap="flat" cmpd="sng" algn="ctr">
+                      <a:solidFill>
+                        <a:srgbClr val="DADDE6"/>
+                      </a:solidFill>
+                      <a:prstDash val="solid"/>
+                    </a:lnT>
+                    <a:lnB w="9525" cap="flat" cmpd="sng" algn="ctr">
+                      <a:solidFill>
+                        <a:srgbClr val="DADDE6"/>
+                      </a:solidFill>
+                      <a:prstDash val="solid"/>
+                    </a:lnB>
+                    <a:solidFill>
+                      <a:srgbClr val="FFFFFF"/>
+                    </a:solidFill>
+                  </a:tcPr>
+                </a:tc>
+              </a:tr>
+              <a:tr h="365760">
                 <a:tc>
                   <a:txBody>
                     <a:bodyPr wrap="square"/>
@@ -11376,7 +11574,7 @@
                   </a:tcPr>
                 </a:tc>
               </a:tr>
-              <a:tr h="402336">
+              <a:tr h="365760">
                 <a:tc>
                   <a:txBody>
                     <a:bodyPr wrap="square"/>
@@ -11574,7 +11772,7 @@
                   </a:tcPr>
                 </a:tc>
               </a:tr>
-              <a:tr h="402336">
+              <a:tr h="365760">
                 <a:tc>
                   <a:txBody>
                     <a:bodyPr wrap="square"/>
@@ -11772,7 +11970,7 @@
                   </a:tcPr>
                 </a:tc>
               </a:tr>
-              <a:tr h="402336">
+              <a:tr h="365760">
                 <a:tc>
                   <a:txBody>
                     <a:bodyPr wrap="square"/>
@@ -12286,7 +12484,7 @@
         </p:nvGraphicFramePr>
         <p:xfrm>
           <a:off x="548640" y="1371600"/>
-          <a:ext cx="5532120" cy="3538728"/>
+          <a:ext cx="5532120" cy="3657600"/>
         </p:xfrm>
         <a:graphic>
           <a:graphicData uri="http://schemas.openxmlformats.org/drawingml/2006/table">
@@ -12296,7 +12494,7 @@
                 <a:gridCol w="3429000"/>
                 <a:gridCol w="2103120"/>
               </a:tblGrid>
-              <a:tr h="393192">
+              <a:tr h="365760">
                 <a:tc>
                   <a:txBody>
                     <a:bodyPr wrap="square"/>
@@ -12396,7 +12594,7 @@
                   </a:tcPr>
                 </a:tc>
               </a:tr>
-              <a:tr h="393192">
+              <a:tr h="365760">
                 <a:tc>
                   <a:txBody>
                     <a:bodyPr wrap="square"/>
@@ -12496,7 +12694,7 @@
                   </a:tcPr>
                 </a:tc>
               </a:tr>
-              <a:tr h="393192">
+              <a:tr h="365760">
                 <a:tc>
                   <a:txBody>
                     <a:bodyPr wrap="square"/>
@@ -12596,7 +12794,7 @@
                   </a:tcPr>
                 </a:tc>
               </a:tr>
-              <a:tr h="393192">
+              <a:tr h="365760">
                 <a:tc>
                   <a:txBody>
                     <a:bodyPr wrap="square"/>
@@ -12696,7 +12894,7 @@
                   </a:tcPr>
                 </a:tc>
               </a:tr>
-              <a:tr h="393192">
+              <a:tr h="365760">
                 <a:tc>
                   <a:txBody>
                     <a:bodyPr wrap="square"/>
@@ -12796,7 +12994,7 @@
                   </a:tcPr>
                 </a:tc>
               </a:tr>
-              <a:tr h="393192">
+              <a:tr h="365760">
                 <a:tc>
                   <a:txBody>
                     <a:bodyPr wrap="square"/>
@@ -12896,7 +13094,7 @@
                   </a:tcPr>
                 </a:tc>
               </a:tr>
-              <a:tr h="393192">
+              <a:tr h="365760">
                 <a:tc>
                   <a:txBody>
                     <a:bodyPr wrap="square"/>
@@ -12996,7 +13194,7 @@
                   </a:tcPr>
                 </a:tc>
               </a:tr>
-              <a:tr h="393192">
+              <a:tr h="365760">
                 <a:tc>
                   <a:txBody>
                     <a:bodyPr wrap="square"/>
@@ -13096,7 +13294,7 @@
                   </a:tcPr>
                 </a:tc>
               </a:tr>
-              <a:tr h="393192">
+              <a:tr h="365760">
                 <a:tc>
                   <a:txBody>
                     <a:bodyPr wrap="square"/>
@@ -13162,6 +13360,106 @@
                           <a:cs typeface="BIZ UDGothic"/>
                         </a:rPr>
                         <a:t>10 ・ 7</a:t>
+                      </a:r>
+                    </a:p>
+                  </a:txBody>
+                  <a:tcPr marL="109728" marR="109728" marT="45720" marB="45720" anchor="ctr">
+                    <a:lnL w="9525" cap="flat" cmpd="sng" algn="ctr">
+                      <a:solidFill>
+                        <a:srgbClr val="DADDE6"/>
+                      </a:solidFill>
+                      <a:prstDash val="solid"/>
+                    </a:lnL>
+                    <a:lnR w="9525" cap="flat" cmpd="sng" algn="ctr">
+                      <a:solidFill>
+                        <a:srgbClr val="DADDE6"/>
+                      </a:solidFill>
+                      <a:prstDash val="solid"/>
+                    </a:lnR>
+                    <a:lnT w="9525" cap="flat" cmpd="sng" algn="ctr">
+                      <a:solidFill>
+                        <a:srgbClr val="DADDE6"/>
+                      </a:solidFill>
+                      <a:prstDash val="solid"/>
+                    </a:lnT>
+                    <a:lnB w="9525" cap="flat" cmpd="sng" algn="ctr">
+                      <a:solidFill>
+                        <a:srgbClr val="DADDE6"/>
+                      </a:solidFill>
+                      <a:prstDash val="solid"/>
+                    </a:lnB>
+                    <a:solidFill>
+                      <a:srgbClr val="FFFFFF"/>
+                    </a:solidFill>
+                  </a:tcPr>
+                </a:tc>
+              </a:tr>
+              <a:tr h="365760">
+                <a:tc>
+                  <a:txBody>
+                    <a:bodyPr wrap="square"/>
+                    <a:lstStyle/>
+                    <a:p>
+                      <a:pPr algn="l"/>
+                      <a:r>
+                        <a:rPr sz="1150" b="0">
+                          <a:solidFill>
+                            <a:srgbClr val="22223B"/>
+                          </a:solidFill>
+                          <a:latin typeface="BIZ UDGothic"/>
+                          <a:ea typeface="BIZ UDGothic"/>
+                          <a:cs typeface="BIZ UDGothic"/>
+                        </a:rPr>
+                        <a:t>rbfeOverlap ・ rbfeMinPoints</a:t>
+                      </a:r>
+                    </a:p>
+                  </a:txBody>
+                  <a:tcPr marL="109728" marR="109728" marT="45720" marB="45720" anchor="ctr">
+                    <a:lnL w="9525" cap="flat" cmpd="sng" algn="ctr">
+                      <a:solidFill>
+                        <a:srgbClr val="DADDE6"/>
+                      </a:solidFill>
+                      <a:prstDash val="solid"/>
+                    </a:lnL>
+                    <a:lnR w="9525" cap="flat" cmpd="sng" algn="ctr">
+                      <a:solidFill>
+                        <a:srgbClr val="DADDE6"/>
+                      </a:solidFill>
+                      <a:prstDash val="solid"/>
+                    </a:lnR>
+                    <a:lnT w="9525" cap="flat" cmpd="sng" algn="ctr">
+                      <a:solidFill>
+                        <a:srgbClr val="DADDE6"/>
+                      </a:solidFill>
+                      <a:prstDash val="solid"/>
+                    </a:lnT>
+                    <a:lnB w="9525" cap="flat" cmpd="sng" algn="ctr">
+                      <a:solidFill>
+                        <a:srgbClr val="DADDE6"/>
+                      </a:solidFill>
+                      <a:prstDash val="solid"/>
+                    </a:lnB>
+                    <a:solidFill>
+                      <a:srgbClr val="FFFFFF"/>
+                    </a:solidFill>
+                  </a:tcPr>
+                </a:tc>
+                <a:tc>
+                  <a:txBody>
+                    <a:bodyPr wrap="square"/>
+                    <a:lstStyle/>
+                    <a:p>
+                      <a:pPr algn="l"/>
+                      <a:r>
+                        <a:rPr sz="1150" b="0">
+                          <a:solidFill>
+                            <a:srgbClr val="22223B"/>
+                          </a:solidFill>
+                          <a:latin typeface="BIZ UDGothic"/>
+                          <a:ea typeface="BIZ UDGothic"/>
+                          <a:cs typeface="BIZ UDGothic"/>
+                        </a:rPr>
+                        <a:t>1.5 ・ 10</a:t>
                       </a:r>
                     </a:p>
                   </a:txBody>
@@ -14255,7 +14553,7 @@
                 <a:ea typeface="BIZ UDGothic"/>
                 <a:cs typeface="BIZ UDGothic"/>
               </a:rPr>
-              <a:t>options は Python 版と同じ値。変えると推定の結果が変わり、Python 版との照合テスト（TestPythonReference）が合わなくなる</a:t>
+              <a:t>options（rbfe… を除く）は Python 版と同じ値。変えると推定の結果が変わり、Python 版との照合テスト（TestPythonReference）が合わなくなる</a:t>
             </a:r>
           </a:p>
         </p:txBody>
@@ -16609,7 +16907,7 @@
                 <a:ea typeface="BIZ UDGothic"/>
                 <a:cs typeface="BIZ UDGothic"/>
               </a:rPr>
-              <a:t>cd tests → runAllTests。「成功 154 件、失敗 0 件、未完了 0 件」（2026-10-25 時点の件数）</a:t>
+              <a:t>cd tests → runAllTests。「成功 160 件、失敗 0 件、未完了 0 件」（2026-10-25 時点の件数）</a:t>
             </a:r>
           </a:p>
         </p:txBody>

--- a/matlab_app/docs/defaults_guide/デフォルト設定の編集ガイド.pptx
+++ b/matlab_app/docs/defaults_guide/デフォルト設定の編集ガイド.pptx
@@ -518,7 +518,7 @@
           <a:lstStyle/>
           <a:p>
             <a:r>
-              <a:t>管理者が、検証ツールの初期設定（評価の条件・比べる手法・画面の初期値）を変えるときの手順書。3つの変え方（設定ファイルを配る・既定の設定ファイルを置く・コードの初期値を変える）と、項目ごとの初期値、注意点、確かめ方をまとめる。</a:t>
+              <a:t>管理者が、面内推定評価ツールの初期設定（評価の条件・比べる手法・画面の初期値）を変えるときの手順書。3つの変え方（設定ファイルを配る・既定の設定ファイルを置く・コードの初期値を変える）と、項目ごとの初期値、注意点、確かめ方をまとめる。</a:t>
             </a:r>
           </a:p>
         </p:txBody>
@@ -2088,7 +2088,7 @@
                 <a:ea typeface="BIZ UDGothic"/>
                 <a:cs typeface="BIZ UDGothic"/>
               </a:rPr>
-              <a:t>管理者向け手順書 ｜ アライメント計測値の面内推定 検証ツール（MATLAB）</a:t>
+              <a:t>管理者向け手順書 ｜ 面内推定評価ツール（MATLAB）</a:t>
             </a:r>
           </a:p>
         </p:txBody>
@@ -2849,10 +2849,10 @@
             <a:tbl>
               <a:tblPr firstRow="0" bandRow="0"/>
               <a:tblGrid>
-                <a:gridCol w="3108960"/>
-                <a:gridCol w="1691640"/>
-                <a:gridCol w="4645152"/>
-                <a:gridCol w="1645920"/>
+                <a:gridCol w="3520440"/>
+                <a:gridCol w="1463040"/>
+                <a:gridCol w="4553712"/>
+                <a:gridCol w="1554480"/>
               </a:tblGrid>
               <a:tr h="384048">
                 <a:tc>
@@ -3166,7 +3166,7 @@
                           <a:ea typeface="BIZ UDGothic"/>
                           <a:cs typeface="BIZ UDGothic"/>
                         </a:rPr>
-                        <a:t>選び方（複数で比べる）：ioptimal・doptimal・random・manual・file・mark</a:t>
+                        <a:t>選び方（複数で比べる）：ioptimal・doptimal・random・manual・file・mark・markd</a:t>
                       </a:r>
                     </a:p>
                   </a:txBody>
@@ -4454,7 +4454,7 @@
                           <a:ea typeface="BIZ UDGothic"/>
                           <a:cs typeface="BIZ UDGothic"/>
                         </a:rPr>
-                        <a:t>sampling.requiredShots</a:t>
+                        <a:t>sampling.requiredShots・requireOuterShots</a:t>
                       </a:r>
                     </a:p>
                   </a:txBody>
@@ -4503,7 +4503,7 @@
                           <a:ea typeface="BIZ UDGothic"/>
                           <a:cs typeface="BIZ UDGothic"/>
                         </a:rPr>
-                        <a:t>[]（なし）</a:t>
+                        <a:t>[]・false</a:t>
                       </a:r>
                     </a:p>
                   </a:txBody>
@@ -4552,205 +4552,7 @@
                           <a:ea typeface="BIZ UDGothic"/>
                           <a:cs typeface="BIZ UDGothic"/>
                         </a:rPr>
-                        <a:t>必ず計測する shotNo（拡張 I 最適計画）</a:t>
-                      </a:r>
-                    </a:p>
-                  </a:txBody>
-                  <a:tcPr marL="109728" marR="109728" marT="45720" marB="45720" anchor="ctr">
-                    <a:lnL w="9525" cap="flat" cmpd="sng" algn="ctr">
-                      <a:solidFill>
-                        <a:srgbClr val="DADDE6"/>
-                      </a:solidFill>
-                      <a:prstDash val="solid"/>
-                    </a:lnL>
-                    <a:lnR w="9525" cap="flat" cmpd="sng" algn="ctr">
-                      <a:solidFill>
-                        <a:srgbClr val="DADDE6"/>
-                      </a:solidFill>
-                      <a:prstDash val="solid"/>
-                    </a:lnR>
-                    <a:lnT w="9525" cap="flat" cmpd="sng" algn="ctr">
-                      <a:solidFill>
-                        <a:srgbClr val="DADDE6"/>
-                      </a:solidFill>
-                      <a:prstDash val="solid"/>
-                    </a:lnT>
-                    <a:lnB w="9525" cap="flat" cmpd="sng" algn="ctr">
-                      <a:solidFill>
-                        <a:srgbClr val="DADDE6"/>
-                      </a:solidFill>
-                      <a:prstDash val="solid"/>
-                    </a:lnB>
-                    <a:solidFill>
-                      <a:srgbClr val="FFFFFF"/>
-                    </a:solidFill>
-                  </a:tcPr>
-                </a:tc>
-                <a:tc>
-                  <a:txBody>
-                    <a:bodyPr wrap="square"/>
-                    <a:lstStyle/>
-                    <a:p>
-                      <a:pPr algn="l"/>
-                      <a:r>
-                        <a:rPr sz="1100" b="0">
-                          <a:solidFill>
-                            <a:srgbClr val="22223B"/>
-                          </a:solidFill>
-                          <a:latin typeface="BIZ UDGothic"/>
-                          <a:ea typeface="BIZ UDGothic"/>
-                          <a:cs typeface="BIZ UDGothic"/>
-                        </a:rPr>
-                        <a:t>2. 必ず計測</a:t>
-                      </a:r>
-                    </a:p>
-                  </a:txBody>
-                  <a:tcPr marL="109728" marR="109728" marT="45720" marB="45720" anchor="ctr">
-                    <a:lnL w="9525" cap="flat" cmpd="sng" algn="ctr">
-                      <a:solidFill>
-                        <a:srgbClr val="DADDE6"/>
-                      </a:solidFill>
-                      <a:prstDash val="solid"/>
-                    </a:lnL>
-                    <a:lnR w="9525" cap="flat" cmpd="sng" algn="ctr">
-                      <a:solidFill>
-                        <a:srgbClr val="DADDE6"/>
-                      </a:solidFill>
-                      <a:prstDash val="solid"/>
-                    </a:lnR>
-                    <a:lnT w="9525" cap="flat" cmpd="sng" algn="ctr">
-                      <a:solidFill>
-                        <a:srgbClr val="DADDE6"/>
-                      </a:solidFill>
-                      <a:prstDash val="solid"/>
-                    </a:lnT>
-                    <a:lnB w="9525" cap="flat" cmpd="sng" algn="ctr">
-                      <a:solidFill>
-                        <a:srgbClr val="DADDE6"/>
-                      </a:solidFill>
-                      <a:prstDash val="solid"/>
-                    </a:lnB>
-                    <a:solidFill>
-                      <a:srgbClr val="FFFFFF"/>
-                    </a:solidFill>
-                  </a:tcPr>
-                </a:tc>
-              </a:tr>
-              <a:tr h="384048">
-                <a:tc>
-                  <a:txBody>
-                    <a:bodyPr wrap="square"/>
-                    <a:lstStyle/>
-                    <a:p>
-                      <a:pPr algn="l"/>
-                      <a:r>
-                        <a:rPr sz="1100" b="0">
-                          <a:solidFill>
-                            <a:srgbClr val="22223B"/>
-                          </a:solidFill>
-                          <a:latin typeface="BIZ UDGothic"/>
-                          <a:ea typeface="BIZ UDGothic"/>
-                          <a:cs typeface="BIZ UDGothic"/>
-                        </a:rPr>
-                        <a:t>sampling.requireOuterShots</a:t>
-                      </a:r>
-                    </a:p>
-                  </a:txBody>
-                  <a:tcPr marL="109728" marR="109728" marT="45720" marB="45720" anchor="ctr">
-                    <a:lnL w="9525" cap="flat" cmpd="sng" algn="ctr">
-                      <a:solidFill>
-                        <a:srgbClr val="DADDE6"/>
-                      </a:solidFill>
-                      <a:prstDash val="solid"/>
-                    </a:lnL>
-                    <a:lnR w="9525" cap="flat" cmpd="sng" algn="ctr">
-                      <a:solidFill>
-                        <a:srgbClr val="DADDE6"/>
-                      </a:solidFill>
-                      <a:prstDash val="solid"/>
-                    </a:lnR>
-                    <a:lnT w="9525" cap="flat" cmpd="sng" algn="ctr">
-                      <a:solidFill>
-                        <a:srgbClr val="DADDE6"/>
-                      </a:solidFill>
-                      <a:prstDash val="solid"/>
-                    </a:lnT>
-                    <a:lnB w="9525" cap="flat" cmpd="sng" algn="ctr">
-                      <a:solidFill>
-                        <a:srgbClr val="DADDE6"/>
-                      </a:solidFill>
-                      <a:prstDash val="solid"/>
-                    </a:lnB>
-                    <a:solidFill>
-                      <a:srgbClr val="FFFFFF"/>
-                    </a:solidFill>
-                  </a:tcPr>
-                </a:tc>
-                <a:tc>
-                  <a:txBody>
-                    <a:bodyPr wrap="square"/>
-                    <a:lstStyle/>
-                    <a:p>
-                      <a:pPr algn="l"/>
-                      <a:r>
-                        <a:rPr sz="1100" b="0">
-                          <a:solidFill>
-                            <a:srgbClr val="22223B"/>
-                          </a:solidFill>
-                          <a:latin typeface="BIZ UDGothic"/>
-                          <a:ea typeface="BIZ UDGothic"/>
-                          <a:cs typeface="BIZ UDGothic"/>
-                        </a:rPr>
-                        <a:t>false</a:t>
-                      </a:r>
-                    </a:p>
-                  </a:txBody>
-                  <a:tcPr marL="109728" marR="109728" marT="45720" marB="45720" anchor="ctr">
-                    <a:lnL w="9525" cap="flat" cmpd="sng" algn="ctr">
-                      <a:solidFill>
-                        <a:srgbClr val="DADDE6"/>
-                      </a:solidFill>
-                      <a:prstDash val="solid"/>
-                    </a:lnL>
-                    <a:lnR w="9525" cap="flat" cmpd="sng" algn="ctr">
-                      <a:solidFill>
-                        <a:srgbClr val="DADDE6"/>
-                      </a:solidFill>
-                      <a:prstDash val="solid"/>
-                    </a:lnR>
-                    <a:lnT w="9525" cap="flat" cmpd="sng" algn="ctr">
-                      <a:solidFill>
-                        <a:srgbClr val="DADDE6"/>
-                      </a:solidFill>
-                      <a:prstDash val="solid"/>
-                    </a:lnT>
-                    <a:lnB w="9525" cap="flat" cmpd="sng" algn="ctr">
-                      <a:solidFill>
-                        <a:srgbClr val="DADDE6"/>
-                      </a:solidFill>
-                      <a:prstDash val="solid"/>
-                    </a:lnB>
-                    <a:solidFill>
-                      <a:srgbClr val="FFFFFF"/>
-                    </a:solidFill>
-                  </a:tcPr>
-                </a:tc>
-                <a:tc>
-                  <a:txBody>
-                    <a:bodyPr wrap="square"/>
-                    <a:lstStyle/>
-                    <a:p>
-                      <a:pPr algn="l"/>
-                      <a:r>
-                        <a:rPr sz="1100" b="0">
-                          <a:solidFill>
-                            <a:srgbClr val="22223B"/>
-                          </a:solidFill>
-                          <a:latin typeface="BIZ UDGothic"/>
-                          <a:ea typeface="BIZ UDGothic"/>
-                          <a:cs typeface="BIZ UDGothic"/>
-                        </a:rPr>
-                        <a:t>最外周の Shot をすべて必ず計測する</a:t>
+                        <a:t>必ず計測する shotNo（拡張 I 最適計画）・最外周の Shot をすべて</a:t>
                       </a:r>
                     </a:p>
                   </a:txBody>
@@ -4948,7 +4750,205 @@
                           <a:ea typeface="BIZ UDGothic"/>
                           <a:cs typeface="BIZ UDGothic"/>
                         </a:rPr>
-                        <a:t>Mark 単位：1 Shot あたりの計測 Mark 数（1 = 全 Shot で1点）</a:t>
+                        <a:t>Mark 単位：1 Shot あたりの計測 Mark 数（countBy = rate なら計測率）</a:t>
+                      </a:r>
+                    </a:p>
+                  </a:txBody>
+                  <a:tcPr marL="109728" marR="109728" marT="45720" marB="45720" anchor="ctr">
+                    <a:lnL w="9525" cap="flat" cmpd="sng" algn="ctr">
+                      <a:solidFill>
+                        <a:srgbClr val="DADDE6"/>
+                      </a:solidFill>
+                      <a:prstDash val="solid"/>
+                    </a:lnL>
+                    <a:lnR w="9525" cap="flat" cmpd="sng" algn="ctr">
+                      <a:solidFill>
+                        <a:srgbClr val="DADDE6"/>
+                      </a:solidFill>
+                      <a:prstDash val="solid"/>
+                    </a:lnR>
+                    <a:lnT w="9525" cap="flat" cmpd="sng" algn="ctr">
+                      <a:solidFill>
+                        <a:srgbClr val="DADDE6"/>
+                      </a:solidFill>
+                      <a:prstDash val="solid"/>
+                    </a:lnT>
+                    <a:lnB w="9525" cap="flat" cmpd="sng" algn="ctr">
+                      <a:solidFill>
+                        <a:srgbClr val="DADDE6"/>
+                      </a:solidFill>
+                      <a:prstDash val="solid"/>
+                    </a:lnB>
+                    <a:solidFill>
+                      <a:srgbClr val="FFFFFF"/>
+                    </a:solidFill>
+                  </a:tcPr>
+                </a:tc>
+                <a:tc>
+                  <a:txBody>
+                    <a:bodyPr wrap="square"/>
+                    <a:lstStyle/>
+                    <a:p>
+                      <a:pPr algn="l"/>
+                      <a:r>
+                        <a:rPr sz="1100" b="0">
+                          <a:solidFill>
+                            <a:srgbClr val="22223B"/>
+                          </a:solidFill>
+                          <a:latin typeface="BIZ UDGothic"/>
+                          <a:ea typeface="BIZ UDGothic"/>
+                          <a:cs typeface="BIZ UDGothic"/>
+                        </a:rPr>
+                        <a:t>2. Mark 単位</a:t>
+                      </a:r>
+                    </a:p>
+                  </a:txBody>
+                  <a:tcPr marL="109728" marR="109728" marT="45720" marB="45720" anchor="ctr">
+                    <a:lnL w="9525" cap="flat" cmpd="sng" algn="ctr">
+                      <a:solidFill>
+                        <a:srgbClr val="DADDE6"/>
+                      </a:solidFill>
+                      <a:prstDash val="solid"/>
+                    </a:lnL>
+                    <a:lnR w="9525" cap="flat" cmpd="sng" algn="ctr">
+                      <a:solidFill>
+                        <a:srgbClr val="DADDE6"/>
+                      </a:solidFill>
+                      <a:prstDash val="solid"/>
+                    </a:lnR>
+                    <a:lnT w="9525" cap="flat" cmpd="sng" algn="ctr">
+                      <a:solidFill>
+                        <a:srgbClr val="DADDE6"/>
+                      </a:solidFill>
+                      <a:prstDash val="solid"/>
+                    </a:lnT>
+                    <a:lnB w="9525" cap="flat" cmpd="sng" algn="ctr">
+                      <a:solidFill>
+                        <a:srgbClr val="DADDE6"/>
+                      </a:solidFill>
+                      <a:prstDash val="solid"/>
+                    </a:lnB>
+                    <a:solidFill>
+                      <a:srgbClr val="FFFFFF"/>
+                    </a:solidFill>
+                  </a:tcPr>
+                </a:tc>
+              </a:tr>
+              <a:tr h="384048">
+                <a:tc>
+                  <a:txBody>
+                    <a:bodyPr wrap="square"/>
+                    <a:lstStyle/>
+                    <a:p>
+                      <a:pPr algn="l"/>
+                      <a:r>
+                        <a:rPr sz="1100" b="0">
+                          <a:solidFill>
+                            <a:srgbClr val="22223B"/>
+                          </a:solidFill>
+                          <a:latin typeface="BIZ UDGothic"/>
+                          <a:ea typeface="BIZ UDGothic"/>
+                          <a:cs typeface="BIZ UDGothic"/>
+                        </a:rPr>
+                        <a:t>sampling.markRequirePerShot・markMinPerShot</a:t>
+                      </a:r>
+                    </a:p>
+                  </a:txBody>
+                  <a:tcPr marL="109728" marR="109728" marT="45720" marB="45720" anchor="ctr">
+                    <a:lnL w="9525" cap="flat" cmpd="sng" algn="ctr">
+                      <a:solidFill>
+                        <a:srgbClr val="DADDE6"/>
+                      </a:solidFill>
+                      <a:prstDash val="solid"/>
+                    </a:lnL>
+                    <a:lnR w="9525" cap="flat" cmpd="sng" algn="ctr">
+                      <a:solidFill>
+                        <a:srgbClr val="DADDE6"/>
+                      </a:solidFill>
+                      <a:prstDash val="solid"/>
+                    </a:lnR>
+                    <a:lnT w="9525" cap="flat" cmpd="sng" algn="ctr">
+                      <a:solidFill>
+                        <a:srgbClr val="DADDE6"/>
+                      </a:solidFill>
+                      <a:prstDash val="solid"/>
+                    </a:lnT>
+                    <a:lnB w="9525" cap="flat" cmpd="sng" algn="ctr">
+                      <a:solidFill>
+                        <a:srgbClr val="DADDE6"/>
+                      </a:solidFill>
+                      <a:prstDash val="solid"/>
+                    </a:lnB>
+                    <a:solidFill>
+                      <a:srgbClr val="FFFFFF"/>
+                    </a:solidFill>
+                  </a:tcPr>
+                </a:tc>
+                <a:tc>
+                  <a:txBody>
+                    <a:bodyPr wrap="square"/>
+                    <a:lstStyle/>
+                    <a:p>
+                      <a:pPr algn="l"/>
+                      <a:r>
+                        <a:rPr sz="1100" b="0">
+                          <a:solidFill>
+                            <a:srgbClr val="22223B"/>
+                          </a:solidFill>
+                          <a:latin typeface="BIZ UDGothic"/>
+                          <a:ea typeface="BIZ UDGothic"/>
+                          <a:cs typeface="BIZ UDGothic"/>
+                        </a:rPr>
+                        <a:t>true・1</a:t>
+                      </a:r>
+                    </a:p>
+                  </a:txBody>
+                  <a:tcPr marL="109728" marR="109728" marT="45720" marB="45720" anchor="ctr">
+                    <a:lnL w="9525" cap="flat" cmpd="sng" algn="ctr">
+                      <a:solidFill>
+                        <a:srgbClr val="DADDE6"/>
+                      </a:solidFill>
+                      <a:prstDash val="solid"/>
+                    </a:lnL>
+                    <a:lnR w="9525" cap="flat" cmpd="sng" algn="ctr">
+                      <a:solidFill>
+                        <a:srgbClr val="DADDE6"/>
+                      </a:solidFill>
+                      <a:prstDash val="solid"/>
+                    </a:lnR>
+                    <a:lnT w="9525" cap="flat" cmpd="sng" algn="ctr">
+                      <a:solidFill>
+                        <a:srgbClr val="DADDE6"/>
+                      </a:solidFill>
+                      <a:prstDash val="solid"/>
+                    </a:lnT>
+                    <a:lnB w="9525" cap="flat" cmpd="sng" algn="ctr">
+                      <a:solidFill>
+                        <a:srgbClr val="DADDE6"/>
+                      </a:solidFill>
+                      <a:prstDash val="solid"/>
+                    </a:lnB>
+                    <a:solidFill>
+                      <a:srgbClr val="FFFFFF"/>
+                    </a:solidFill>
+                  </a:tcPr>
+                </a:tc>
+                <a:tc>
+                  <a:txBody>
+                    <a:bodyPr wrap="square"/>
+                    <a:lstStyle/>
+                    <a:p>
+                      <a:pPr algn="l"/>
+                      <a:r>
+                        <a:rPr sz="1100" b="0">
+                          <a:solidFill>
+                            <a:srgbClr val="22223B"/>
+                          </a:solidFill>
+                          <a:latin typeface="BIZ UDGothic"/>
+                          <a:ea typeface="BIZ UDGothic"/>
+                          <a:cs typeface="BIZ UDGothic"/>
+                        </a:rPr>
+                        <a:t>Mark 単位：Shot ごとに n 点の計測を必須にする・n</a:t>
                       </a:r>
                     </a:p>
                   </a:txBody>
@@ -7571,7 +7571,7 @@
                 <a:ea typeface="BIZ UDGothic"/>
                 <a:cs typeface="BIZ UDGothic"/>
               </a:rPr>
-              <a:t>設定の項目④：evaluation（評価）・overlay（補正）</a:t>
+              <a:t>設定の項目④：evaluation・overlay（補正）・display（表示）</a:t>
             </a:r>
           </a:p>
         </p:txBody>
@@ -7656,7 +7656,7 @@
         </p:nvGraphicFramePr>
         <p:xfrm>
           <a:off x="548640" y="1371600"/>
-          <a:ext cx="11091672" cy="4023360"/>
+          <a:ext cx="11091672" cy="4123944"/>
         </p:xfrm>
         <a:graphic>
           <a:graphicData uri="http://schemas.openxmlformats.org/drawingml/2006/table">
@@ -7668,7 +7668,7 @@
                 <a:gridCol w="4279392"/>
                 <a:gridCol w="1508760"/>
               </a:tblGrid>
-              <a:tr h="402336">
+              <a:tr h="374904">
                 <a:tc>
                   <a:txBody>
                     <a:bodyPr wrap="square"/>
@@ -7866,7 +7866,7 @@
                   </a:tcPr>
                 </a:tc>
               </a:tr>
-              <a:tr h="402336">
+              <a:tr h="374904">
                 <a:tc>
                   <a:txBody>
                     <a:bodyPr wrap="square"/>
@@ -8064,7 +8064,7 @@
                   </a:tcPr>
                 </a:tc>
               </a:tr>
-              <a:tr h="402336">
+              <a:tr h="374904">
                 <a:tc>
                   <a:txBody>
                     <a:bodyPr wrap="square"/>
@@ -8262,7 +8262,7 @@
                   </a:tcPr>
                 </a:tc>
               </a:tr>
-              <a:tr h="402336">
+              <a:tr h="374904">
                 <a:tc>
                   <a:txBody>
                     <a:bodyPr wrap="square"/>
@@ -8460,7 +8460,7 @@
                   </a:tcPr>
                 </a:tc>
               </a:tr>
-              <a:tr h="402336">
+              <a:tr h="374904">
                 <a:tc>
                   <a:txBody>
                     <a:bodyPr wrap="square"/>
@@ -8658,7 +8658,7 @@
                   </a:tcPr>
                 </a:tc>
               </a:tr>
-              <a:tr h="402336">
+              <a:tr h="374904">
                 <a:tc>
                   <a:txBody>
                     <a:bodyPr wrap="square"/>
@@ -8856,7 +8856,7 @@
                   </a:tcPr>
                 </a:tc>
               </a:tr>
-              <a:tr h="402336">
+              <a:tr h="374904">
                 <a:tc>
                   <a:txBody>
                     <a:bodyPr wrap="square"/>
@@ -9054,7 +9054,7 @@
                   </a:tcPr>
                 </a:tc>
               </a:tr>
-              <a:tr h="402336">
+              <a:tr h="374904">
                 <a:tc>
                   <a:txBody>
                     <a:bodyPr wrap="square"/>
@@ -9252,7 +9252,7 @@
                   </a:tcPr>
                 </a:tc>
               </a:tr>
-              <a:tr h="402336">
+              <a:tr h="374904">
                 <a:tc>
                   <a:txBody>
                     <a:bodyPr wrap="square"/>
@@ -9450,7 +9450,7 @@
                   </a:tcPr>
                 </a:tc>
               </a:tr>
-              <a:tr h="402336">
+              <a:tr h="374904">
                 <a:tc>
                   <a:txBody>
                     <a:bodyPr wrap="square"/>
@@ -9662,6 +9662,204 @@
                   </a:tcPr>
                 </a:tc>
               </a:tr>
+              <a:tr h="374904">
+                <a:tc>
+                  <a:txBody>
+                    <a:bodyPr wrap="square"/>
+                    <a:lstStyle/>
+                    <a:p>
+                      <a:pPr algn="l"/>
+                      <a:r>
+                        <a:rPr sz="1100" b="0">
+                          <a:solidFill>
+                            <a:srgbClr val="22223B"/>
+                          </a:solidFill>
+                          <a:latin typeface="BIZ UDGothic"/>
+                          <a:ea typeface="BIZ UDGothic"/>
+                          <a:cs typeface="BIZ UDGothic"/>
+                        </a:rPr>
+                        <a:t>display.scan1Up・scan1Color・scan2Color</a:t>
+                      </a:r>
+                    </a:p>
+                  </a:txBody>
+                  <a:tcPr marL="109728" marR="109728" marT="45720" marB="45720" anchor="ctr">
+                    <a:lnL w="9525" cap="flat" cmpd="sng" algn="ctr">
+                      <a:solidFill>
+                        <a:srgbClr val="DADDE6"/>
+                      </a:solidFill>
+                      <a:prstDash val="solid"/>
+                    </a:lnL>
+                    <a:lnR w="9525" cap="flat" cmpd="sng" algn="ctr">
+                      <a:solidFill>
+                        <a:srgbClr val="DADDE6"/>
+                      </a:solidFill>
+                      <a:prstDash val="solid"/>
+                    </a:lnR>
+                    <a:lnT w="9525" cap="flat" cmpd="sng" algn="ctr">
+                      <a:solidFill>
+                        <a:srgbClr val="DADDE6"/>
+                      </a:solidFill>
+                      <a:prstDash val="solid"/>
+                    </a:lnT>
+                    <a:lnB w="9525" cap="flat" cmpd="sng" algn="ctr">
+                      <a:solidFill>
+                        <a:srgbClr val="DADDE6"/>
+                      </a:solidFill>
+                      <a:prstDash val="solid"/>
+                    </a:lnB>
+                    <a:solidFill>
+                      <a:srgbClr val="FFFFFF"/>
+                    </a:solidFill>
+                  </a:tcPr>
+                </a:tc>
+                <a:tc>
+                  <a:txBody>
+                    <a:bodyPr wrap="square"/>
+                    <a:lstStyle/>
+                    <a:p>
+                      <a:pPr algn="l"/>
+                      <a:r>
+                        <a:rPr sz="1100" b="0">
+                          <a:solidFill>
+                            <a:srgbClr val="22223B"/>
+                          </a:solidFill>
+                          <a:latin typeface="BIZ UDGothic"/>
+                          <a:ea typeface="BIZ UDGothic"/>
+                          <a:cs typeface="BIZ UDGothic"/>
+                        </a:rPr>
+                        <a:t>true・緑・紫</a:t>
+                      </a:r>
+                    </a:p>
+                  </a:txBody>
+                  <a:tcPr marL="109728" marR="109728" marT="45720" marB="45720" anchor="ctr">
+                    <a:lnL w="9525" cap="flat" cmpd="sng" algn="ctr">
+                      <a:solidFill>
+                        <a:srgbClr val="DADDE6"/>
+                      </a:solidFill>
+                      <a:prstDash val="solid"/>
+                    </a:lnL>
+                    <a:lnR w="9525" cap="flat" cmpd="sng" algn="ctr">
+                      <a:solidFill>
+                        <a:srgbClr val="DADDE6"/>
+                      </a:solidFill>
+                      <a:prstDash val="solid"/>
+                    </a:lnR>
+                    <a:lnT w="9525" cap="flat" cmpd="sng" algn="ctr">
+                      <a:solidFill>
+                        <a:srgbClr val="DADDE6"/>
+                      </a:solidFill>
+                      <a:prstDash val="solid"/>
+                    </a:lnT>
+                    <a:lnB w="9525" cap="flat" cmpd="sng" algn="ctr">
+                      <a:solidFill>
+                        <a:srgbClr val="DADDE6"/>
+                      </a:solidFill>
+                      <a:prstDash val="solid"/>
+                    </a:lnB>
+                    <a:solidFill>
+                      <a:srgbClr val="FFFFFF"/>
+                    </a:solidFill>
+                  </a:tcPr>
+                </a:tc>
+                <a:tc>
+                  <a:txBody>
+                    <a:bodyPr wrap="square"/>
+                    <a:lstStyle/>
+                    <a:p>
+                      <a:pPr algn="l"/>
+                      <a:r>
+                        <a:rPr sz="1100" b="0">
+                          <a:solidFill>
+                            <a:srgbClr val="22223B"/>
+                          </a:solidFill>
+                          <a:latin typeface="BIZ UDGothic"/>
+                          <a:ea typeface="BIZ UDGothic"/>
+                          <a:cs typeface="BIZ UDGothic"/>
+                        </a:rPr>
+                        <a:t>表示：Scan 方向 1 を上向き（▲）にするか・1・2 の色（RGB 0〜1）</a:t>
+                      </a:r>
+                    </a:p>
+                  </a:txBody>
+                  <a:tcPr marL="109728" marR="109728" marT="45720" marB="45720" anchor="ctr">
+                    <a:lnL w="9525" cap="flat" cmpd="sng" algn="ctr">
+                      <a:solidFill>
+                        <a:srgbClr val="DADDE6"/>
+                      </a:solidFill>
+                      <a:prstDash val="solid"/>
+                    </a:lnL>
+                    <a:lnR w="9525" cap="flat" cmpd="sng" algn="ctr">
+                      <a:solidFill>
+                        <a:srgbClr val="DADDE6"/>
+                      </a:solidFill>
+                      <a:prstDash val="solid"/>
+                    </a:lnR>
+                    <a:lnT w="9525" cap="flat" cmpd="sng" algn="ctr">
+                      <a:solidFill>
+                        <a:srgbClr val="DADDE6"/>
+                      </a:solidFill>
+                      <a:prstDash val="solid"/>
+                    </a:lnT>
+                    <a:lnB w="9525" cap="flat" cmpd="sng" algn="ctr">
+                      <a:solidFill>
+                        <a:srgbClr val="DADDE6"/>
+                      </a:solidFill>
+                      <a:prstDash val="solid"/>
+                    </a:lnB>
+                    <a:solidFill>
+                      <a:srgbClr val="FFFFFF"/>
+                    </a:solidFill>
+                  </a:tcPr>
+                </a:tc>
+                <a:tc>
+                  <a:txBody>
+                    <a:bodyPr wrap="square"/>
+                    <a:lstStyle/>
+                    <a:p>
+                      <a:pPr algn="l"/>
+                      <a:r>
+                        <a:rPr sz="1100" b="0">
+                          <a:solidFill>
+                            <a:srgbClr val="22223B"/>
+                          </a:solidFill>
+                          <a:latin typeface="BIZ UDGothic"/>
+                          <a:ea typeface="BIZ UDGothic"/>
+                          <a:cs typeface="BIZ UDGothic"/>
+                        </a:rPr>
+                        <a:t>2. 表示</a:t>
+                      </a:r>
+                    </a:p>
+                  </a:txBody>
+                  <a:tcPr marL="109728" marR="109728" marT="45720" marB="45720" anchor="ctr">
+                    <a:lnL w="9525" cap="flat" cmpd="sng" algn="ctr">
+                      <a:solidFill>
+                        <a:srgbClr val="DADDE6"/>
+                      </a:solidFill>
+                      <a:prstDash val="solid"/>
+                    </a:lnL>
+                    <a:lnR w="9525" cap="flat" cmpd="sng" algn="ctr">
+                      <a:solidFill>
+                        <a:srgbClr val="DADDE6"/>
+                      </a:solidFill>
+                      <a:prstDash val="solid"/>
+                    </a:lnR>
+                    <a:lnT w="9525" cap="flat" cmpd="sng" algn="ctr">
+                      <a:solidFill>
+                        <a:srgbClr val="DADDE6"/>
+                      </a:solidFill>
+                      <a:prstDash val="solid"/>
+                    </a:lnT>
+                    <a:lnB w="9525" cap="flat" cmpd="sng" algn="ctr">
+                      <a:solidFill>
+                        <a:srgbClr val="DADDE6"/>
+                      </a:solidFill>
+                      <a:prstDash val="solid"/>
+                    </a:lnB>
+                    <a:solidFill>
+                      <a:srgbClr val="FFFFFF"/>
+                    </a:solidFill>
+                  </a:tcPr>
+                </a:tc>
+              </a:tr>
             </a:tbl>
           </a:graphicData>
         </a:graphic>
@@ -12084,7 +12282,7 @@
                           <a:ea typeface="BIZ UDGothic"/>
                           <a:cs typeface="BIZ UDGothic"/>
                         </a:rPr>
-                        <a:t>Fringe Zernike（orders：次数 k。Z1〜Z(k+1)²）</a:t>
+                        <a:t>Fringe Zernike（orders：次数 k。factorModes：none・backfit）</a:t>
                       </a:r>
                     </a:p>
                   </a:txBody>
@@ -16907,7 +17105,7 @@
                 <a:ea typeface="BIZ UDGothic"/>
                 <a:cs typeface="BIZ UDGothic"/>
               </a:rPr>
-              <a:t>cd tests → runAllTests。「成功 160 件、失敗 0 件、未完了 0 件」（2026-10-25 時点の件数）</a:t>
+              <a:t>cd tests → runAllTests。「成功 173 件、失敗 0 件、未完了 0 件」（2026-10-26 時点の件数）</a:t>
             </a:r>
           </a:p>
         </p:txBody>
@@ -29088,7 +29286,7 @@
                 <a:gridCol w="4370832"/>
                 <a:gridCol w="1554480"/>
               </a:tblGrid>
-              <a:tr h="402336">
+              <a:tr h="365760">
                 <a:tc>
                   <a:txBody>
                     <a:bodyPr wrap="square"/>
@@ -29286,7 +29484,7 @@
                   </a:tcPr>
                 </a:tc>
               </a:tr>
-              <a:tr h="402336">
+              <a:tr h="365760">
                 <a:tc>
                   <a:txBody>
                     <a:bodyPr wrap="square"/>
@@ -29484,7 +29682,7 @@
                   </a:tcPr>
                 </a:tc>
               </a:tr>
-              <a:tr h="402336">
+              <a:tr h="365760">
                 <a:tc>
                   <a:txBody>
                     <a:bodyPr wrap="square"/>
@@ -29682,7 +29880,7 @@
                   </a:tcPr>
                 </a:tc>
               </a:tr>
-              <a:tr h="402336">
+              <a:tr h="365760">
                 <a:tc>
                   <a:txBody>
                     <a:bodyPr wrap="square"/>
@@ -29880,7 +30078,7 @@
                   </a:tcPr>
                 </a:tc>
               </a:tr>
-              <a:tr h="402336">
+              <a:tr h="365760">
                 <a:tc>
                   <a:txBody>
                     <a:bodyPr wrap="square"/>
@@ -30078,7 +30276,7 @@
                   </a:tcPr>
                 </a:tc>
               </a:tr>
-              <a:tr h="402336">
+              <a:tr h="365760">
                 <a:tc>
                   <a:txBody>
                     <a:bodyPr wrap="square"/>
@@ -30276,7 +30474,7 @@
                   </a:tcPr>
                 </a:tc>
               </a:tr>
-              <a:tr h="402336">
+              <a:tr h="365760">
                 <a:tc>
                   <a:txBody>
                     <a:bodyPr wrap="square"/>
@@ -30474,7 +30672,7 @@
                   </a:tcPr>
                 </a:tc>
               </a:tr>
-              <a:tr h="402336">
+              <a:tr h="365760">
                 <a:tc>
                   <a:txBody>
                     <a:bodyPr wrap="square"/>
@@ -30672,7 +30870,205 @@
                   </a:tcPr>
                 </a:tc>
               </a:tr>
-              <a:tr h="402336">
+              <a:tr h="365760">
+                <a:tc>
+                  <a:txBody>
+                    <a:bodyPr wrap="square"/>
+                    <a:lstStyle/>
+                    <a:p>
+                      <a:pPr algn="l"/>
+                      <a:r>
+                        <a:rPr sz="1100" b="0">
+                          <a:solidFill>
+                            <a:srgbClr val="22223B"/>
+                          </a:solidFill>
+                          <a:latin typeface="BIZ UDGothic"/>
+                          <a:ea typeface="BIZ UDGothic"/>
+                          <a:cs typeface="BIZ UDGothic"/>
+                        </a:rPr>
+                        <a:t>factors.evaluateSingles</a:t>
+                      </a:r>
+                    </a:p>
+                  </a:txBody>
+                  <a:tcPr marL="109728" marR="109728" marT="45720" marB="45720" anchor="ctr">
+                    <a:lnL w="9525" cap="flat" cmpd="sng" algn="ctr">
+                      <a:solidFill>
+                        <a:srgbClr val="DADDE6"/>
+                      </a:solidFill>
+                      <a:prstDash val="solid"/>
+                    </a:lnL>
+                    <a:lnR w="9525" cap="flat" cmpd="sng" algn="ctr">
+                      <a:solidFill>
+                        <a:srgbClr val="DADDE6"/>
+                      </a:solidFill>
+                      <a:prstDash val="solid"/>
+                    </a:lnR>
+                    <a:lnT w="9525" cap="flat" cmpd="sng" algn="ctr">
+                      <a:solidFill>
+                        <a:srgbClr val="DADDE6"/>
+                      </a:solidFill>
+                      <a:prstDash val="solid"/>
+                    </a:lnT>
+                    <a:lnB w="9525" cap="flat" cmpd="sng" algn="ctr">
+                      <a:solidFill>
+                        <a:srgbClr val="DADDE6"/>
+                      </a:solidFill>
+                      <a:prstDash val="solid"/>
+                    </a:lnB>
+                    <a:solidFill>
+                      <a:srgbClr val="FFFFFF"/>
+                    </a:solidFill>
+                  </a:tcPr>
+                </a:tc>
+                <a:tc>
+                  <a:txBody>
+                    <a:bodyPr wrap="square"/>
+                    <a:lstStyle/>
+                    <a:p>
+                      <a:pPr algn="l"/>
+                      <a:r>
+                        <a:rPr sz="1100" b="0">
+                          <a:solidFill>
+                            <a:srgbClr val="22223B"/>
+                          </a:solidFill>
+                          <a:latin typeface="BIZ UDGothic"/>
+                          <a:ea typeface="BIZ UDGothic"/>
+                          <a:cs typeface="BIZ UDGothic"/>
+                        </a:rPr>
+                        <a:t>false</a:t>
+                      </a:r>
+                    </a:p>
+                  </a:txBody>
+                  <a:tcPr marL="109728" marR="109728" marT="45720" marB="45720" anchor="ctr">
+                    <a:lnL w="9525" cap="flat" cmpd="sng" algn="ctr">
+                      <a:solidFill>
+                        <a:srgbClr val="DADDE6"/>
+                      </a:solidFill>
+                      <a:prstDash val="solid"/>
+                    </a:lnL>
+                    <a:lnR w="9525" cap="flat" cmpd="sng" algn="ctr">
+                      <a:solidFill>
+                        <a:srgbClr val="DADDE6"/>
+                      </a:solidFill>
+                      <a:prstDash val="solid"/>
+                    </a:lnR>
+                    <a:lnT w="9525" cap="flat" cmpd="sng" algn="ctr">
+                      <a:solidFill>
+                        <a:srgbClr val="DADDE6"/>
+                      </a:solidFill>
+                      <a:prstDash val="solid"/>
+                    </a:lnT>
+                    <a:lnB w="9525" cap="flat" cmpd="sng" algn="ctr">
+                      <a:solidFill>
+                        <a:srgbClr val="DADDE6"/>
+                      </a:solidFill>
+                      <a:prstDash val="solid"/>
+                    </a:lnB>
+                    <a:solidFill>
+                      <a:srgbClr val="FFFFFF"/>
+                    </a:solidFill>
+                  </a:tcPr>
+                </a:tc>
+                <a:tc>
+                  <a:txBody>
+                    <a:bodyPr wrap="square"/>
+                    <a:lstStyle/>
+                    <a:p>
+                      <a:pPr algn="l"/>
+                      <a:r>
+                        <a:rPr sz="1100" b="0">
+                          <a:solidFill>
+                            <a:srgbClr val="22223B"/>
+                          </a:solidFill>
+                          <a:latin typeface="BIZ UDGothic"/>
+                          <a:ea typeface="BIZ UDGothic"/>
+                          <a:cs typeface="BIZ UDGothic"/>
+                        </a:rPr>
+                        <a:t>チェックした質的変数を1つだけ使う手法も足して比べる</a:t>
+                      </a:r>
+                    </a:p>
+                  </a:txBody>
+                  <a:tcPr marL="109728" marR="109728" marT="45720" marB="45720" anchor="ctr">
+                    <a:lnL w="9525" cap="flat" cmpd="sng" algn="ctr">
+                      <a:solidFill>
+                        <a:srgbClr val="DADDE6"/>
+                      </a:solidFill>
+                      <a:prstDash val="solid"/>
+                    </a:lnL>
+                    <a:lnR w="9525" cap="flat" cmpd="sng" algn="ctr">
+                      <a:solidFill>
+                        <a:srgbClr val="DADDE6"/>
+                      </a:solidFill>
+                      <a:prstDash val="solid"/>
+                    </a:lnR>
+                    <a:lnT w="9525" cap="flat" cmpd="sng" algn="ctr">
+                      <a:solidFill>
+                        <a:srgbClr val="DADDE6"/>
+                      </a:solidFill>
+                      <a:prstDash val="solid"/>
+                    </a:lnT>
+                    <a:lnB w="9525" cap="flat" cmpd="sng" algn="ctr">
+                      <a:solidFill>
+                        <a:srgbClr val="DADDE6"/>
+                      </a:solidFill>
+                      <a:prstDash val="solid"/>
+                    </a:lnB>
+                    <a:solidFill>
+                      <a:srgbClr val="FFFFFF"/>
+                    </a:solidFill>
+                  </a:tcPr>
+                </a:tc>
+                <a:tc>
+                  <a:txBody>
+                    <a:bodyPr wrap="square"/>
+                    <a:lstStyle/>
+                    <a:p>
+                      <a:pPr algn="l"/>
+                      <a:r>
+                        <a:rPr sz="1100" b="0">
+                          <a:solidFill>
+                            <a:srgbClr val="22223B"/>
+                          </a:solidFill>
+                          <a:latin typeface="BIZ UDGothic"/>
+                          <a:ea typeface="BIZ UDGothic"/>
+                          <a:cs typeface="BIZ UDGothic"/>
+                        </a:rPr>
+                        <a:t>2. 1つだけ使う</a:t>
+                      </a:r>
+                    </a:p>
+                  </a:txBody>
+                  <a:tcPr marL="109728" marR="109728" marT="45720" marB="45720" anchor="ctr">
+                    <a:lnL w="9525" cap="flat" cmpd="sng" algn="ctr">
+                      <a:solidFill>
+                        <a:srgbClr val="DADDE6"/>
+                      </a:solidFill>
+                      <a:prstDash val="solid"/>
+                    </a:lnL>
+                    <a:lnR w="9525" cap="flat" cmpd="sng" algn="ctr">
+                      <a:solidFill>
+                        <a:srgbClr val="DADDE6"/>
+                      </a:solidFill>
+                      <a:prstDash val="solid"/>
+                    </a:lnR>
+                    <a:lnT w="9525" cap="flat" cmpd="sng" algn="ctr">
+                      <a:solidFill>
+                        <a:srgbClr val="DADDE6"/>
+                      </a:solidFill>
+                      <a:prstDash val="solid"/>
+                    </a:lnT>
+                    <a:lnB w="9525" cap="flat" cmpd="sng" algn="ctr">
+                      <a:solidFill>
+                        <a:srgbClr val="DADDE6"/>
+                      </a:solidFill>
+                      <a:prstDash val="solid"/>
+                    </a:lnB>
+                    <a:solidFill>
+                      <a:srgbClr val="FFFFFF"/>
+                    </a:solidFill>
+                  </a:tcPr>
+                </a:tc>
+              </a:tr>
+              <a:tr h="365760">
                 <a:tc>
                   <a:txBody>
                     <a:bodyPr wrap="square"/>
@@ -30870,7 +31266,7 @@
                   </a:tcPr>
                 </a:tc>
               </a:tr>
-              <a:tr h="402336">
+              <a:tr h="365760">
                 <a:tc>
                   <a:txBody>
                     <a:bodyPr wrap="square"/>

--- a/matlab_app/docs/defaults_guide/デフォルト設定の編集ガイド.pptx
+++ b/matlab_app/docs/defaults_guide/デフォルト設定の編集ガイド.pptx
@@ -868,7 +868,7 @@
           <a:lstStyle/>
           <a:p>
             <a:r>
-              <a:t>options は精度と時間の兼ね合いで決めた値。変えるときは模擬データで比べてから。画面の定数は AlignmentEstimationApp.m の先頭、時間の目安は estimateRunSeconds.m・exchangeSecondsGuide.m にある。</a:t>
+              <a:t>options は精度と時間の兼ね合いで決めた値。変えるときは模擬データで比べてから。画面の定数は +appui/Core.m の先頭（画面はタブごとのファイルに分けてあり、定数は共通の Core.m にまとめてある）、時間の目安は estimateRunSeconds.m・exchangeSecondsGuide.m にある。</a:t>
             </a:r>
           </a:p>
         </p:txBody>
@@ -27263,7 +27263,7 @@
                 <a:ea typeface="Courier New"/>
                 <a:cs typeface="Courier New"/>
               </a:rPr>
-              <a:t>AlignmentEstimationApp.m</a:t>
+              <a:t>+appui/Core.m</a:t>
             </a:r>
           </a:p>
         </p:txBody>
@@ -28229,7 +28229,7 @@
                           <a:ea typeface="BIZ UDGothic"/>
                           <a:cs typeface="BIZ UDGothic"/>
                         </a:rPr>
-                        <a:t>AlignmentEstimationApp.m（先頭）</a:t>
+                        <a:t>+appui/Core.m（先頭）</a:t>
                       </a:r>
                     </a:p>
                   </a:txBody>

--- a/matlab_app/docs/defaults_guide/デフォルト設定の編集ガイド.pptx
+++ b/matlab_app/docs/defaults_guide/デフォルト設定の編集ガイド.pptx
@@ -23,6 +23,7 @@
     <p:sldId id="271" r:id="rId22"/>
     <p:sldId id="272" r:id="rId23"/>
     <p:sldId id="273" r:id="rId24"/>
+    <p:sldId id="274" r:id="rId25"/>
   </p:sldIdLst>
   <p:notesMasterIdLst>
     <p:notesMasterId r:id="rId28"/>
@@ -728,7 +729,7 @@
           <a:lstStyle/>
           <a:p>
             <a:r>
-              <a:t>補正の式の書き方と、すべての補正の式は「7. ヘルプ」にまとめている。</a:t>
+              <a:t>補正の式の書き方と、すべての補正の式は「8. ヘルプ」にまとめている。</a:t>
             </a:r>
           </a:p>
         </p:txBody>
@@ -868,7 +869,7 @@
           <a:lstStyle/>
           <a:p>
             <a:r>
-              <a:t>options は精度と時間の兼ね合いで決めた値。変えるときは模擬データで比べてから。画面の定数は +appui/Core.m の先頭（画面はタブごとのファイルに分けてあり、定数は共通の Core.m にまとめてある）、時間の目安は estimateRunSeconds.m・exchangeSecondsGuide.m にある。</a:t>
+              <a:t>「7. Shot高次補正」のタブの初期値。excludedTerms は「VIF で選ぶ」や表の「使う」で変わり、「設定を保存…」の JSON にも入る。計算の方法と式は「8. ヘルプ」の「Shot 高次補正の評価」。</a:t>
             </a:r>
           </a:p>
         </p:txBody>
@@ -938,7 +939,7 @@
           <a:lstStyle/>
           <a:p>
             <a:r>
-              <a:t>JSON は書いた項目だけが変わる。コードでは学習 Shot 数の並び nShots も一緒に作る（shotCountList）。</a:t>
+              <a:t>options は精度と時間の兼ね合いで決めた値。変えるときは模擬データで比べてから。画面の定数は +appui/Core.m の先頭（画面はタブごとのファイルに分けてあり、定数は共通の Core.m にまとめてある）、時間の目安は estimateRunSeconds.m・exchangeSecondsGuide.m にある。</a:t>
             </a:r>
           </a:p>
         </p:txBody>
@@ -1008,7 +1009,7 @@
           <a:lstStyle/>
           <a:p>
             <a:r>
-              <a:t>設定ファイルは loadSettings が初期値の型に合わせて読む（文字の並び・数の行ベクトル）。知らない項目は無視する。</a:t>
+              <a:t>JSON は書いた項目だけが変わる。コードでは学習 Shot 数の並び nShots も一緒に作る（shotCountList）。</a:t>
             </a:r>
           </a:p>
         </p:txBody>
@@ -1078,7 +1079,7 @@
           <a:lstStyle/>
           <a:p>
             <a:r>
-              <a:t>テストは matlab_app/tests にある。1つのファイルだけ確かめるときは runtests('TestOverlay') のように指定する。</a:t>
+              <a:t>設定ファイルは loadSettings が初期値の型に合わせて読む（文字の並び・数の行ベクトル）。知らない項目は無視する。</a:t>
             </a:r>
           </a:p>
         </p:txBody>
@@ -1104,6 +1105,76 @@
 </file>
 
 <file path=ppt/notesSlides/notesSlide18.xml><?xml version="1.0" encoding="utf-8"?>
+<p:notes xmlns:a="http://schemas.openxmlformats.org/drawingml/2006/main" xmlns:p="http://schemas.openxmlformats.org/presentationml/2006/main" xmlns:r="http://schemas.openxmlformats.org/officeDocument/2006/relationships">
+  <p:cSld>
+    <p:spTree>
+      <p:nvGrpSpPr>
+        <p:cNvPr id="1" name=""/>
+        <p:cNvGrpSpPr/>
+        <p:nvPr/>
+      </p:nvGrpSpPr>
+      <p:grpSpPr>
+        <a:xfrm>
+          <a:off x="0" y="0"/>
+          <a:ext cx="0" cy="0"/>
+          <a:chOff x="0" y="0"/>
+          <a:chExt cx="0" cy="0"/>
+        </a:xfrm>
+      </p:grpSpPr>
+      <p:sp>
+        <p:nvSpPr>
+          <p:cNvPr id="2" name="Slide Image Placeholder 1"/>
+          <p:cNvSpPr>
+            <a:spLocks noGrp="1"/>
+          </p:cNvSpPr>
+          <p:nvPr>
+            <p:ph type="sldImg" idx="2"/>
+          </p:nvPr>
+        </p:nvSpPr>
+        <p:spPr/>
+      </p:sp>
+      <p:sp>
+        <p:nvSpPr>
+          <p:cNvPr id="3" name="Notes Placeholder 2"/>
+          <p:cNvSpPr>
+            <a:spLocks noGrp="1"/>
+          </p:cNvSpPr>
+          <p:nvPr>
+            <p:ph type="body" idx="3" sz="quarter"/>
+          </p:nvPr>
+        </p:nvSpPr>
+        <p:spPr/>
+        <p:txBody>
+          <a:bodyPr/>
+          <a:lstStyle/>
+          <a:p>
+            <a:r>
+              <a:t>テストは matlab_app/tests にある。1つのファイルだけ確かめるときは runtests('TestOverlay') のように指定する。</a:t>
+            </a:r>
+          </a:p>
+        </p:txBody>
+      </p:sp>
+      <p:sp>
+        <p:nvSpPr>
+          <p:cNvPr id="4" name="Slide Number Placeholder 3"/>
+          <p:cNvSpPr>
+            <a:spLocks noGrp="1"/>
+          </p:cNvSpPr>
+          <p:nvPr>
+            <p:ph type="sldNum" idx="5" sz="quarter"/>
+          </p:nvPr>
+        </p:nvSpPr>
+        <p:spPr/>
+      </p:sp>
+    </p:spTree>
+  </p:cSld>
+  <p:clrMapOvr>
+    <a:masterClrMapping/>
+  </p:clrMapOvr>
+</p:notes>
+</file>
+
+<file path=ppt/notesSlides/notesSlide19.xml><?xml version="1.0" encoding="utf-8"?>
 <p:notes xmlns:a="http://schemas.openxmlformats.org/drawingml/2006/main" xmlns:p="http://schemas.openxmlformats.org/presentationml/2006/main" xmlns:r="http://schemas.openxmlformats.org/officeDocument/2006/relationships">
   <p:cSld>
     <p:spTree>
@@ -12597,7 +12668,7 @@
                 <a:ea typeface="BIZ UDGothic"/>
                 <a:cs typeface="BIZ UDGothic"/>
               </a:rPr>
-              <a:t>手法の細かい設定（methods.options）と画面の定数</a:t>
+              <a:t>設定の項目⑥：highOrder（7. Shot高次補正）</a:t>
             </a:r>
           </a:p>
         </p:txBody>
@@ -12668,6 +12739,2252 @@
                 <a:cs typeface="BIZ UDGothic"/>
               </a:rPr>
               <a:t>14</a:t>
+            </a:r>
+          </a:p>
+        </p:txBody>
+      </p:sp>
+      <p:graphicFrame>
+        <p:nvGraphicFramePr>
+          <p:cNvPr id="6" name="Table 5"/>
+          <p:cNvGraphicFramePr>
+            <a:graphicFrameLocks noGrp="1"/>
+          </p:cNvGraphicFramePr>
+          <p:nvPr/>
+        </p:nvGraphicFramePr>
+        <p:xfrm>
+          <a:off x="548640" y="1371600"/>
+          <a:ext cx="11091672" cy="3621024"/>
+        </p:xfrm>
+        <a:graphic>
+          <a:graphicData uri="http://schemas.openxmlformats.org/drawingml/2006/table">
+            <a:tbl>
+              <a:tblPr firstRow="0" bandRow="0"/>
+              <a:tblGrid>
+                <a:gridCol w="3017520"/>
+                <a:gridCol w="2011680"/>
+                <a:gridCol w="4526280"/>
+                <a:gridCol w="1536192"/>
+              </a:tblGrid>
+              <a:tr h="402336">
+                <a:tc>
+                  <a:txBody>
+                    <a:bodyPr wrap="square"/>
+                    <a:lstStyle/>
+                    <a:p>
+                      <a:pPr algn="ctr"/>
+                      <a:r>
+                        <a:rPr sz="1200" b="1">
+                          <a:solidFill>
+                            <a:srgbClr val="FFFFFF"/>
+                          </a:solidFill>
+                          <a:latin typeface="BIZ UDGothic"/>
+                          <a:ea typeface="BIZ UDGothic"/>
+                          <a:cs typeface="BIZ UDGothic"/>
+                        </a:rPr>
+                        <a:t>項目（設定ファイルの名前）</a:t>
+                      </a:r>
+                    </a:p>
+                  </a:txBody>
+                  <a:tcPr marL="109728" marR="109728" marT="45720" marB="45720" anchor="ctr">
+                    <a:lnL w="9525" cap="flat" cmpd="sng" algn="ctr">
+                      <a:solidFill>
+                        <a:srgbClr val="DADDE6"/>
+                      </a:solidFill>
+                      <a:prstDash val="solid"/>
+                    </a:lnL>
+                    <a:lnR w="9525" cap="flat" cmpd="sng" algn="ctr">
+                      <a:solidFill>
+                        <a:srgbClr val="DADDE6"/>
+                      </a:solidFill>
+                      <a:prstDash val="solid"/>
+                    </a:lnR>
+                    <a:lnT w="9525" cap="flat" cmpd="sng" algn="ctr">
+                      <a:solidFill>
+                        <a:srgbClr val="DADDE6"/>
+                      </a:solidFill>
+                      <a:prstDash val="solid"/>
+                    </a:lnT>
+                    <a:lnB w="9525" cap="flat" cmpd="sng" algn="ctr">
+                      <a:solidFill>
+                        <a:srgbClr val="DADDE6"/>
+                      </a:solidFill>
+                      <a:prstDash val="solid"/>
+                    </a:lnB>
+                    <a:solidFill>
+                      <a:srgbClr val="4A4E69"/>
+                    </a:solidFill>
+                  </a:tcPr>
+                </a:tc>
+                <a:tc>
+                  <a:txBody>
+                    <a:bodyPr wrap="square"/>
+                    <a:lstStyle/>
+                    <a:p>
+                      <a:pPr algn="ctr"/>
+                      <a:r>
+                        <a:rPr sz="1200" b="1">
+                          <a:solidFill>
+                            <a:srgbClr val="FFFFFF"/>
+                          </a:solidFill>
+                          <a:latin typeface="BIZ UDGothic"/>
+                          <a:ea typeface="BIZ UDGothic"/>
+                          <a:cs typeface="BIZ UDGothic"/>
+                        </a:rPr>
+                        <a:t>初期値</a:t>
+                      </a:r>
+                    </a:p>
+                  </a:txBody>
+                  <a:tcPr marL="109728" marR="109728" marT="45720" marB="45720" anchor="ctr">
+                    <a:lnL w="9525" cap="flat" cmpd="sng" algn="ctr">
+                      <a:solidFill>
+                        <a:srgbClr val="DADDE6"/>
+                      </a:solidFill>
+                      <a:prstDash val="solid"/>
+                    </a:lnL>
+                    <a:lnR w="9525" cap="flat" cmpd="sng" algn="ctr">
+                      <a:solidFill>
+                        <a:srgbClr val="DADDE6"/>
+                      </a:solidFill>
+                      <a:prstDash val="solid"/>
+                    </a:lnR>
+                    <a:lnT w="9525" cap="flat" cmpd="sng" algn="ctr">
+                      <a:solidFill>
+                        <a:srgbClr val="DADDE6"/>
+                      </a:solidFill>
+                      <a:prstDash val="solid"/>
+                    </a:lnT>
+                    <a:lnB w="9525" cap="flat" cmpd="sng" algn="ctr">
+                      <a:solidFill>
+                        <a:srgbClr val="DADDE6"/>
+                      </a:solidFill>
+                      <a:prstDash val="solid"/>
+                    </a:lnB>
+                    <a:solidFill>
+                      <a:srgbClr val="4A4E69"/>
+                    </a:solidFill>
+                  </a:tcPr>
+                </a:tc>
+                <a:tc>
+                  <a:txBody>
+                    <a:bodyPr wrap="square"/>
+                    <a:lstStyle/>
+                    <a:p>
+                      <a:pPr algn="ctr"/>
+                      <a:r>
+                        <a:rPr sz="1200" b="1">
+                          <a:solidFill>
+                            <a:srgbClr val="FFFFFF"/>
+                          </a:solidFill>
+                          <a:latin typeface="BIZ UDGothic"/>
+                          <a:ea typeface="BIZ UDGothic"/>
+                          <a:cs typeface="BIZ UDGothic"/>
+                        </a:rPr>
+                        <a:t>意味</a:t>
+                      </a:r>
+                    </a:p>
+                  </a:txBody>
+                  <a:tcPr marL="109728" marR="109728" marT="45720" marB="45720" anchor="ctr">
+                    <a:lnL w="9525" cap="flat" cmpd="sng" algn="ctr">
+                      <a:solidFill>
+                        <a:srgbClr val="DADDE6"/>
+                      </a:solidFill>
+                      <a:prstDash val="solid"/>
+                    </a:lnL>
+                    <a:lnR w="9525" cap="flat" cmpd="sng" algn="ctr">
+                      <a:solidFill>
+                        <a:srgbClr val="DADDE6"/>
+                      </a:solidFill>
+                      <a:prstDash val="solid"/>
+                    </a:lnR>
+                    <a:lnT w="9525" cap="flat" cmpd="sng" algn="ctr">
+                      <a:solidFill>
+                        <a:srgbClr val="DADDE6"/>
+                      </a:solidFill>
+                      <a:prstDash val="solid"/>
+                    </a:lnT>
+                    <a:lnB w="9525" cap="flat" cmpd="sng" algn="ctr">
+                      <a:solidFill>
+                        <a:srgbClr val="DADDE6"/>
+                      </a:solidFill>
+                      <a:prstDash val="solid"/>
+                    </a:lnB>
+                    <a:solidFill>
+                      <a:srgbClr val="4A4E69"/>
+                    </a:solidFill>
+                  </a:tcPr>
+                </a:tc>
+                <a:tc>
+                  <a:txBody>
+                    <a:bodyPr wrap="square"/>
+                    <a:lstStyle/>
+                    <a:p>
+                      <a:pPr algn="ctr"/>
+                      <a:r>
+                        <a:rPr sz="1200" b="1">
+                          <a:solidFill>
+                            <a:srgbClr val="FFFFFF"/>
+                          </a:solidFill>
+                          <a:latin typeface="BIZ UDGothic"/>
+                          <a:ea typeface="BIZ UDGothic"/>
+                          <a:cs typeface="BIZ UDGothic"/>
+                        </a:rPr>
+                        <a:t>画面</a:t>
+                      </a:r>
+                    </a:p>
+                  </a:txBody>
+                  <a:tcPr marL="109728" marR="109728" marT="45720" marB="45720" anchor="ctr">
+                    <a:lnL w="9525" cap="flat" cmpd="sng" algn="ctr">
+                      <a:solidFill>
+                        <a:srgbClr val="DADDE6"/>
+                      </a:solidFill>
+                      <a:prstDash val="solid"/>
+                    </a:lnL>
+                    <a:lnR w="9525" cap="flat" cmpd="sng" algn="ctr">
+                      <a:solidFill>
+                        <a:srgbClr val="DADDE6"/>
+                      </a:solidFill>
+                      <a:prstDash val="solid"/>
+                    </a:lnR>
+                    <a:lnT w="9525" cap="flat" cmpd="sng" algn="ctr">
+                      <a:solidFill>
+                        <a:srgbClr val="DADDE6"/>
+                      </a:solidFill>
+                      <a:prstDash val="solid"/>
+                    </a:lnT>
+                    <a:lnB w="9525" cap="flat" cmpd="sng" algn="ctr">
+                      <a:solidFill>
+                        <a:srgbClr val="DADDE6"/>
+                      </a:solidFill>
+                      <a:prstDash val="solid"/>
+                    </a:lnB>
+                    <a:solidFill>
+                      <a:srgbClr val="4A4E69"/>
+                    </a:solidFill>
+                  </a:tcPr>
+                </a:tc>
+              </a:tr>
+              <a:tr h="402336">
+                <a:tc>
+                  <a:txBody>
+                    <a:bodyPr wrap="square"/>
+                    <a:lstStyle/>
+                    <a:p>
+                      <a:pPr algn="l"/>
+                      <a:r>
+                        <a:rPr sz="1100" b="0">
+                          <a:solidFill>
+                            <a:srgbClr val="22223B"/>
+                          </a:solidFill>
+                          <a:latin typeface="BIZ UDGothic"/>
+                          <a:ea typeface="BIZ UDGothic"/>
+                          <a:cs typeface="BIZ UDGothic"/>
+                        </a:rPr>
+                        <a:t>highOrder.maker</a:t>
+                      </a:r>
+                    </a:p>
+                  </a:txBody>
+                  <a:tcPr marL="109728" marR="109728" marT="45720" marB="45720" anchor="ctr">
+                    <a:lnL w="9525" cap="flat" cmpd="sng" algn="ctr">
+                      <a:solidFill>
+                        <a:srgbClr val="DADDE6"/>
+                      </a:solidFill>
+                      <a:prstDash val="solid"/>
+                    </a:lnL>
+                    <a:lnR w="9525" cap="flat" cmpd="sng" algn="ctr">
+                      <a:solidFill>
+                        <a:srgbClr val="DADDE6"/>
+                      </a:solidFill>
+                      <a:prstDash val="solid"/>
+                    </a:lnR>
+                    <a:lnT w="9525" cap="flat" cmpd="sng" algn="ctr">
+                      <a:solidFill>
+                        <a:srgbClr val="DADDE6"/>
+                      </a:solidFill>
+                      <a:prstDash val="solid"/>
+                    </a:lnT>
+                    <a:lnB w="9525" cap="flat" cmpd="sng" algn="ctr">
+                      <a:solidFill>
+                        <a:srgbClr val="DADDE6"/>
+                      </a:solidFill>
+                      <a:prstDash val="solid"/>
+                    </a:lnB>
+                    <a:solidFill>
+                      <a:srgbClr val="FFFFFF"/>
+                    </a:solidFill>
+                  </a:tcPr>
+                </a:tc>
+                <a:tc>
+                  <a:txBody>
+                    <a:bodyPr wrap="square"/>
+                    <a:lstStyle/>
+                    <a:p>
+                      <a:pPr algn="l"/>
+                      <a:r>
+                        <a:rPr sz="1100" b="0">
+                          <a:solidFill>
+                            <a:srgbClr val="22223B"/>
+                          </a:solidFill>
+                          <a:latin typeface="BIZ UDGothic"/>
+                          <a:ea typeface="BIZ UDGothic"/>
+                          <a:cs typeface="BIZ UDGothic"/>
+                        </a:rPr>
+                        <a:t>"nikon"</a:t>
+                      </a:r>
+                    </a:p>
+                  </a:txBody>
+                  <a:tcPr marL="109728" marR="109728" marT="45720" marB="45720" anchor="ctr">
+                    <a:lnL w="9525" cap="flat" cmpd="sng" algn="ctr">
+                      <a:solidFill>
+                        <a:srgbClr val="DADDE6"/>
+                      </a:solidFill>
+                      <a:prstDash val="solid"/>
+                    </a:lnL>
+                    <a:lnR w="9525" cap="flat" cmpd="sng" algn="ctr">
+                      <a:solidFill>
+                        <a:srgbClr val="DADDE6"/>
+                      </a:solidFill>
+                      <a:prstDash val="solid"/>
+                    </a:lnR>
+                    <a:lnT w="9525" cap="flat" cmpd="sng" algn="ctr">
+                      <a:solidFill>
+                        <a:srgbClr val="DADDE6"/>
+                      </a:solidFill>
+                      <a:prstDash val="solid"/>
+                    </a:lnT>
+                    <a:lnB w="9525" cap="flat" cmpd="sng" algn="ctr">
+                      <a:solidFill>
+                        <a:srgbClr val="DADDE6"/>
+                      </a:solidFill>
+                      <a:prstDash val="solid"/>
+                    </a:lnB>
+                    <a:solidFill>
+                      <a:srgbClr val="FFFFFF"/>
+                    </a:solidFill>
+                  </a:tcPr>
+                </a:tc>
+                <a:tc>
+                  <a:txBody>
+                    <a:bodyPr wrap="square"/>
+                    <a:lstStyle/>
+                    <a:p>
+                      <a:pPr algn="l"/>
+                      <a:r>
+                        <a:rPr sz="1100" b="0">
+                          <a:solidFill>
+                            <a:srgbClr val="22223B"/>
+                          </a:solidFill>
+                          <a:latin typeface="BIZ UDGothic"/>
+                          <a:ea typeface="BIZ UDGothic"/>
+                          <a:cs typeface="BIZ UDGothic"/>
+                        </a:rPr>
+                        <a:t>補正の式（asml・canon・nikon。Overlay 計測ルールの式）</a:t>
+                      </a:r>
+                    </a:p>
+                  </a:txBody>
+                  <a:tcPr marL="109728" marR="109728" marT="45720" marB="45720" anchor="ctr">
+                    <a:lnL w="9525" cap="flat" cmpd="sng" algn="ctr">
+                      <a:solidFill>
+                        <a:srgbClr val="DADDE6"/>
+                      </a:solidFill>
+                      <a:prstDash val="solid"/>
+                    </a:lnL>
+                    <a:lnR w="9525" cap="flat" cmpd="sng" algn="ctr">
+                      <a:solidFill>
+                        <a:srgbClr val="DADDE6"/>
+                      </a:solidFill>
+                      <a:prstDash val="solid"/>
+                    </a:lnR>
+                    <a:lnT w="9525" cap="flat" cmpd="sng" algn="ctr">
+                      <a:solidFill>
+                        <a:srgbClr val="DADDE6"/>
+                      </a:solidFill>
+                      <a:prstDash val="solid"/>
+                    </a:lnT>
+                    <a:lnB w="9525" cap="flat" cmpd="sng" algn="ctr">
+                      <a:solidFill>
+                        <a:srgbClr val="DADDE6"/>
+                      </a:solidFill>
+                      <a:prstDash val="solid"/>
+                    </a:lnB>
+                    <a:solidFill>
+                      <a:srgbClr val="FFFFFF"/>
+                    </a:solidFill>
+                  </a:tcPr>
+                </a:tc>
+                <a:tc>
+                  <a:txBody>
+                    <a:bodyPr wrap="square"/>
+                    <a:lstStyle/>
+                    <a:p>
+                      <a:pPr algn="l"/>
+                      <a:r>
+                        <a:rPr sz="1100" b="0">
+                          <a:solidFill>
+                            <a:srgbClr val="22223B"/>
+                          </a:solidFill>
+                          <a:latin typeface="BIZ UDGothic"/>
+                          <a:ea typeface="BIZ UDGothic"/>
+                          <a:cs typeface="BIZ UDGothic"/>
+                        </a:rPr>
+                        <a:t>7. 補正の式</a:t>
+                      </a:r>
+                    </a:p>
+                  </a:txBody>
+                  <a:tcPr marL="109728" marR="109728" marT="45720" marB="45720" anchor="ctr">
+                    <a:lnL w="9525" cap="flat" cmpd="sng" algn="ctr">
+                      <a:solidFill>
+                        <a:srgbClr val="DADDE6"/>
+                      </a:solidFill>
+                      <a:prstDash val="solid"/>
+                    </a:lnL>
+                    <a:lnR w="9525" cap="flat" cmpd="sng" algn="ctr">
+                      <a:solidFill>
+                        <a:srgbClr val="DADDE6"/>
+                      </a:solidFill>
+                      <a:prstDash val="solid"/>
+                    </a:lnR>
+                    <a:lnT w="9525" cap="flat" cmpd="sng" algn="ctr">
+                      <a:solidFill>
+                        <a:srgbClr val="DADDE6"/>
+                      </a:solidFill>
+                      <a:prstDash val="solid"/>
+                    </a:lnT>
+                    <a:lnB w="9525" cap="flat" cmpd="sng" algn="ctr">
+                      <a:solidFill>
+                        <a:srgbClr val="DADDE6"/>
+                      </a:solidFill>
+                      <a:prstDash val="solid"/>
+                    </a:lnB>
+                    <a:solidFill>
+                      <a:srgbClr val="FFFFFF"/>
+                    </a:solidFill>
+                  </a:tcPr>
+                </a:tc>
+              </a:tr>
+              <a:tr h="402336">
+                <a:tc>
+                  <a:txBody>
+                    <a:bodyPr wrap="square"/>
+                    <a:lstStyle/>
+                    <a:p>
+                      <a:pPr algn="l"/>
+                      <a:r>
+                        <a:rPr sz="1100" b="0">
+                          <a:solidFill>
+                            <a:srgbClr val="22223B"/>
+                          </a:solidFill>
+                          <a:latin typeface="BIZ UDGothic"/>
+                          <a:ea typeface="BIZ UDGothic"/>
+                          <a:cs typeface="BIZ UDGothic"/>
+                        </a:rPr>
+                        <a:t>highOrder.unit</a:t>
+                      </a:r>
+                    </a:p>
+                  </a:txBody>
+                  <a:tcPr marL="109728" marR="109728" marT="45720" marB="45720" anchor="ctr">
+                    <a:lnL w="9525" cap="flat" cmpd="sng" algn="ctr">
+                      <a:solidFill>
+                        <a:srgbClr val="DADDE6"/>
+                      </a:solidFill>
+                      <a:prstDash val="solid"/>
+                    </a:lnL>
+                    <a:lnR w="9525" cap="flat" cmpd="sng" algn="ctr">
+                      <a:solidFill>
+                        <a:srgbClr val="DADDE6"/>
+                      </a:solidFill>
+                      <a:prstDash val="solid"/>
+                    </a:lnR>
+                    <a:lnT w="9525" cap="flat" cmpd="sng" algn="ctr">
+                      <a:solidFill>
+                        <a:srgbClr val="DADDE6"/>
+                      </a:solidFill>
+                      <a:prstDash val="solid"/>
+                    </a:lnT>
+                    <a:lnB w="9525" cap="flat" cmpd="sng" algn="ctr">
+                      <a:solidFill>
+                        <a:srgbClr val="DADDE6"/>
+                      </a:solidFill>
+                      <a:prstDash val="solid"/>
+                    </a:lnB>
+                    <a:solidFill>
+                      <a:srgbClr val="FFFFFF"/>
+                    </a:solidFill>
+                  </a:tcPr>
+                </a:tc>
+                <a:tc>
+                  <a:txBody>
+                    <a:bodyPr wrap="square"/>
+                    <a:lstStyle/>
+                    <a:p>
+                      <a:pPr algn="l"/>
+                      <a:r>
+                        <a:rPr sz="1100" b="0">
+                          <a:solidFill>
+                            <a:srgbClr val="22223B"/>
+                          </a:solidFill>
+                          <a:latin typeface="BIZ UDGothic"/>
+                          <a:ea typeface="BIZ UDGothic"/>
+                          <a:cs typeface="BIZ UDGothic"/>
+                        </a:rPr>
+                        <a:t>"common"</a:t>
+                      </a:r>
+                    </a:p>
+                  </a:txBody>
+                  <a:tcPr marL="109728" marR="109728" marT="45720" marB="45720" anchor="ctr">
+                    <a:lnL w="9525" cap="flat" cmpd="sng" algn="ctr">
+                      <a:solidFill>
+                        <a:srgbClr val="DADDE6"/>
+                      </a:solidFill>
+                      <a:prstDash val="solid"/>
+                    </a:lnL>
+                    <a:lnR w="9525" cap="flat" cmpd="sng" algn="ctr">
+                      <a:solidFill>
+                        <a:srgbClr val="DADDE6"/>
+                      </a:solidFill>
+                      <a:prstDash val="solid"/>
+                    </a:lnR>
+                    <a:lnT w="9525" cap="flat" cmpd="sng" algn="ctr">
+                      <a:solidFill>
+                        <a:srgbClr val="DADDE6"/>
+                      </a:solidFill>
+                      <a:prstDash val="solid"/>
+                    </a:lnT>
+                    <a:lnB w="9525" cap="flat" cmpd="sng" algn="ctr">
+                      <a:solidFill>
+                        <a:srgbClr val="DADDE6"/>
+                      </a:solidFill>
+                      <a:prstDash val="solid"/>
+                    </a:lnB>
+                    <a:solidFill>
+                      <a:srgbClr val="FFFFFF"/>
+                    </a:solidFill>
+                  </a:tcPr>
+                </a:tc>
+                <a:tc>
+                  <a:txBody>
+                    <a:bodyPr wrap="square"/>
+                    <a:lstStyle/>
+                    <a:p>
+                      <a:pPr algn="l"/>
+                      <a:r>
+                        <a:rPr sz="1100" b="0">
+                          <a:solidFill>
+                            <a:srgbClr val="22223B"/>
+                          </a:solidFill>
+                          <a:latin typeface="BIZ UDGothic"/>
+                          <a:ea typeface="BIZ UDGothic"/>
+                          <a:cs typeface="BIZ UDGothic"/>
+                        </a:rPr>
+                        <a:t>common：Wafer 内で共通の1組の k、shot：Shot ごとの k</a:t>
+                      </a:r>
+                    </a:p>
+                  </a:txBody>
+                  <a:tcPr marL="109728" marR="109728" marT="45720" marB="45720" anchor="ctr">
+                    <a:lnL w="9525" cap="flat" cmpd="sng" algn="ctr">
+                      <a:solidFill>
+                        <a:srgbClr val="DADDE6"/>
+                      </a:solidFill>
+                      <a:prstDash val="solid"/>
+                    </a:lnL>
+                    <a:lnR w="9525" cap="flat" cmpd="sng" algn="ctr">
+                      <a:solidFill>
+                        <a:srgbClr val="DADDE6"/>
+                      </a:solidFill>
+                      <a:prstDash val="solid"/>
+                    </a:lnR>
+                    <a:lnT w="9525" cap="flat" cmpd="sng" algn="ctr">
+                      <a:solidFill>
+                        <a:srgbClr val="DADDE6"/>
+                      </a:solidFill>
+                      <a:prstDash val="solid"/>
+                    </a:lnT>
+                    <a:lnB w="9525" cap="flat" cmpd="sng" algn="ctr">
+                      <a:solidFill>
+                        <a:srgbClr val="DADDE6"/>
+                      </a:solidFill>
+                      <a:prstDash val="solid"/>
+                    </a:lnB>
+                    <a:solidFill>
+                      <a:srgbClr val="FFFFFF"/>
+                    </a:solidFill>
+                  </a:tcPr>
+                </a:tc>
+                <a:tc>
+                  <a:txBody>
+                    <a:bodyPr wrap="square"/>
+                    <a:lstStyle/>
+                    <a:p>
+                      <a:pPr algn="l"/>
+                      <a:r>
+                        <a:rPr sz="1100" b="0">
+                          <a:solidFill>
+                            <a:srgbClr val="22223B"/>
+                          </a:solidFill>
+                          <a:latin typeface="BIZ UDGothic"/>
+                          <a:ea typeface="BIZ UDGothic"/>
+                          <a:cs typeface="BIZ UDGothic"/>
+                        </a:rPr>
+                        <a:t>7. 補正の単位</a:t>
+                      </a:r>
+                    </a:p>
+                  </a:txBody>
+                  <a:tcPr marL="109728" marR="109728" marT="45720" marB="45720" anchor="ctr">
+                    <a:lnL w="9525" cap="flat" cmpd="sng" algn="ctr">
+                      <a:solidFill>
+                        <a:srgbClr val="DADDE6"/>
+                      </a:solidFill>
+                      <a:prstDash val="solid"/>
+                    </a:lnL>
+                    <a:lnR w="9525" cap="flat" cmpd="sng" algn="ctr">
+                      <a:solidFill>
+                        <a:srgbClr val="DADDE6"/>
+                      </a:solidFill>
+                      <a:prstDash val="solid"/>
+                    </a:lnR>
+                    <a:lnT w="9525" cap="flat" cmpd="sng" algn="ctr">
+                      <a:solidFill>
+                        <a:srgbClr val="DADDE6"/>
+                      </a:solidFill>
+                      <a:prstDash val="solid"/>
+                    </a:lnT>
+                    <a:lnB w="9525" cap="flat" cmpd="sng" algn="ctr">
+                      <a:solidFill>
+                        <a:srgbClr val="DADDE6"/>
+                      </a:solidFill>
+                      <a:prstDash val="solid"/>
+                    </a:lnB>
+                    <a:solidFill>
+                      <a:srgbClr val="FFFFFF"/>
+                    </a:solidFill>
+                  </a:tcPr>
+                </a:tc>
+              </a:tr>
+              <a:tr h="402336">
+                <a:tc>
+                  <a:txBody>
+                    <a:bodyPr wrap="square"/>
+                    <a:lstStyle/>
+                    <a:p>
+                      <a:pPr algn="l"/>
+                      <a:r>
+                        <a:rPr sz="1100" b="0">
+                          <a:solidFill>
+                            <a:srgbClr val="22223B"/>
+                          </a:solidFill>
+                          <a:latin typeface="BIZ UDGothic"/>
+                          <a:ea typeface="BIZ UDGothic"/>
+                          <a:cs typeface="BIZ UDGothic"/>
+                        </a:rPr>
+                        <a:t>highOrder.waferOrder</a:t>
+                      </a:r>
+                    </a:p>
+                  </a:txBody>
+                  <a:tcPr marL="109728" marR="109728" marT="45720" marB="45720" anchor="ctr">
+                    <a:lnL w="9525" cap="flat" cmpd="sng" algn="ctr">
+                      <a:solidFill>
+                        <a:srgbClr val="DADDE6"/>
+                      </a:solidFill>
+                      <a:prstDash val="solid"/>
+                    </a:lnL>
+                    <a:lnR w="9525" cap="flat" cmpd="sng" algn="ctr">
+                      <a:solidFill>
+                        <a:srgbClr val="DADDE6"/>
+                      </a:solidFill>
+                      <a:prstDash val="solid"/>
+                    </a:lnR>
+                    <a:lnT w="9525" cap="flat" cmpd="sng" algn="ctr">
+                      <a:solidFill>
+                        <a:srgbClr val="DADDE6"/>
+                      </a:solidFill>
+                      <a:prstDash val="solid"/>
+                    </a:lnT>
+                    <a:lnB w="9525" cap="flat" cmpd="sng" algn="ctr">
+                      <a:solidFill>
+                        <a:srgbClr val="DADDE6"/>
+                      </a:solidFill>
+                      <a:prstDash val="solid"/>
+                    </a:lnB>
+                    <a:solidFill>
+                      <a:srgbClr val="FFFFFF"/>
+                    </a:solidFill>
+                  </a:tcPr>
+                </a:tc>
+                <a:tc>
+                  <a:txBody>
+                    <a:bodyPr wrap="square"/>
+                    <a:lstStyle/>
+                    <a:p>
+                      <a:pPr algn="l"/>
+                      <a:r>
+                        <a:rPr sz="1100" b="0">
+                          <a:solidFill>
+                            <a:srgbClr val="22223B"/>
+                          </a:solidFill>
+                          <a:latin typeface="BIZ UDGothic"/>
+                          <a:ea typeface="BIZ UDGothic"/>
+                          <a:cs typeface="BIZ UDGothic"/>
+                        </a:rPr>
+                        <a:t>1</a:t>
+                      </a:r>
+                    </a:p>
+                  </a:txBody>
+                  <a:tcPr marL="109728" marR="109728" marT="45720" marB="45720" anchor="ctr">
+                    <a:lnL w="9525" cap="flat" cmpd="sng" algn="ctr">
+                      <a:solidFill>
+                        <a:srgbClr val="DADDE6"/>
+                      </a:solidFill>
+                      <a:prstDash val="solid"/>
+                    </a:lnL>
+                    <a:lnR w="9525" cap="flat" cmpd="sng" algn="ctr">
+                      <a:solidFill>
+                        <a:srgbClr val="DADDE6"/>
+                      </a:solidFill>
+                      <a:prstDash val="solid"/>
+                    </a:lnR>
+                    <a:lnT w="9525" cap="flat" cmpd="sng" algn="ctr">
+                      <a:solidFill>
+                        <a:srgbClr val="DADDE6"/>
+                      </a:solidFill>
+                      <a:prstDash val="solid"/>
+                    </a:lnT>
+                    <a:lnB w="9525" cap="flat" cmpd="sng" algn="ctr">
+                      <a:solidFill>
+                        <a:srgbClr val="DADDE6"/>
+                      </a:solidFill>
+                      <a:prstDash val="solid"/>
+                    </a:lnB>
+                    <a:solidFill>
+                      <a:srgbClr val="FFFFFF"/>
+                    </a:solidFill>
+                  </a:tcPr>
+                </a:tc>
+                <a:tc>
+                  <a:txBody>
+                    <a:bodyPr wrap="square"/>
+                    <a:lstStyle/>
+                    <a:p>
+                      <a:pPr algn="l"/>
+                      <a:r>
+                        <a:rPr sz="1100" b="0">
+                          <a:solidFill>
+                            <a:srgbClr val="22223B"/>
+                          </a:solidFill>
+                          <a:latin typeface="BIZ UDGothic"/>
+                          <a:ea typeface="BIZ UDGothic"/>
+                          <a:cs typeface="BIZ UDGothic"/>
+                        </a:rPr>
+                        <a:t>common のとき一緒に求める Wafer 成分の次数（0〜3、0 = なし）</a:t>
+                      </a:r>
+                    </a:p>
+                  </a:txBody>
+                  <a:tcPr marL="109728" marR="109728" marT="45720" marB="45720" anchor="ctr">
+                    <a:lnL w="9525" cap="flat" cmpd="sng" algn="ctr">
+                      <a:solidFill>
+                        <a:srgbClr val="DADDE6"/>
+                      </a:solidFill>
+                      <a:prstDash val="solid"/>
+                    </a:lnL>
+                    <a:lnR w="9525" cap="flat" cmpd="sng" algn="ctr">
+                      <a:solidFill>
+                        <a:srgbClr val="DADDE6"/>
+                      </a:solidFill>
+                      <a:prstDash val="solid"/>
+                    </a:lnR>
+                    <a:lnT w="9525" cap="flat" cmpd="sng" algn="ctr">
+                      <a:solidFill>
+                        <a:srgbClr val="DADDE6"/>
+                      </a:solidFill>
+                      <a:prstDash val="solid"/>
+                    </a:lnT>
+                    <a:lnB w="9525" cap="flat" cmpd="sng" algn="ctr">
+                      <a:solidFill>
+                        <a:srgbClr val="DADDE6"/>
+                      </a:solidFill>
+                      <a:prstDash val="solid"/>
+                    </a:lnB>
+                    <a:solidFill>
+                      <a:srgbClr val="FFFFFF"/>
+                    </a:solidFill>
+                  </a:tcPr>
+                </a:tc>
+                <a:tc>
+                  <a:txBody>
+                    <a:bodyPr wrap="square"/>
+                    <a:lstStyle/>
+                    <a:p>
+                      <a:pPr algn="l"/>
+                      <a:r>
+                        <a:rPr sz="1100" b="0">
+                          <a:solidFill>
+                            <a:srgbClr val="22223B"/>
+                          </a:solidFill>
+                          <a:latin typeface="BIZ UDGothic"/>
+                          <a:ea typeface="BIZ UDGothic"/>
+                          <a:cs typeface="BIZ UDGothic"/>
+                        </a:rPr>
+                        <a:t>7. Wafer 成分</a:t>
+                      </a:r>
+                    </a:p>
+                  </a:txBody>
+                  <a:tcPr marL="109728" marR="109728" marT="45720" marB="45720" anchor="ctr">
+                    <a:lnL w="9525" cap="flat" cmpd="sng" algn="ctr">
+                      <a:solidFill>
+                        <a:srgbClr val="DADDE6"/>
+                      </a:solidFill>
+                      <a:prstDash val="solid"/>
+                    </a:lnL>
+                    <a:lnR w="9525" cap="flat" cmpd="sng" algn="ctr">
+                      <a:solidFill>
+                        <a:srgbClr val="DADDE6"/>
+                      </a:solidFill>
+                      <a:prstDash val="solid"/>
+                    </a:lnR>
+                    <a:lnT w="9525" cap="flat" cmpd="sng" algn="ctr">
+                      <a:solidFill>
+                        <a:srgbClr val="DADDE6"/>
+                      </a:solidFill>
+                      <a:prstDash val="solid"/>
+                    </a:lnT>
+                    <a:lnB w="9525" cap="flat" cmpd="sng" algn="ctr">
+                      <a:solidFill>
+                        <a:srgbClr val="DADDE6"/>
+                      </a:solidFill>
+                      <a:prstDash val="solid"/>
+                    </a:lnB>
+                    <a:solidFill>
+                      <a:srgbClr val="FFFFFF"/>
+                    </a:solidFill>
+                  </a:tcPr>
+                </a:tc>
+              </a:tr>
+              <a:tr h="402336">
+                <a:tc>
+                  <a:txBody>
+                    <a:bodyPr wrap="square"/>
+                    <a:lstStyle/>
+                    <a:p>
+                      <a:pPr algn="l"/>
+                      <a:r>
+                        <a:rPr sz="1100" b="0">
+                          <a:solidFill>
+                            <a:srgbClr val="22223B"/>
+                          </a:solidFill>
+                          <a:latin typeface="BIZ UDGothic"/>
+                          <a:ea typeface="BIZ UDGothic"/>
+                          <a:cs typeface="BIZ UDGothic"/>
+                        </a:rPr>
+                        <a:t>highOrder.excludedTerms</a:t>
+                      </a:r>
+                    </a:p>
+                  </a:txBody>
+                  <a:tcPr marL="109728" marR="109728" marT="45720" marB="45720" anchor="ctr">
+                    <a:lnL w="9525" cap="flat" cmpd="sng" algn="ctr">
+                      <a:solidFill>
+                        <a:srgbClr val="DADDE6"/>
+                      </a:solidFill>
+                      <a:prstDash val="solid"/>
+                    </a:lnL>
+                    <a:lnR w="9525" cap="flat" cmpd="sng" algn="ctr">
+                      <a:solidFill>
+                        <a:srgbClr val="DADDE6"/>
+                      </a:solidFill>
+                      <a:prstDash val="solid"/>
+                    </a:lnR>
+                    <a:lnT w="9525" cap="flat" cmpd="sng" algn="ctr">
+                      <a:solidFill>
+                        <a:srgbClr val="DADDE6"/>
+                      </a:solidFill>
+                      <a:prstDash val="solid"/>
+                    </a:lnT>
+                    <a:lnB w="9525" cap="flat" cmpd="sng" algn="ctr">
+                      <a:solidFill>
+                        <a:srgbClr val="DADDE6"/>
+                      </a:solidFill>
+                      <a:prstDash val="solid"/>
+                    </a:lnB>
+                    <a:solidFill>
+                      <a:srgbClr val="FFFFFF"/>
+                    </a:solidFill>
+                  </a:tcPr>
+                </a:tc>
+                <a:tc>
+                  <a:txBody>
+                    <a:bodyPr wrap="square"/>
+                    <a:lstStyle/>
+                    <a:p>
+                      <a:pPr algn="l"/>
+                      <a:r>
+                        <a:rPr sz="1100" b="0">
+                          <a:solidFill>
+                            <a:srgbClr val="22223B"/>
+                          </a:solidFill>
+                          <a:latin typeface="BIZ UDGothic"/>
+                          <a:ea typeface="BIZ UDGothic"/>
+                          <a:cs typeface="BIZ UDGothic"/>
+                        </a:rPr>
+                        <a:t>[]（すべて使う）</a:t>
+                      </a:r>
+                    </a:p>
+                  </a:txBody>
+                  <a:tcPr marL="109728" marR="109728" marT="45720" marB="45720" anchor="ctr">
+                    <a:lnL w="9525" cap="flat" cmpd="sng" algn="ctr">
+                      <a:solidFill>
+                        <a:srgbClr val="DADDE6"/>
+                      </a:solidFill>
+                      <a:prstDash val="solid"/>
+                    </a:lnL>
+                    <a:lnR w="9525" cap="flat" cmpd="sng" algn="ctr">
+                      <a:solidFill>
+                        <a:srgbClr val="DADDE6"/>
+                      </a:solidFill>
+                      <a:prstDash val="solid"/>
+                    </a:lnR>
+                    <a:lnT w="9525" cap="flat" cmpd="sng" algn="ctr">
+                      <a:solidFill>
+                        <a:srgbClr val="DADDE6"/>
+                      </a:solidFill>
+                      <a:prstDash val="solid"/>
+                    </a:lnT>
+                    <a:lnB w="9525" cap="flat" cmpd="sng" algn="ctr">
+                      <a:solidFill>
+                        <a:srgbClr val="DADDE6"/>
+                      </a:solidFill>
+                      <a:prstDash val="solid"/>
+                    </a:lnB>
+                    <a:solidFill>
+                      <a:srgbClr val="FFFFFF"/>
+                    </a:solidFill>
+                  </a:tcPr>
+                </a:tc>
+                <a:tc>
+                  <a:txBody>
+                    <a:bodyPr wrap="square"/>
+                    <a:lstStyle/>
+                    <a:p>
+                      <a:pPr algn="l"/>
+                      <a:r>
+                        <a:rPr sz="1100" b="0">
+                          <a:solidFill>
+                            <a:srgbClr val="22223B"/>
+                          </a:solidFill>
+                          <a:latin typeface="BIZ UDGothic"/>
+                          <a:ea typeface="BIZ UDGothic"/>
+                          <a:cs typeface="BIZ UDGothic"/>
+                        </a:rPr>
+                        <a:t>使わない k の番号（例：[55, 41, 29]。k1〜k6 は外さない）</a:t>
+                      </a:r>
+                    </a:p>
+                  </a:txBody>
+                  <a:tcPr marL="109728" marR="109728" marT="45720" marB="45720" anchor="ctr">
+                    <a:lnL w="9525" cap="flat" cmpd="sng" algn="ctr">
+                      <a:solidFill>
+                        <a:srgbClr val="DADDE6"/>
+                      </a:solidFill>
+                      <a:prstDash val="solid"/>
+                    </a:lnL>
+                    <a:lnR w="9525" cap="flat" cmpd="sng" algn="ctr">
+                      <a:solidFill>
+                        <a:srgbClr val="DADDE6"/>
+                      </a:solidFill>
+                      <a:prstDash val="solid"/>
+                    </a:lnR>
+                    <a:lnT w="9525" cap="flat" cmpd="sng" algn="ctr">
+                      <a:solidFill>
+                        <a:srgbClr val="DADDE6"/>
+                      </a:solidFill>
+                      <a:prstDash val="solid"/>
+                    </a:lnT>
+                    <a:lnB w="9525" cap="flat" cmpd="sng" algn="ctr">
+                      <a:solidFill>
+                        <a:srgbClr val="DADDE6"/>
+                      </a:solidFill>
+                      <a:prstDash val="solid"/>
+                    </a:lnB>
+                    <a:solidFill>
+                      <a:srgbClr val="FFFFFF"/>
+                    </a:solidFill>
+                  </a:tcPr>
+                </a:tc>
+                <a:tc>
+                  <a:txBody>
+                    <a:bodyPr wrap="square"/>
+                    <a:lstStyle/>
+                    <a:p>
+                      <a:pPr algn="l"/>
+                      <a:r>
+                        <a:rPr sz="1100" b="0">
+                          <a:solidFill>
+                            <a:srgbClr val="22223B"/>
+                          </a:solidFill>
+                          <a:latin typeface="BIZ UDGothic"/>
+                          <a:ea typeface="BIZ UDGothic"/>
+                          <a:cs typeface="BIZ UDGothic"/>
+                        </a:rPr>
+                        <a:t>7. 使う項と VIF</a:t>
+                      </a:r>
+                    </a:p>
+                  </a:txBody>
+                  <a:tcPr marL="109728" marR="109728" marT="45720" marB="45720" anchor="ctr">
+                    <a:lnL w="9525" cap="flat" cmpd="sng" algn="ctr">
+                      <a:solidFill>
+                        <a:srgbClr val="DADDE6"/>
+                      </a:solidFill>
+                      <a:prstDash val="solid"/>
+                    </a:lnL>
+                    <a:lnR w="9525" cap="flat" cmpd="sng" algn="ctr">
+                      <a:solidFill>
+                        <a:srgbClr val="DADDE6"/>
+                      </a:solidFill>
+                      <a:prstDash val="solid"/>
+                    </a:lnR>
+                    <a:lnT w="9525" cap="flat" cmpd="sng" algn="ctr">
+                      <a:solidFill>
+                        <a:srgbClr val="DADDE6"/>
+                      </a:solidFill>
+                      <a:prstDash val="solid"/>
+                    </a:lnT>
+                    <a:lnB w="9525" cap="flat" cmpd="sng" algn="ctr">
+                      <a:solidFill>
+                        <a:srgbClr val="DADDE6"/>
+                      </a:solidFill>
+                      <a:prstDash val="solid"/>
+                    </a:lnB>
+                    <a:solidFill>
+                      <a:srgbClr val="FFFFFF"/>
+                    </a:solidFill>
+                  </a:tcPr>
+                </a:tc>
+              </a:tr>
+              <a:tr h="402336">
+                <a:tc>
+                  <a:txBody>
+                    <a:bodyPr wrap="square"/>
+                    <a:lstStyle/>
+                    <a:p>
+                      <a:pPr algn="l"/>
+                      <a:r>
+                        <a:rPr sz="1100" b="0">
+                          <a:solidFill>
+                            <a:srgbClr val="22223B"/>
+                          </a:solidFill>
+                          <a:latin typeface="BIZ UDGothic"/>
+                          <a:ea typeface="BIZ UDGothic"/>
+                          <a:cs typeface="BIZ UDGothic"/>
+                        </a:rPr>
+                        <a:t>highOrder.vifThreshold</a:t>
+                      </a:r>
+                    </a:p>
+                  </a:txBody>
+                  <a:tcPr marL="109728" marR="109728" marT="45720" marB="45720" anchor="ctr">
+                    <a:lnL w="9525" cap="flat" cmpd="sng" algn="ctr">
+                      <a:solidFill>
+                        <a:srgbClr val="DADDE6"/>
+                      </a:solidFill>
+                      <a:prstDash val="solid"/>
+                    </a:lnL>
+                    <a:lnR w="9525" cap="flat" cmpd="sng" algn="ctr">
+                      <a:solidFill>
+                        <a:srgbClr val="DADDE6"/>
+                      </a:solidFill>
+                      <a:prstDash val="solid"/>
+                    </a:lnR>
+                    <a:lnT w="9525" cap="flat" cmpd="sng" algn="ctr">
+                      <a:solidFill>
+                        <a:srgbClr val="DADDE6"/>
+                      </a:solidFill>
+                      <a:prstDash val="solid"/>
+                    </a:lnT>
+                    <a:lnB w="9525" cap="flat" cmpd="sng" algn="ctr">
+                      <a:solidFill>
+                        <a:srgbClr val="DADDE6"/>
+                      </a:solidFill>
+                      <a:prstDash val="solid"/>
+                    </a:lnB>
+                    <a:solidFill>
+                      <a:srgbClr val="FFFFFF"/>
+                    </a:solidFill>
+                  </a:tcPr>
+                </a:tc>
+                <a:tc>
+                  <a:txBody>
+                    <a:bodyPr wrap="square"/>
+                    <a:lstStyle/>
+                    <a:p>
+                      <a:pPr algn="l"/>
+                      <a:r>
+                        <a:rPr sz="1100" b="0">
+                          <a:solidFill>
+                            <a:srgbClr val="22223B"/>
+                          </a:solidFill>
+                          <a:latin typeface="BIZ UDGothic"/>
+                          <a:ea typeface="BIZ UDGothic"/>
+                          <a:cs typeface="BIZ UDGothic"/>
+                        </a:rPr>
+                        <a:t>10</a:t>
+                      </a:r>
+                    </a:p>
+                  </a:txBody>
+                  <a:tcPr marL="109728" marR="109728" marT="45720" marB="45720" anchor="ctr">
+                    <a:lnL w="9525" cap="flat" cmpd="sng" algn="ctr">
+                      <a:solidFill>
+                        <a:srgbClr val="DADDE6"/>
+                      </a:solidFill>
+                      <a:prstDash val="solid"/>
+                    </a:lnL>
+                    <a:lnR w="9525" cap="flat" cmpd="sng" algn="ctr">
+                      <a:solidFill>
+                        <a:srgbClr val="DADDE6"/>
+                      </a:solidFill>
+                      <a:prstDash val="solid"/>
+                    </a:lnR>
+                    <a:lnT w="9525" cap="flat" cmpd="sng" algn="ctr">
+                      <a:solidFill>
+                        <a:srgbClr val="DADDE6"/>
+                      </a:solidFill>
+                      <a:prstDash val="solid"/>
+                    </a:lnT>
+                    <a:lnB w="9525" cap="flat" cmpd="sng" algn="ctr">
+                      <a:solidFill>
+                        <a:srgbClr val="DADDE6"/>
+                      </a:solidFill>
+                      <a:prstDash val="solid"/>
+                    </a:lnB>
+                    <a:solidFill>
+                      <a:srgbClr val="FFFFFF"/>
+                    </a:solidFill>
+                  </a:tcPr>
+                </a:tc>
+                <a:tc>
+                  <a:txBody>
+                    <a:bodyPr wrap="square"/>
+                    <a:lstStyle/>
+                    <a:p>
+                      <a:pPr algn="l"/>
+                      <a:r>
+                        <a:rPr sz="1100" b="0">
+                          <a:solidFill>
+                            <a:srgbClr val="22223B"/>
+                          </a:solidFill>
+                          <a:latin typeface="BIZ UDGothic"/>
+                          <a:ea typeface="BIZ UDGothic"/>
+                          <a:cs typeface="BIZ UDGothic"/>
+                        </a:rPr>
+                        <a:t>「VIF で選ぶ」のしきい値（よく使う値は 5〜10）</a:t>
+                      </a:r>
+                    </a:p>
+                  </a:txBody>
+                  <a:tcPr marL="109728" marR="109728" marT="45720" marB="45720" anchor="ctr">
+                    <a:lnL w="9525" cap="flat" cmpd="sng" algn="ctr">
+                      <a:solidFill>
+                        <a:srgbClr val="DADDE6"/>
+                      </a:solidFill>
+                      <a:prstDash val="solid"/>
+                    </a:lnL>
+                    <a:lnR w="9525" cap="flat" cmpd="sng" algn="ctr">
+                      <a:solidFill>
+                        <a:srgbClr val="DADDE6"/>
+                      </a:solidFill>
+                      <a:prstDash val="solid"/>
+                    </a:lnR>
+                    <a:lnT w="9525" cap="flat" cmpd="sng" algn="ctr">
+                      <a:solidFill>
+                        <a:srgbClr val="DADDE6"/>
+                      </a:solidFill>
+                      <a:prstDash val="solid"/>
+                    </a:lnT>
+                    <a:lnB w="9525" cap="flat" cmpd="sng" algn="ctr">
+                      <a:solidFill>
+                        <a:srgbClr val="DADDE6"/>
+                      </a:solidFill>
+                      <a:prstDash val="solid"/>
+                    </a:lnB>
+                    <a:solidFill>
+                      <a:srgbClr val="FFFFFF"/>
+                    </a:solidFill>
+                  </a:tcPr>
+                </a:tc>
+                <a:tc>
+                  <a:txBody>
+                    <a:bodyPr wrap="square"/>
+                    <a:lstStyle/>
+                    <a:p>
+                      <a:pPr algn="l"/>
+                      <a:r>
+                        <a:rPr sz="1100" b="0">
+                          <a:solidFill>
+                            <a:srgbClr val="22223B"/>
+                          </a:solidFill>
+                          <a:latin typeface="BIZ UDGothic"/>
+                          <a:ea typeface="BIZ UDGothic"/>
+                          <a:cs typeface="BIZ UDGothic"/>
+                        </a:rPr>
+                        <a:t>7. VIF のしきい値</a:t>
+                      </a:r>
+                    </a:p>
+                  </a:txBody>
+                  <a:tcPr marL="109728" marR="109728" marT="45720" marB="45720" anchor="ctr">
+                    <a:lnL w="9525" cap="flat" cmpd="sng" algn="ctr">
+                      <a:solidFill>
+                        <a:srgbClr val="DADDE6"/>
+                      </a:solidFill>
+                      <a:prstDash val="solid"/>
+                    </a:lnL>
+                    <a:lnR w="9525" cap="flat" cmpd="sng" algn="ctr">
+                      <a:solidFill>
+                        <a:srgbClr val="DADDE6"/>
+                      </a:solidFill>
+                      <a:prstDash val="solid"/>
+                    </a:lnR>
+                    <a:lnT w="9525" cap="flat" cmpd="sng" algn="ctr">
+                      <a:solidFill>
+                        <a:srgbClr val="DADDE6"/>
+                      </a:solidFill>
+                      <a:prstDash val="solid"/>
+                    </a:lnT>
+                    <a:lnB w="9525" cap="flat" cmpd="sng" algn="ctr">
+                      <a:solidFill>
+                        <a:srgbClr val="DADDE6"/>
+                      </a:solidFill>
+                      <a:prstDash val="solid"/>
+                    </a:lnB>
+                    <a:solidFill>
+                      <a:srgbClr val="FFFFFF"/>
+                    </a:solidFill>
+                  </a:tcPr>
+                </a:tc>
+              </a:tr>
+              <a:tr h="402336">
+                <a:tc>
+                  <a:txBody>
+                    <a:bodyPr wrap="square"/>
+                    <a:lstStyle/>
+                    <a:p>
+                      <a:pPr algn="l"/>
+                      <a:r>
+                        <a:rPr sz="1100" b="0">
+                          <a:solidFill>
+                            <a:srgbClr val="22223B"/>
+                          </a:solidFill>
+                          <a:latin typeface="BIZ UDGothic"/>
+                          <a:ea typeface="BIZ UDGothic"/>
+                          <a:cs typeface="BIZ UDGothic"/>
+                        </a:rPr>
+                        <a:t>highOrder.loss</a:t>
+                      </a:r>
+                    </a:p>
+                  </a:txBody>
+                  <a:tcPr marL="109728" marR="109728" marT="45720" marB="45720" anchor="ctr">
+                    <a:lnL w="9525" cap="flat" cmpd="sng" algn="ctr">
+                      <a:solidFill>
+                        <a:srgbClr val="DADDE6"/>
+                      </a:solidFill>
+                      <a:prstDash val="solid"/>
+                    </a:lnL>
+                    <a:lnR w="9525" cap="flat" cmpd="sng" algn="ctr">
+                      <a:solidFill>
+                        <a:srgbClr val="DADDE6"/>
+                      </a:solidFill>
+                      <a:prstDash val="solid"/>
+                    </a:lnR>
+                    <a:lnT w="9525" cap="flat" cmpd="sng" algn="ctr">
+                      <a:solidFill>
+                        <a:srgbClr val="DADDE6"/>
+                      </a:solidFill>
+                      <a:prstDash val="solid"/>
+                    </a:lnT>
+                    <a:lnB w="9525" cap="flat" cmpd="sng" algn="ctr">
+                      <a:solidFill>
+                        <a:srgbClr val="DADDE6"/>
+                      </a:solidFill>
+                      <a:prstDash val="solid"/>
+                    </a:lnB>
+                    <a:solidFill>
+                      <a:srgbClr val="FFFFFF"/>
+                    </a:solidFill>
+                  </a:tcPr>
+                </a:tc>
+                <a:tc>
+                  <a:txBody>
+                    <a:bodyPr wrap="square"/>
+                    <a:lstStyle/>
+                    <a:p>
+                      <a:pPr algn="l"/>
+                      <a:r>
+                        <a:rPr sz="1100" b="0">
+                          <a:solidFill>
+                            <a:srgbClr val="22223B"/>
+                          </a:solidFill>
+                          <a:latin typeface="BIZ UDGothic"/>
+                          <a:ea typeface="BIZ UDGothic"/>
+                          <a:cs typeface="BIZ UDGothic"/>
+                        </a:rPr>
+                        <a:t>"huber"</a:t>
+                      </a:r>
+                    </a:p>
+                  </a:txBody>
+                  <a:tcPr marL="109728" marR="109728" marT="45720" marB="45720" anchor="ctr">
+                    <a:lnL w="9525" cap="flat" cmpd="sng" algn="ctr">
+                      <a:solidFill>
+                        <a:srgbClr val="DADDE6"/>
+                      </a:solidFill>
+                      <a:prstDash val="solid"/>
+                    </a:lnL>
+                    <a:lnR w="9525" cap="flat" cmpd="sng" algn="ctr">
+                      <a:solidFill>
+                        <a:srgbClr val="DADDE6"/>
+                      </a:solidFill>
+                      <a:prstDash val="solid"/>
+                    </a:lnR>
+                    <a:lnT w="9525" cap="flat" cmpd="sng" algn="ctr">
+                      <a:solidFill>
+                        <a:srgbClr val="DADDE6"/>
+                      </a:solidFill>
+                      <a:prstDash val="solid"/>
+                    </a:lnT>
+                    <a:lnB w="9525" cap="flat" cmpd="sng" algn="ctr">
+                      <a:solidFill>
+                        <a:srgbClr val="DADDE6"/>
+                      </a:solidFill>
+                      <a:prstDash val="solid"/>
+                    </a:lnB>
+                    <a:solidFill>
+                      <a:srgbClr val="FFFFFF"/>
+                    </a:solidFill>
+                  </a:tcPr>
+                </a:tc>
+                <a:tc>
+                  <a:txBody>
+                    <a:bodyPr wrap="square"/>
+                    <a:lstStyle/>
+                    <a:p>
+                      <a:pPr algn="l"/>
+                      <a:r>
+                        <a:rPr sz="1100" b="0">
+                          <a:solidFill>
+                            <a:srgbClr val="22223B"/>
+                          </a:solidFill>
+                          <a:latin typeface="BIZ UDGothic"/>
+                          <a:ea typeface="BIZ UDGothic"/>
+                          <a:cs typeface="BIZ UDGothic"/>
+                        </a:rPr>
+                        <a:t>損失関数（ols：最小二乗、huber・lad：ロバスト回帰）</a:t>
+                      </a:r>
+                    </a:p>
+                  </a:txBody>
+                  <a:tcPr marL="109728" marR="109728" marT="45720" marB="45720" anchor="ctr">
+                    <a:lnL w="9525" cap="flat" cmpd="sng" algn="ctr">
+                      <a:solidFill>
+                        <a:srgbClr val="DADDE6"/>
+                      </a:solidFill>
+                      <a:prstDash val="solid"/>
+                    </a:lnL>
+                    <a:lnR w="9525" cap="flat" cmpd="sng" algn="ctr">
+                      <a:solidFill>
+                        <a:srgbClr val="DADDE6"/>
+                      </a:solidFill>
+                      <a:prstDash val="solid"/>
+                    </a:lnR>
+                    <a:lnT w="9525" cap="flat" cmpd="sng" algn="ctr">
+                      <a:solidFill>
+                        <a:srgbClr val="DADDE6"/>
+                      </a:solidFill>
+                      <a:prstDash val="solid"/>
+                    </a:lnT>
+                    <a:lnB w="9525" cap="flat" cmpd="sng" algn="ctr">
+                      <a:solidFill>
+                        <a:srgbClr val="DADDE6"/>
+                      </a:solidFill>
+                      <a:prstDash val="solid"/>
+                    </a:lnB>
+                    <a:solidFill>
+                      <a:srgbClr val="FFFFFF"/>
+                    </a:solidFill>
+                  </a:tcPr>
+                </a:tc>
+                <a:tc>
+                  <a:txBody>
+                    <a:bodyPr wrap="square"/>
+                    <a:lstStyle/>
+                    <a:p>
+                      <a:pPr algn="l"/>
+                      <a:r>
+                        <a:rPr sz="1100" b="0">
+                          <a:solidFill>
+                            <a:srgbClr val="22223B"/>
+                          </a:solidFill>
+                          <a:latin typeface="BIZ UDGothic"/>
+                          <a:ea typeface="BIZ UDGothic"/>
+                          <a:cs typeface="BIZ UDGothic"/>
+                        </a:rPr>
+                        <a:t>7. 回帰</a:t>
+                      </a:r>
+                    </a:p>
+                  </a:txBody>
+                  <a:tcPr marL="109728" marR="109728" marT="45720" marB="45720" anchor="ctr">
+                    <a:lnL w="9525" cap="flat" cmpd="sng" algn="ctr">
+                      <a:solidFill>
+                        <a:srgbClr val="DADDE6"/>
+                      </a:solidFill>
+                      <a:prstDash val="solid"/>
+                    </a:lnL>
+                    <a:lnR w="9525" cap="flat" cmpd="sng" algn="ctr">
+                      <a:solidFill>
+                        <a:srgbClr val="DADDE6"/>
+                      </a:solidFill>
+                      <a:prstDash val="solid"/>
+                    </a:lnR>
+                    <a:lnT w="9525" cap="flat" cmpd="sng" algn="ctr">
+                      <a:solidFill>
+                        <a:srgbClr val="DADDE6"/>
+                      </a:solidFill>
+                      <a:prstDash val="solid"/>
+                    </a:lnT>
+                    <a:lnB w="9525" cap="flat" cmpd="sng" algn="ctr">
+                      <a:solidFill>
+                        <a:srgbClr val="DADDE6"/>
+                      </a:solidFill>
+                      <a:prstDash val="solid"/>
+                    </a:lnB>
+                    <a:solidFill>
+                      <a:srgbClr val="FFFFFF"/>
+                    </a:solidFill>
+                  </a:tcPr>
+                </a:tc>
+              </a:tr>
+              <a:tr h="402336">
+                <a:tc>
+                  <a:txBody>
+                    <a:bodyPr wrap="square"/>
+                    <a:lstStyle/>
+                    <a:p>
+                      <a:pPr algn="l"/>
+                      <a:r>
+                        <a:rPr sz="1100" b="0">
+                          <a:solidFill>
+                            <a:srgbClr val="22223B"/>
+                          </a:solidFill>
+                          <a:latin typeface="BIZ UDGothic"/>
+                          <a:ea typeface="BIZ UDGothic"/>
+                          <a:cs typeface="BIZ UDGothic"/>
+                        </a:rPr>
+                        <a:t>highOrder.huberTuning</a:t>
+                      </a:r>
+                    </a:p>
+                  </a:txBody>
+                  <a:tcPr marL="109728" marR="109728" marT="45720" marB="45720" anchor="ctr">
+                    <a:lnL w="9525" cap="flat" cmpd="sng" algn="ctr">
+                      <a:solidFill>
+                        <a:srgbClr val="DADDE6"/>
+                      </a:solidFill>
+                      <a:prstDash val="solid"/>
+                    </a:lnL>
+                    <a:lnR w="9525" cap="flat" cmpd="sng" algn="ctr">
+                      <a:solidFill>
+                        <a:srgbClr val="DADDE6"/>
+                      </a:solidFill>
+                      <a:prstDash val="solid"/>
+                    </a:lnR>
+                    <a:lnT w="9525" cap="flat" cmpd="sng" algn="ctr">
+                      <a:solidFill>
+                        <a:srgbClr val="DADDE6"/>
+                      </a:solidFill>
+                      <a:prstDash val="solid"/>
+                    </a:lnT>
+                    <a:lnB w="9525" cap="flat" cmpd="sng" algn="ctr">
+                      <a:solidFill>
+                        <a:srgbClr val="DADDE6"/>
+                      </a:solidFill>
+                      <a:prstDash val="solid"/>
+                    </a:lnB>
+                    <a:solidFill>
+                      <a:srgbClr val="FFFFFF"/>
+                    </a:solidFill>
+                  </a:tcPr>
+                </a:tc>
+                <a:tc>
+                  <a:txBody>
+                    <a:bodyPr wrap="square"/>
+                    <a:lstStyle/>
+                    <a:p>
+                      <a:pPr algn="l"/>
+                      <a:r>
+                        <a:rPr sz="1100" b="0">
+                          <a:solidFill>
+                            <a:srgbClr val="22223B"/>
+                          </a:solidFill>
+                          <a:latin typeface="BIZ UDGothic"/>
+                          <a:ea typeface="BIZ UDGothic"/>
+                          <a:cs typeface="BIZ UDGothic"/>
+                        </a:rPr>
+                        <a:t>1.345</a:t>
+                      </a:r>
+                    </a:p>
+                  </a:txBody>
+                  <a:tcPr marL="109728" marR="109728" marT="45720" marB="45720" anchor="ctr">
+                    <a:lnL w="9525" cap="flat" cmpd="sng" algn="ctr">
+                      <a:solidFill>
+                        <a:srgbClr val="DADDE6"/>
+                      </a:solidFill>
+                      <a:prstDash val="solid"/>
+                    </a:lnL>
+                    <a:lnR w="9525" cap="flat" cmpd="sng" algn="ctr">
+                      <a:solidFill>
+                        <a:srgbClr val="DADDE6"/>
+                      </a:solidFill>
+                      <a:prstDash val="solid"/>
+                    </a:lnR>
+                    <a:lnT w="9525" cap="flat" cmpd="sng" algn="ctr">
+                      <a:solidFill>
+                        <a:srgbClr val="DADDE6"/>
+                      </a:solidFill>
+                      <a:prstDash val="solid"/>
+                    </a:lnT>
+                    <a:lnB w="9525" cap="flat" cmpd="sng" algn="ctr">
+                      <a:solidFill>
+                        <a:srgbClr val="DADDE6"/>
+                      </a:solidFill>
+                      <a:prstDash val="solid"/>
+                    </a:lnB>
+                    <a:solidFill>
+                      <a:srgbClr val="FFFFFF"/>
+                    </a:solidFill>
+                  </a:tcPr>
+                </a:tc>
+                <a:tc>
+                  <a:txBody>
+                    <a:bodyPr wrap="square"/>
+                    <a:lstStyle/>
+                    <a:p>
+                      <a:pPr algn="l"/>
+                      <a:r>
+                        <a:rPr sz="1100" b="0">
+                          <a:solidFill>
+                            <a:srgbClr val="22223B"/>
+                          </a:solidFill>
+                          <a:latin typeface="BIZ UDGothic"/>
+                          <a:ea typeface="BIZ UDGothic"/>
+                          <a:cs typeface="BIZ UDGothic"/>
+                        </a:rPr>
+                        <a:t>Huber の定数 c（正規分布の誤差で効率 95%）</a:t>
+                      </a:r>
+                    </a:p>
+                  </a:txBody>
+                  <a:tcPr marL="109728" marR="109728" marT="45720" marB="45720" anchor="ctr">
+                    <a:lnL w="9525" cap="flat" cmpd="sng" algn="ctr">
+                      <a:solidFill>
+                        <a:srgbClr val="DADDE6"/>
+                      </a:solidFill>
+                      <a:prstDash val="solid"/>
+                    </a:lnL>
+                    <a:lnR w="9525" cap="flat" cmpd="sng" algn="ctr">
+                      <a:solidFill>
+                        <a:srgbClr val="DADDE6"/>
+                      </a:solidFill>
+                      <a:prstDash val="solid"/>
+                    </a:lnR>
+                    <a:lnT w="9525" cap="flat" cmpd="sng" algn="ctr">
+                      <a:solidFill>
+                        <a:srgbClr val="DADDE6"/>
+                      </a:solidFill>
+                      <a:prstDash val="solid"/>
+                    </a:lnT>
+                    <a:lnB w="9525" cap="flat" cmpd="sng" algn="ctr">
+                      <a:solidFill>
+                        <a:srgbClr val="DADDE6"/>
+                      </a:solidFill>
+                      <a:prstDash val="solid"/>
+                    </a:lnB>
+                    <a:solidFill>
+                      <a:srgbClr val="FFFFFF"/>
+                    </a:solidFill>
+                  </a:tcPr>
+                </a:tc>
+                <a:tc>
+                  <a:txBody>
+                    <a:bodyPr wrap="square"/>
+                    <a:lstStyle/>
+                    <a:p>
+                      <a:pPr algn="l"/>
+                      <a:r>
+                        <a:rPr sz="1100" b="0">
+                          <a:solidFill>
+                            <a:srgbClr val="22223B"/>
+                          </a:solidFill>
+                          <a:latin typeface="BIZ UDGothic"/>
+                          <a:ea typeface="BIZ UDGothic"/>
+                          <a:cs typeface="BIZ UDGothic"/>
+                        </a:rPr>
+                        <a:t>7. Huber の c</a:t>
+                      </a:r>
+                    </a:p>
+                  </a:txBody>
+                  <a:tcPr marL="109728" marR="109728" marT="45720" marB="45720" anchor="ctr">
+                    <a:lnL w="9525" cap="flat" cmpd="sng" algn="ctr">
+                      <a:solidFill>
+                        <a:srgbClr val="DADDE6"/>
+                      </a:solidFill>
+                      <a:prstDash val="solid"/>
+                    </a:lnL>
+                    <a:lnR w="9525" cap="flat" cmpd="sng" algn="ctr">
+                      <a:solidFill>
+                        <a:srgbClr val="DADDE6"/>
+                      </a:solidFill>
+                      <a:prstDash val="solid"/>
+                    </a:lnR>
+                    <a:lnT w="9525" cap="flat" cmpd="sng" algn="ctr">
+                      <a:solidFill>
+                        <a:srgbClr val="DADDE6"/>
+                      </a:solidFill>
+                      <a:prstDash val="solid"/>
+                    </a:lnT>
+                    <a:lnB w="9525" cap="flat" cmpd="sng" algn="ctr">
+                      <a:solidFill>
+                        <a:srgbClr val="DADDE6"/>
+                      </a:solidFill>
+                      <a:prstDash val="solid"/>
+                    </a:lnB>
+                    <a:solidFill>
+                      <a:srgbClr val="FFFFFF"/>
+                    </a:solidFill>
+                  </a:tcPr>
+                </a:tc>
+              </a:tr>
+              <a:tr h="402336">
+                <a:tc>
+                  <a:txBody>
+                    <a:bodyPr wrap="square"/>
+                    <a:lstStyle/>
+                    <a:p>
+                      <a:pPr algn="l"/>
+                      <a:r>
+                        <a:rPr sz="1100" b="0">
+                          <a:solidFill>
+                            <a:srgbClr val="22223B"/>
+                          </a:solidFill>
+                          <a:latin typeface="BIZ UDGothic"/>
+                          <a:ea typeface="BIZ UDGothic"/>
+                          <a:cs typeface="BIZ UDGothic"/>
+                        </a:rPr>
+                        <a:t>highOrder.l2 ・ lambda</a:t>
+                      </a:r>
+                    </a:p>
+                  </a:txBody>
+                  <a:tcPr marL="109728" marR="109728" marT="45720" marB="45720" anchor="ctr">
+                    <a:lnL w="9525" cap="flat" cmpd="sng" algn="ctr">
+                      <a:solidFill>
+                        <a:srgbClr val="DADDE6"/>
+                      </a:solidFill>
+                      <a:prstDash val="solid"/>
+                    </a:lnL>
+                    <a:lnR w="9525" cap="flat" cmpd="sng" algn="ctr">
+                      <a:solidFill>
+                        <a:srgbClr val="DADDE6"/>
+                      </a:solidFill>
+                      <a:prstDash val="solid"/>
+                    </a:lnR>
+                    <a:lnT w="9525" cap="flat" cmpd="sng" algn="ctr">
+                      <a:solidFill>
+                        <a:srgbClr val="DADDE6"/>
+                      </a:solidFill>
+                      <a:prstDash val="solid"/>
+                    </a:lnT>
+                    <a:lnB w="9525" cap="flat" cmpd="sng" algn="ctr">
+                      <a:solidFill>
+                        <a:srgbClr val="DADDE6"/>
+                      </a:solidFill>
+                      <a:prstDash val="solid"/>
+                    </a:lnB>
+                    <a:solidFill>
+                      <a:srgbClr val="FFFFFF"/>
+                    </a:solidFill>
+                  </a:tcPr>
+                </a:tc>
+                <a:tc>
+                  <a:txBody>
+                    <a:bodyPr wrap="square"/>
+                    <a:lstStyle/>
+                    <a:p>
+                      <a:pPr algn="l"/>
+                      <a:r>
+                        <a:rPr sz="1100" b="0">
+                          <a:solidFill>
+                            <a:srgbClr val="22223B"/>
+                          </a:solidFill>
+                          <a:latin typeface="BIZ UDGothic"/>
+                          <a:ea typeface="BIZ UDGothic"/>
+                          <a:cs typeface="BIZ UDGothic"/>
+                        </a:rPr>
+                        <a:t>true ・ 0.1</a:t>
+                      </a:r>
+                    </a:p>
+                  </a:txBody>
+                  <a:tcPr marL="109728" marR="109728" marT="45720" marB="45720" anchor="ctr">
+                    <a:lnL w="9525" cap="flat" cmpd="sng" algn="ctr">
+                      <a:solidFill>
+                        <a:srgbClr val="DADDE6"/>
+                      </a:solidFill>
+                      <a:prstDash val="solid"/>
+                    </a:lnL>
+                    <a:lnR w="9525" cap="flat" cmpd="sng" algn="ctr">
+                      <a:solidFill>
+                        <a:srgbClr val="DADDE6"/>
+                      </a:solidFill>
+                      <a:prstDash val="solid"/>
+                    </a:lnR>
+                    <a:lnT w="9525" cap="flat" cmpd="sng" algn="ctr">
+                      <a:solidFill>
+                        <a:srgbClr val="DADDE6"/>
+                      </a:solidFill>
+                      <a:prstDash val="solid"/>
+                    </a:lnT>
+                    <a:lnB w="9525" cap="flat" cmpd="sng" algn="ctr">
+                      <a:solidFill>
+                        <a:srgbClr val="DADDE6"/>
+                      </a:solidFill>
+                      <a:prstDash val="solid"/>
+                    </a:lnB>
+                    <a:solidFill>
+                      <a:srgbClr val="FFFFFF"/>
+                    </a:solidFill>
+                  </a:tcPr>
+                </a:tc>
+                <a:tc>
+                  <a:txBody>
+                    <a:bodyPr wrap="square"/>
+                    <a:lstStyle/>
+                    <a:p>
+                      <a:pPr algn="l"/>
+                      <a:r>
+                        <a:rPr sz="1100" b="0">
+                          <a:solidFill>
+                            <a:srgbClr val="22223B"/>
+                          </a:solidFill>
+                          <a:latin typeface="BIZ UDGothic"/>
+                          <a:ea typeface="BIZ UDGothic"/>
+                          <a:cs typeface="BIZ UDGothic"/>
+                        </a:rPr>
+                        <a:t>高次項（2次以上）だけに L2 正則化をかけるか・強さ λ</a:t>
+                      </a:r>
+                    </a:p>
+                  </a:txBody>
+                  <a:tcPr marL="109728" marR="109728" marT="45720" marB="45720" anchor="ctr">
+                    <a:lnL w="9525" cap="flat" cmpd="sng" algn="ctr">
+                      <a:solidFill>
+                        <a:srgbClr val="DADDE6"/>
+                      </a:solidFill>
+                      <a:prstDash val="solid"/>
+                    </a:lnL>
+                    <a:lnR w="9525" cap="flat" cmpd="sng" algn="ctr">
+                      <a:solidFill>
+                        <a:srgbClr val="DADDE6"/>
+                      </a:solidFill>
+                      <a:prstDash val="solid"/>
+                    </a:lnR>
+                    <a:lnT w="9525" cap="flat" cmpd="sng" algn="ctr">
+                      <a:solidFill>
+                        <a:srgbClr val="DADDE6"/>
+                      </a:solidFill>
+                      <a:prstDash val="solid"/>
+                    </a:lnT>
+                    <a:lnB w="9525" cap="flat" cmpd="sng" algn="ctr">
+                      <a:solidFill>
+                        <a:srgbClr val="DADDE6"/>
+                      </a:solidFill>
+                      <a:prstDash val="solid"/>
+                    </a:lnB>
+                    <a:solidFill>
+                      <a:srgbClr val="FFFFFF"/>
+                    </a:solidFill>
+                  </a:tcPr>
+                </a:tc>
+                <a:tc>
+                  <a:txBody>
+                    <a:bodyPr wrap="square"/>
+                    <a:lstStyle/>
+                    <a:p>
+                      <a:pPr algn="l"/>
+                      <a:r>
+                        <a:rPr sz="1100" b="0">
+                          <a:solidFill>
+                            <a:srgbClr val="22223B"/>
+                          </a:solidFill>
+                          <a:latin typeface="BIZ UDGothic"/>
+                          <a:ea typeface="BIZ UDGothic"/>
+                          <a:cs typeface="BIZ UDGothic"/>
+                        </a:rPr>
+                        <a:t>7. L2・λ</a:t>
+                      </a:r>
+                    </a:p>
+                  </a:txBody>
+                  <a:tcPr marL="109728" marR="109728" marT="45720" marB="45720" anchor="ctr">
+                    <a:lnL w="9525" cap="flat" cmpd="sng" algn="ctr">
+                      <a:solidFill>
+                        <a:srgbClr val="DADDE6"/>
+                      </a:solidFill>
+                      <a:prstDash val="solid"/>
+                    </a:lnL>
+                    <a:lnR w="9525" cap="flat" cmpd="sng" algn="ctr">
+                      <a:solidFill>
+                        <a:srgbClr val="DADDE6"/>
+                      </a:solidFill>
+                      <a:prstDash val="solid"/>
+                    </a:lnR>
+                    <a:lnT w="9525" cap="flat" cmpd="sng" algn="ctr">
+                      <a:solidFill>
+                        <a:srgbClr val="DADDE6"/>
+                      </a:solidFill>
+                      <a:prstDash val="solid"/>
+                    </a:lnT>
+                    <a:lnB w="9525" cap="flat" cmpd="sng" algn="ctr">
+                      <a:solidFill>
+                        <a:srgbClr val="DADDE6"/>
+                      </a:solidFill>
+                      <a:prstDash val="solid"/>
+                    </a:lnB>
+                    <a:solidFill>
+                      <a:srgbClr val="FFFFFF"/>
+                    </a:solidFill>
+                  </a:tcPr>
+                </a:tc>
+              </a:tr>
+            </a:tbl>
+          </a:graphicData>
+        </a:graphic>
+      </p:graphicFrame>
+      <p:sp>
+        <p:nvSpPr>
+          <p:cNvPr id="7" name="Rounded Rectangle 6"/>
+          <p:cNvSpPr/>
+          <p:nvPr/>
+        </p:nvSpPr>
+        <p:spPr>
+          <a:xfrm>
+            <a:off x="548640" y="5120640"/>
+            <a:ext cx="11091672" cy="548640"/>
+          </a:xfrm>
+          <a:prstGeom prst="roundRect">
+            <a:avLst>
+              <a:gd name="adj" fmla="val 13333"/>
+            </a:avLst>
+          </a:prstGeom>
+          <a:solidFill>
+            <a:srgbClr val="FFFFFF"/>
+          </a:solidFill>
+          <a:ln w="9525">
+            <a:solidFill>
+              <a:srgbClr val="DADDE6"/>
+            </a:solidFill>
+          </a:ln>
+          <a:effectLst/>
+        </p:spPr>
+        <p:style>
+          <a:lnRef idx="1">
+            <a:schemeClr val="accent1"/>
+          </a:lnRef>
+          <a:fillRef idx="3">
+            <a:schemeClr val="accent1"/>
+          </a:fillRef>
+          <a:effectRef idx="2">
+            <a:schemeClr val="accent1"/>
+          </a:effectRef>
+          <a:fontRef idx="minor">
+            <a:schemeClr val="lt1"/>
+          </a:fontRef>
+        </p:style>
+        <p:txBody>
+          <a:bodyPr rtlCol="0" anchor="ctr"/>
+          <a:lstStyle/>
+          <a:p/>
+        </p:txBody>
+      </p:sp>
+      <p:sp>
+        <p:nvSpPr>
+          <p:cNvPr id="8" name="Oval 7"/>
+          <p:cNvSpPr/>
+          <p:nvPr/>
+        </p:nvSpPr>
+        <p:spPr>
+          <a:xfrm>
+            <a:off x="749808" y="5134355"/>
+            <a:ext cx="521207" cy="521207"/>
+          </a:xfrm>
+          <a:prstGeom prst="ellipse">
+            <a:avLst/>
+          </a:prstGeom>
+          <a:solidFill>
+            <a:srgbClr val="4A4E69"/>
+          </a:solidFill>
+          <a:ln>
+            <a:noFill/>
+          </a:ln>
+          <a:effectLst/>
+        </p:spPr>
+        <p:style>
+          <a:lnRef idx="1">
+            <a:schemeClr val="accent1"/>
+          </a:lnRef>
+          <a:fillRef idx="3">
+            <a:schemeClr val="accent1"/>
+          </a:fillRef>
+          <a:effectRef idx="2">
+            <a:schemeClr val="accent1"/>
+          </a:effectRef>
+          <a:fontRef idx="minor">
+            <a:schemeClr val="lt1"/>
+          </a:fontRef>
+        </p:style>
+        <p:txBody>
+          <a:bodyPr rtlCol="0" anchor="ctr" lIns="0" rIns="0" tIns="0" bIns="0"/>
+          <a:lstStyle/>
+          <a:p>
+            <a:pPr algn="ctr"/>
+            <a:r>
+              <a:rPr sz="1600" b="1">
+                <a:solidFill>
+                  <a:srgbClr val="FFFFFF"/>
+                </a:solidFill>
+                <a:latin typeface="BIZ UDGothic"/>
+                <a:ea typeface="BIZ UDGothic"/>
+                <a:cs typeface="BIZ UDGothic"/>
+              </a:rPr>
+              <a:t>i</a:t>
+            </a:r>
+          </a:p>
+        </p:txBody>
+      </p:sp>
+      <p:sp>
+        <p:nvSpPr>
+          <p:cNvPr id="9" name="TextBox 8"/>
+          <p:cNvSpPr txBox="1"/>
+          <p:nvPr/>
+        </p:nvSpPr>
+        <p:spPr>
+          <a:xfrm>
+            <a:off x="1463040" y="5120640"/>
+            <a:ext cx="9994392" cy="548640"/>
+          </a:xfrm>
+          <a:prstGeom prst="rect">
+            <a:avLst/>
+          </a:prstGeom>
+          <a:noFill/>
+        </p:spPr>
+        <p:txBody>
+          <a:bodyPr wrap="square" lIns="45720" rIns="45720" tIns="18288" bIns="18288" anchor="ctr"/>
+          <a:lstStyle/>
+          <a:p>
+            <a:pPr algn="l"/>
+            <a:r>
+              <a:rPr sz="1300" b="1">
+                <a:solidFill>
+                  <a:srgbClr val="22223B"/>
+                </a:solidFill>
+                <a:latin typeface="BIZ UDGothic"/>
+                <a:ea typeface="BIZ UDGothic"/>
+                <a:cs typeface="BIZ UDGothic"/>
+              </a:rPr>
+              <a:t>λ はそろえた係数に対する値。過去のシミュレーション（1 Shot 7×11 点）の標準が 0.1、点を減らすときは λ × √(77 / 点の数) が目安</a:t>
+            </a:r>
+          </a:p>
+        </p:txBody>
+      </p:sp>
+      <p:sp>
+        <p:nvSpPr>
+          <p:cNvPr id="10" name="Rounded Rectangle 9"/>
+          <p:cNvSpPr/>
+          <p:nvPr/>
+        </p:nvSpPr>
+        <p:spPr>
+          <a:xfrm>
+            <a:off x="548640" y="5806440"/>
+            <a:ext cx="11091672" cy="502920"/>
+          </a:xfrm>
+          <a:prstGeom prst="roundRect">
+            <a:avLst>
+              <a:gd name="adj" fmla="val 14545"/>
+            </a:avLst>
+          </a:prstGeom>
+          <a:solidFill>
+            <a:srgbClr val="FFFFFF"/>
+          </a:solidFill>
+          <a:ln w="9525">
+            <a:solidFill>
+              <a:srgbClr val="DADDE6"/>
+            </a:solidFill>
+          </a:ln>
+          <a:effectLst/>
+        </p:spPr>
+        <p:style>
+          <a:lnRef idx="1">
+            <a:schemeClr val="accent1"/>
+          </a:lnRef>
+          <a:fillRef idx="3">
+            <a:schemeClr val="accent1"/>
+          </a:fillRef>
+          <a:effectRef idx="2">
+            <a:schemeClr val="accent1"/>
+          </a:effectRef>
+          <a:fontRef idx="minor">
+            <a:schemeClr val="lt1"/>
+          </a:fontRef>
+        </p:style>
+        <p:txBody>
+          <a:bodyPr rtlCol="0" anchor="ctr"/>
+          <a:lstStyle/>
+          <a:p/>
+        </p:txBody>
+      </p:sp>
+      <p:sp>
+        <p:nvSpPr>
+          <p:cNvPr id="11" name="Oval 10"/>
+          <p:cNvSpPr/>
+          <p:nvPr/>
+        </p:nvSpPr>
+        <p:spPr>
+          <a:xfrm>
+            <a:off x="749808" y="5797296"/>
+            <a:ext cx="521207" cy="521207"/>
+          </a:xfrm>
+          <a:prstGeom prst="ellipse">
+            <a:avLst/>
+          </a:prstGeom>
+          <a:solidFill>
+            <a:srgbClr val="4A4E69"/>
+          </a:solidFill>
+          <a:ln>
+            <a:noFill/>
+          </a:ln>
+          <a:effectLst/>
+        </p:spPr>
+        <p:style>
+          <a:lnRef idx="1">
+            <a:schemeClr val="accent1"/>
+          </a:lnRef>
+          <a:fillRef idx="3">
+            <a:schemeClr val="accent1"/>
+          </a:fillRef>
+          <a:effectRef idx="2">
+            <a:schemeClr val="accent1"/>
+          </a:effectRef>
+          <a:fontRef idx="minor">
+            <a:schemeClr val="lt1"/>
+          </a:fontRef>
+        </p:style>
+        <p:txBody>
+          <a:bodyPr rtlCol="0" anchor="ctr" lIns="0" rIns="0" tIns="0" bIns="0"/>
+          <a:lstStyle/>
+          <a:p>
+            <a:pPr algn="ctr"/>
+            <a:r>
+              <a:rPr sz="1600" b="1">
+                <a:solidFill>
+                  <a:srgbClr val="FFFFFF"/>
+                </a:solidFill>
+                <a:latin typeface="BIZ UDGothic"/>
+                <a:ea typeface="BIZ UDGothic"/>
+                <a:cs typeface="BIZ UDGothic"/>
+              </a:rPr>
+              <a:t>i</a:t>
+            </a:r>
+          </a:p>
+        </p:txBody>
+      </p:sp>
+      <p:sp>
+        <p:nvSpPr>
+          <p:cNvPr id="12" name="TextBox 11"/>
+          <p:cNvSpPr txBox="1"/>
+          <p:nvPr/>
+        </p:nvSpPr>
+        <p:spPr>
+          <a:xfrm>
+            <a:off x="1463040" y="5806440"/>
+            <a:ext cx="9994392" cy="502920"/>
+          </a:xfrm>
+          <a:prstGeom prst="rect">
+            <a:avLst/>
+          </a:prstGeom>
+          <a:noFill/>
+        </p:spPr>
+        <p:txBody>
+          <a:bodyPr wrap="square" lIns="45720" rIns="45720" tIns="18288" bIns="18288" anchor="ctr"/>
+          <a:lstStyle/>
+          <a:p>
+            <a:pPr algn="l"/>
+            <a:r>
+              <a:rPr sz="1300" b="1">
+                <a:solidFill>
+                  <a:srgbClr val="22223B"/>
+                </a:solidFill>
+                <a:latin typeface="BIZ UDGothic"/>
+                <a:ea typeface="BIZ UDGothic"/>
+                <a:cs typeface="BIZ UDGothic"/>
+              </a:rPr>
+              <a:t>highOrder は評価の結果を変えない（「続きから再開」の比較にも使わない）。既定の設定ファイルにも書ける</a:t>
+            </a:r>
+          </a:p>
+        </p:txBody>
+      </p:sp>
+    </p:spTree>
+  </p:cSld>
+  <p:clrMapOvr>
+    <a:masterClrMapping/>
+  </p:clrMapOvr>
+</p:sld>
+</file>
+
+<file path=ppt/slides/slide15.xml><?xml version="1.0" encoding="utf-8"?>
+<p:sld xmlns:a="http://schemas.openxmlformats.org/drawingml/2006/main" xmlns:p="http://schemas.openxmlformats.org/presentationml/2006/main" xmlns:r="http://schemas.openxmlformats.org/officeDocument/2006/relationships">
+  <p:cSld>
+    <p:bg>
+      <p:bgPr>
+        <a:solidFill>
+          <a:srgbClr val="FFFFFF"/>
+        </a:solidFill>
+        <a:effectLst/>
+      </p:bgPr>
+    </p:bg>
+    <p:spTree>
+      <p:nvGrpSpPr>
+        <p:cNvPr id="1" name=""/>
+        <p:cNvGrpSpPr/>
+        <p:nvPr/>
+      </p:nvGrpSpPr>
+      <p:grpSpPr/>
+      <p:sp>
+        <p:nvSpPr>
+          <p:cNvPr id="2" name="TextBox 1"/>
+          <p:cNvSpPr txBox="1"/>
+          <p:nvPr/>
+        </p:nvSpPr>
+        <p:spPr>
+          <a:xfrm>
+            <a:off x="548640" y="274320"/>
+            <a:ext cx="7315200" cy="274320"/>
+          </a:xfrm>
+          <a:prstGeom prst="rect">
+            <a:avLst/>
+          </a:prstGeom>
+          <a:noFill/>
+        </p:spPr>
+        <p:txBody>
+          <a:bodyPr wrap="square" lIns="45720" rIns="45720" tIns="18288" bIns="18288" anchor="t"/>
+          <a:lstStyle/>
+          <a:p>
+            <a:pPr algn="l"/>
+            <a:r>
+              <a:rPr sz="1200" b="1">
+                <a:solidFill>
+                  <a:srgbClr val="6C6F7F"/>
+                </a:solidFill>
+                <a:latin typeface="BIZ UDGothic"/>
+                <a:ea typeface="BIZ UDGothic"/>
+                <a:cs typeface="BIZ UDGothic"/>
+              </a:rPr>
+              <a:t>03　設定の項目と初期値</a:t>
+            </a:r>
+          </a:p>
+        </p:txBody>
+      </p:sp>
+      <p:sp>
+        <p:nvSpPr>
+          <p:cNvPr id="3" name="TextBox 2"/>
+          <p:cNvSpPr txBox="1"/>
+          <p:nvPr/>
+        </p:nvSpPr>
+        <p:spPr>
+          <a:xfrm>
+            <a:off x="548640" y="566928"/>
+            <a:ext cx="11091672" cy="685800"/>
+          </a:xfrm>
+          <a:prstGeom prst="rect">
+            <a:avLst/>
+          </a:prstGeom>
+          <a:noFill/>
+        </p:spPr>
+        <p:txBody>
+          <a:bodyPr wrap="square" lIns="45720" rIns="45720" tIns="18288" bIns="18288" anchor="ctr"/>
+          <a:lstStyle/>
+          <a:p>
+            <a:pPr algn="l"/>
+            <a:r>
+              <a:rPr sz="2800" b="1">
+                <a:solidFill>
+                  <a:srgbClr val="22223B"/>
+                </a:solidFill>
+                <a:latin typeface="BIZ UDGothic"/>
+                <a:ea typeface="BIZ UDGothic"/>
+                <a:cs typeface="BIZ UDGothic"/>
+              </a:rPr>
+              <a:t>手法の細かい設定（methods.options）と画面の定数</a:t>
+            </a:r>
+          </a:p>
+        </p:txBody>
+      </p:sp>
+      <p:sp>
+        <p:nvSpPr>
+          <p:cNvPr id="4" name="TextBox 3"/>
+          <p:cNvSpPr txBox="1"/>
+          <p:nvPr/>
+        </p:nvSpPr>
+        <p:spPr>
+          <a:xfrm>
+            <a:off x="548640" y="6473952"/>
+            <a:ext cx="3657600" cy="228600"/>
+          </a:xfrm>
+          <a:prstGeom prst="rect">
+            <a:avLst/>
+          </a:prstGeom>
+          <a:noFill/>
+        </p:spPr>
+        <p:txBody>
+          <a:bodyPr wrap="square" lIns="45720" rIns="45720" tIns="18288" bIns="18288" anchor="t"/>
+          <a:lstStyle/>
+          <a:p>
+            <a:pPr algn="l"/>
+            <a:r>
+              <a:rPr sz="900" b="0">
+                <a:solidFill>
+                  <a:srgbClr val="6C6F7F"/>
+                </a:solidFill>
+                <a:latin typeface="BIZ UDGothic"/>
+                <a:ea typeface="BIZ UDGothic"/>
+                <a:cs typeface="BIZ UDGothic"/>
+              </a:rPr>
+              <a:t>デフォルト設定の編集ガイド</a:t>
+            </a:r>
+          </a:p>
+        </p:txBody>
+      </p:sp>
+      <p:sp>
+        <p:nvSpPr>
+          <p:cNvPr id="5" name="TextBox 4"/>
+          <p:cNvSpPr txBox="1"/>
+          <p:nvPr/>
+        </p:nvSpPr>
+        <p:spPr>
+          <a:xfrm>
+            <a:off x="10725912" y="6473952"/>
+            <a:ext cx="914400" cy="228600"/>
+          </a:xfrm>
+          <a:prstGeom prst="rect">
+            <a:avLst/>
+          </a:prstGeom>
+          <a:noFill/>
+        </p:spPr>
+        <p:txBody>
+          <a:bodyPr wrap="square" lIns="45720" rIns="45720" tIns="18288" bIns="18288" anchor="t"/>
+          <a:lstStyle/>
+          <a:p>
+            <a:pPr algn="r"/>
+            <a:r>
+              <a:rPr sz="1000" b="0">
+                <a:solidFill>
+                  <a:srgbClr val="6C6F7F"/>
+                </a:solidFill>
+                <a:latin typeface="BIZ UDGothic"/>
+                <a:ea typeface="BIZ UDGothic"/>
+                <a:cs typeface="BIZ UDGothic"/>
+              </a:rPr>
+              <a:t>15</a:t>
             </a:r>
           </a:p>
         </p:txBody>
@@ -14764,7 +17081,7 @@
 </p:sld>
 </file>
 
-<file path=ppt/slides/slide15.xml><?xml version="1.0" encoding="utf-8"?>
+<file path=ppt/slides/slide16.xml><?xml version="1.0" encoding="utf-8"?>
 <p:sld xmlns:a="http://schemas.openxmlformats.org/drawingml/2006/main" xmlns:p="http://schemas.openxmlformats.org/presentationml/2006/main" xmlns:r="http://schemas.openxmlformats.org/officeDocument/2006/relationships">
   <p:cSld>
     <p:bg>
@@ -14917,7 +17234,7 @@
                 <a:ea typeface="BIZ UDGothic"/>
                 <a:cs typeface="BIZ UDGothic"/>
               </a:rPr>
-              <a:t>15</a:t>
+              <a:t>16</a:t>
             </a:r>
           </a:p>
         </p:txBody>
@@ -15635,7 +17952,7 @@
 </p:sld>
 </file>
 
-<file path=ppt/slides/slide16.xml><?xml version="1.0" encoding="utf-8"?>
+<file path=ppt/slides/slide17.xml><?xml version="1.0" encoding="utf-8"?>
 <p:sld xmlns:a="http://schemas.openxmlformats.org/drawingml/2006/main" xmlns:p="http://schemas.openxmlformats.org/presentationml/2006/main" xmlns:r="http://schemas.openxmlformats.org/officeDocument/2006/relationships">
   <p:cSld>
     <p:bg>
@@ -15788,7 +18105,7 @@
                 <a:ea typeface="BIZ UDGothic"/>
                 <a:cs typeface="BIZ UDGothic"/>
               </a:rPr>
-              <a:t>16</a:t>
+              <a:t>17</a:t>
             </a:r>
           </a:p>
         </p:txBody>
@@ -16827,7 +19144,7 @@
 </p:sld>
 </file>
 
-<file path=ppt/slides/slide17.xml><?xml version="1.0" encoding="utf-8"?>
+<file path=ppt/slides/slide18.xml><?xml version="1.0" encoding="utf-8"?>
 <p:sld xmlns:a="http://schemas.openxmlformats.org/drawingml/2006/main" xmlns:p="http://schemas.openxmlformats.org/presentationml/2006/main" xmlns:r="http://schemas.openxmlformats.org/officeDocument/2006/relationships">
   <p:cSld>
     <p:bg>
@@ -16980,7 +19297,7 @@
                 <a:ea typeface="BIZ UDGothic"/>
                 <a:cs typeface="BIZ UDGothic"/>
               </a:rPr>
-              <a:t>17</a:t>
+              <a:t>18</a:t>
             </a:r>
           </a:p>
         </p:txBody>
@@ -17105,7 +19422,7 @@
                 <a:ea typeface="BIZ UDGothic"/>
                 <a:cs typeface="BIZ UDGothic"/>
               </a:rPr>
-              <a:t>cd tests → runAllTests。「成功 173 件、失敗 0 件、未完了 0 件」（2026-10-26 時点の件数）</a:t>
+              <a:t>cd tests → runAllTests。「成功 197 件、失敗 0 件、未完了 0 件」（2026-10-29 時点の件数）</a:t>
             </a:r>
           </a:p>
         </p:txBody>
@@ -18478,7 +20795,7 @@
 </p:sld>
 </file>
 
-<file path=ppt/slides/slide18.xml><?xml version="1.0" encoding="utf-8"?>
+<file path=ppt/slides/slide19.xml><?xml version="1.0" encoding="utf-8"?>
 <p:sld xmlns:a="http://schemas.openxmlformats.org/drawingml/2006/main" xmlns:p="http://schemas.openxmlformats.org/presentationml/2006/main" xmlns:r="http://schemas.openxmlformats.org/officeDocument/2006/relationships">
   <p:cSld>
     <p:bg>
@@ -19430,7 +21747,7 @@
                 <a:ea typeface="BIZ UDGothic"/>
                 <a:cs typeface="BIZ UDGothic"/>
               </a:rPr>
-              <a:t>「7. ヘルプ」タブ</a:t>
+              <a:t>「8. ヘルプ」タブ</a:t>
             </a:r>
           </a:p>
         </p:txBody>
@@ -19535,7 +21852,7 @@
                 <a:ea typeface="BIZ UDGothic"/>
                 <a:cs typeface="BIZ UDGothic"/>
               </a:rPr>
-              <a:t>18</a:t>
+              <a:t>19</a:t>
             </a:r>
           </a:p>
         </p:txBody>
@@ -20512,7 +22829,7 @@
                 <a:ea typeface="BIZ UDGothic"/>
                 <a:cs typeface="BIZ UDGothic"/>
               </a:rPr>
-              <a:t>data・factors・sampling・evaluation・overlay・methods</a:t>
+              <a:t>data・factors・sampling・evaluation・overlay・methods・highOrder</a:t>
             </a:r>
           </a:p>
         </p:txBody>
@@ -27158,7 +29475,7 @@
                 <a:ea typeface="BIZ UDGothic"/>
                 <a:cs typeface="BIZ UDGothic"/>
               </a:rPr>
-              <a:t>data・factors・sampling・evaluation・overlay の初期値</a:t>
+              <a:t>data・factors・sampling・evaluation・overlay・highOrder の初期値</a:t>
             </a:r>
           </a:p>
         </p:txBody>
@@ -27980,7 +30297,7 @@
                           <a:ea typeface="BIZ UDGothic"/>
                           <a:cs typeface="BIZ UDGothic"/>
                         </a:rPr>
-                        <a:t>評価の条件の初期値（data・factors・sampling・evaluation・overlay）</a:t>
+                        <a:t>評価の条件の初期値（data・factors・sampling・evaluation・overlay・highOrder）</a:t>
                       </a:r>
                     </a:p>
                   </a:txBody>
@@ -28874,7 +31191,7 @@
                           <a:ea typeface="BIZ UDGothic"/>
                           <a:cs typeface="BIZ UDGothic"/>
                         </a:rPr>
-                        <a:t>「7. ヘルプ」の説明（用語・カーネル・補正の式）</a:t>
+                        <a:t>「8. ヘルプ」の説明（用語・カーネル・補正の式）</a:t>
                       </a:r>
                     </a:p>
                   </a:txBody>

--- a/matlab_app/docs/defaults_guide/デフォルト設定の編集ガイド.pptx
+++ b/matlab_app/docs/defaults_guide/デフォルト設定の編集ガイド.pptx
@@ -799,7 +799,7 @@
           <a:lstStyle/>
           <a:p>
             <a:r>
-              <a:t>推奨の組み合わせ：GPR matern52（X,Y,半径）× 質的変数（使わない・同時推定・加法カーネル・混合）、TPS、Kriging exponential、GAM、XY 5次多項式、RT モデル K=5 の 9 手法。</a:t>
+              <a:t>初期設定（default）：GPR matern52（X,Y,半径）× 質的変数（使わない・同時推定・加法カーネル・混合）の 4 手法だけ。推奨の組み合わせ（recommended）：それに TPS、Kriging exponential、GAM、XY 5次多項式、RT モデル K=5 を足した 9 手法。RBFe は廃止（以前の設定ファイルの methods.rbfe は読み飛ばす）。</a:t>
             </a:r>
           </a:p>
         </p:txBody>
@@ -869,7 +869,7 @@
           <a:lstStyle/>
           <a:p>
             <a:r>
-              <a:t>「7. Shot高次補正」のタブの初期値。excludedTerms は「VIF で選ぶ」や表の「使う」で変わり、「設定を保存…」の JSON にも入る。計算の方法と式は「8. ヘルプ」の「Shot 高次補正の評価」。</a:t>
+              <a:t>「7. Shot高次補正」のタブの初期値。excludedTerms は「VIF で選ぶ」・表の「使う」・点の数による項の絞り込みで変わり、「設定を保存…」の JSON にも入る。termSets は画面の「保存」で増え、MATLAB の設定（getpref）にも残る。unit・λ・保存した組み合わせは「補正の比較」でまとめて並べて比べられる。計算の方法と式は「8. ヘルプ」の「Shot 高次補正の評価」。</a:t>
             </a:r>
           </a:p>
         </p:txBody>
@@ -3237,7 +3237,7 @@
                           <a:ea typeface="BIZ UDGothic"/>
                           <a:cs typeface="BIZ UDGothic"/>
                         </a:rPr>
-                        <a:t>選び方（複数で比べる）：ioptimal・doptimal・random・manual・file・mark・markd</a:t>
+                        <a:t>選び方（複数で比べる）：ioptimal・doptimal・random・excel・mark・markd</a:t>
                       </a:r>
                     </a:p>
                   </a:txBody>
@@ -4327,7 +4327,7 @@
                           <a:ea typeface="BIZ UDGothic"/>
                           <a:cs typeface="BIZ UDGothic"/>
                         </a:rPr>
-                        <a:t>sampling.manualPlans</a:t>
+                        <a:t>sampling.layoutPlans・layoutFile</a:t>
                       </a:r>
                     </a:p>
                   </a:txBody>
@@ -4376,7 +4376,7 @@
                           <a:ea typeface="BIZ UDGothic"/>
                           <a:cs typeface="BIZ UDGothic"/>
                         </a:rPr>
-                        <a:t>[]（なし）</a:t>
+                        <a:t>[]・""</a:t>
                       </a:r>
                     </a:p>
                   </a:txBody>
@@ -4425,7 +4425,7 @@
                           <a:ea typeface="BIZ UDGothic"/>
                           <a:cs typeface="BIZ UDGothic"/>
                         </a:rPr>
-                        <a:t>手動・人の選択（1行 =「名前: shotNo …」）</a:t>
+                        <a:t>Excel ファイルで指定（1行 =「種類|名前|shotNo …」。読み込みで入る）</a:t>
                       </a:r>
                     </a:p>
                   </a:txBody>
@@ -4474,7 +4474,7 @@
                           <a:ea typeface="BIZ UDGothic"/>
                           <a:cs typeface="BIZ UDGothic"/>
                         </a:rPr>
-                        <a:t>2. 手動・人の選択</a:t>
+                        <a:t>2. Excel で指定</a:t>
                       </a:r>
                     </a:p>
                   </a:txBody>
@@ -5334,7 +5334,7 @@
                 <a:ea typeface="BIZ UDGothic"/>
                 <a:cs typeface="BIZ UDGothic"/>
               </a:rPr>
-              <a:t>設定の項目③：sampling（制約・交換法・優先順）</a:t>
+              <a:t>設定の項目③：sampling（制約・交換法）</a:t>
             </a:r>
           </a:p>
         </p:txBody>
@@ -5419,7 +5419,7 @@
         </p:nvGraphicFramePr>
         <p:xfrm>
           <a:off x="548640" y="1371600"/>
-          <a:ext cx="11091672" cy="4023360"/>
+          <a:ext cx="11091672" cy="3621024"/>
         </p:xfrm>
         <a:graphic>
           <a:graphicData uri="http://schemas.openxmlformats.org/drawingml/2006/table">
@@ -7179,204 +7179,6 @@
                           <a:cs typeface="BIZ UDGothic"/>
                         </a:rPr>
                         <a:t>2. Mark 単位</a:t>
-                      </a:r>
-                    </a:p>
-                  </a:txBody>
-                  <a:tcPr marL="109728" marR="109728" marT="45720" marB="45720" anchor="ctr">
-                    <a:lnL w="9525" cap="flat" cmpd="sng" algn="ctr">
-                      <a:solidFill>
-                        <a:srgbClr val="DADDE6"/>
-                      </a:solidFill>
-                      <a:prstDash val="solid"/>
-                    </a:lnL>
-                    <a:lnR w="9525" cap="flat" cmpd="sng" algn="ctr">
-                      <a:solidFill>
-                        <a:srgbClr val="DADDE6"/>
-                      </a:solidFill>
-                      <a:prstDash val="solid"/>
-                    </a:lnR>
-                    <a:lnT w="9525" cap="flat" cmpd="sng" algn="ctr">
-                      <a:solidFill>
-                        <a:srgbClr val="DADDE6"/>
-                      </a:solidFill>
-                      <a:prstDash val="solid"/>
-                    </a:lnT>
-                    <a:lnB w="9525" cap="flat" cmpd="sng" algn="ctr">
-                      <a:solidFill>
-                        <a:srgbClr val="DADDE6"/>
-                      </a:solidFill>
-                      <a:prstDash val="solid"/>
-                    </a:lnB>
-                    <a:solidFill>
-                      <a:srgbClr val="FFFFFF"/>
-                    </a:solidFill>
-                  </a:tcPr>
-                </a:tc>
-              </a:tr>
-              <a:tr h="402336">
-                <a:tc>
-                  <a:txBody>
-                    <a:bodyPr wrap="square"/>
-                    <a:lstStyle/>
-                    <a:p>
-                      <a:pPr algn="l"/>
-                      <a:r>
-                        <a:rPr sz="1100" b="0">
-                          <a:solidFill>
-                            <a:srgbClr val="22223B"/>
-                          </a:solidFill>
-                          <a:latin typeface="BIZ UDGothic"/>
-                          <a:ea typeface="BIZ UDGothic"/>
-                          <a:cs typeface="BIZ UDGothic"/>
-                        </a:rPr>
-                        <a:t>sampling.priorityShots・Levels・File</a:t>
-                      </a:r>
-                    </a:p>
-                  </a:txBody>
-                  <a:tcPr marL="109728" marR="109728" marT="45720" marB="45720" anchor="ctr">
-                    <a:lnL w="9525" cap="flat" cmpd="sng" algn="ctr">
-                      <a:solidFill>
-                        <a:srgbClr val="DADDE6"/>
-                      </a:solidFill>
-                      <a:prstDash val="solid"/>
-                    </a:lnL>
-                    <a:lnR w="9525" cap="flat" cmpd="sng" algn="ctr">
-                      <a:solidFill>
-                        <a:srgbClr val="DADDE6"/>
-                      </a:solidFill>
-                      <a:prstDash val="solid"/>
-                    </a:lnR>
-                    <a:lnT w="9525" cap="flat" cmpd="sng" algn="ctr">
-                      <a:solidFill>
-                        <a:srgbClr val="DADDE6"/>
-                      </a:solidFill>
-                      <a:prstDash val="solid"/>
-                    </a:lnT>
-                    <a:lnB w="9525" cap="flat" cmpd="sng" algn="ctr">
-                      <a:solidFill>
-                        <a:srgbClr val="DADDE6"/>
-                      </a:solidFill>
-                      <a:prstDash val="solid"/>
-                    </a:lnB>
-                    <a:solidFill>
-                      <a:srgbClr val="FFFFFF"/>
-                    </a:solidFill>
-                  </a:tcPr>
-                </a:tc>
-                <a:tc>
-                  <a:txBody>
-                    <a:bodyPr wrap="square"/>
-                    <a:lstStyle/>
-                    <a:p>
-                      <a:pPr algn="l"/>
-                      <a:r>
-                        <a:rPr sz="1100" b="0">
-                          <a:solidFill>
-                            <a:srgbClr val="22223B"/>
-                          </a:solidFill>
-                          <a:latin typeface="BIZ UDGothic"/>
-                          <a:ea typeface="BIZ UDGothic"/>
-                          <a:cs typeface="BIZ UDGothic"/>
-                        </a:rPr>
-                        <a:t>（読み込み）</a:t>
-                      </a:r>
-                    </a:p>
-                  </a:txBody>
-                  <a:tcPr marL="109728" marR="109728" marT="45720" marB="45720" anchor="ctr">
-                    <a:lnL w="9525" cap="flat" cmpd="sng" algn="ctr">
-                      <a:solidFill>
-                        <a:srgbClr val="DADDE6"/>
-                      </a:solidFill>
-                      <a:prstDash val="solid"/>
-                    </a:lnL>
-                    <a:lnR w="9525" cap="flat" cmpd="sng" algn="ctr">
-                      <a:solidFill>
-                        <a:srgbClr val="DADDE6"/>
-                      </a:solidFill>
-                      <a:prstDash val="solid"/>
-                    </a:lnR>
-                    <a:lnT w="9525" cap="flat" cmpd="sng" algn="ctr">
-                      <a:solidFill>
-                        <a:srgbClr val="DADDE6"/>
-                      </a:solidFill>
-                      <a:prstDash val="solid"/>
-                    </a:lnT>
-                    <a:lnB w="9525" cap="flat" cmpd="sng" algn="ctr">
-                      <a:solidFill>
-                        <a:srgbClr val="DADDE6"/>
-                      </a:solidFill>
-                      <a:prstDash val="solid"/>
-                    </a:lnB>
-                    <a:solidFill>
-                      <a:srgbClr val="FFFFFF"/>
-                    </a:solidFill>
-                  </a:tcPr>
-                </a:tc>
-                <a:tc>
-                  <a:txBody>
-                    <a:bodyPr wrap="square"/>
-                    <a:lstStyle/>
-                    <a:p>
-                      <a:pPr algn="l"/>
-                      <a:r>
-                        <a:rPr sz="1100" b="0">
-                          <a:solidFill>
-                            <a:srgbClr val="22223B"/>
-                          </a:solidFill>
-                          <a:latin typeface="BIZ UDGothic"/>
-                          <a:ea typeface="BIZ UDGothic"/>
-                          <a:cs typeface="BIZ UDGothic"/>
-                        </a:rPr>
-                        <a:t>優先順のファイルの Shot 番号・優先度・名前</a:t>
-                      </a:r>
-                    </a:p>
-                  </a:txBody>
-                  <a:tcPr marL="109728" marR="109728" marT="45720" marB="45720" anchor="ctr">
-                    <a:lnL w="9525" cap="flat" cmpd="sng" algn="ctr">
-                      <a:solidFill>
-                        <a:srgbClr val="DADDE6"/>
-                      </a:solidFill>
-                      <a:prstDash val="solid"/>
-                    </a:lnL>
-                    <a:lnR w="9525" cap="flat" cmpd="sng" algn="ctr">
-                      <a:solidFill>
-                        <a:srgbClr val="DADDE6"/>
-                      </a:solidFill>
-                      <a:prstDash val="solid"/>
-                    </a:lnR>
-                    <a:lnT w="9525" cap="flat" cmpd="sng" algn="ctr">
-                      <a:solidFill>
-                        <a:srgbClr val="DADDE6"/>
-                      </a:solidFill>
-                      <a:prstDash val="solid"/>
-                    </a:lnT>
-                    <a:lnB w="9525" cap="flat" cmpd="sng" algn="ctr">
-                      <a:solidFill>
-                        <a:srgbClr val="DADDE6"/>
-                      </a:solidFill>
-                      <a:prstDash val="solid"/>
-                    </a:lnB>
-                    <a:solidFill>
-                      <a:srgbClr val="FFFFFF"/>
-                    </a:solidFill>
-                  </a:tcPr>
-                </a:tc>
-                <a:tc>
-                  <a:txBody>
-                    <a:bodyPr wrap="square"/>
-                    <a:lstStyle/>
-                    <a:p>
-                      <a:pPr algn="l"/>
-                      <a:r>
-                        <a:rPr sz="1100" b="0">
-                          <a:solidFill>
-                            <a:srgbClr val="22223B"/>
-                          </a:solidFill>
-                          <a:latin typeface="BIZ UDGothic"/>
-                          <a:ea typeface="BIZ UDGothic"/>
-                          <a:cs typeface="BIZ UDGothic"/>
-                        </a:rPr>
-                        <a:t>2. 優先順のファイル</a:t>
                       </a:r>
                     </a:p>
                   </a:txBody>
@@ -9896,7 +9698,7 @@
                           <a:ea typeface="BIZ UDGothic"/>
                           <a:cs typeface="BIZ UDGothic"/>
                         </a:rPr>
-                        <a:t>2. 表示</a:t>
+                        <a:t>メニュー「表示」</a:t>
                       </a:r>
                     </a:p>
                   </a:txBody>
@@ -10247,7 +10049,7 @@
         </p:nvGraphicFramePr>
         <p:xfrm>
           <a:off x="548640" y="1371600"/>
-          <a:ext cx="11091672" cy="4023360"/>
+          <a:ext cx="11091672" cy="3657600"/>
         </p:xfrm>
         <a:graphic>
           <a:graphicData uri="http://schemas.openxmlformats.org/drawingml/2006/table">
@@ -10769,7 +10571,7 @@
                           <a:ea typeface="BIZ UDGothic"/>
                           <a:cs typeface="BIZ UDGothic"/>
                         </a:rPr>
-                        <a:t>GPR とカーネル（fitrgp の10種類と matern・ardmatern）</a:t>
+                        <a:t>GPR とカーネル（fitrgp の10種類、matern・ardmatern、periodic・ardperiodic）</a:t>
                       </a:r>
                     </a:p>
                   </a:txBody>
@@ -11314,7 +11116,7 @@
                           <a:ea typeface="BIZ UDGothic"/>
                           <a:cs typeface="BIZ UDGothic"/>
                         </a:rPr>
-                        <a:t>true ・ false</a:t>
+                        <a:t>false ・ false</a:t>
                       </a:r>
                     </a:p>
                   </a:txBody>
@@ -11463,7 +11265,7 @@
                           <a:ea typeface="BIZ UDGothic"/>
                           <a:cs typeface="BIZ UDGothic"/>
                         </a:rPr>
-                        <a:t>methods.rbfe</a:t>
+                        <a:t>methods.kriging</a:t>
                       </a:r>
                     </a:p>
                   </a:txBody>
@@ -11512,7 +11314,7 @@
                           <a:ea typeface="BIZ UDGothic"/>
                           <a:cs typeface="BIZ UDGothic"/>
                         </a:rPr>
-                        <a:t>false（4 領域）</a:t>
+                        <a:t>通常 false・Universal false</a:t>
                       </a:r>
                     </a:p>
                   </a:txBody>
@@ -11561,7 +11363,7 @@
                           <a:ea typeface="BIZ UDGothic"/>
                           <a:cs typeface="BIZ UDGothic"/>
                         </a:rPr>
-                        <a:t>RBFe（仮）：領域分割 TPS の GAM（regions：領域の数）</a:t>
+                        <a:t>Kriging（variograms："exponential"）</a:t>
                       </a:r>
                     </a:p>
                   </a:txBody>
@@ -11610,7 +11412,7 @@
                           <a:ea typeface="BIZ UDGothic"/>
                           <a:cs typeface="BIZ UDGothic"/>
                         </a:rPr>
-                        <a:t>2. RBFe（仮）</a:t>
+                        <a:t>2. Kriging</a:t>
                       </a:r>
                     </a:p>
                   </a:txBody>
@@ -11661,7 +11463,7 @@
                           <a:ea typeface="BIZ UDGothic"/>
                           <a:cs typeface="BIZ UDGothic"/>
                         </a:rPr>
-                        <a:t>methods.kriging</a:t>
+                        <a:t>methods.gam</a:t>
                       </a:r>
                     </a:p>
                   </a:txBody>
@@ -11710,7 +11512,7 @@
                           <a:ea typeface="BIZ UDGothic"/>
                           <a:cs typeface="BIZ UDGothic"/>
                         </a:rPr>
-                        <a:t>通常 true・Universal false</a:t>
+                        <a:t>false（スプライン）</a:t>
                       </a:r>
                     </a:p>
                   </a:txBody>
@@ -11759,7 +11561,7 @@
                           <a:ea typeface="BIZ UDGothic"/>
                           <a:cs typeface="BIZ UDGothic"/>
                         </a:rPr>
-                        <a:t>Kriging（variograms："exponential"）</a:t>
+                        <a:t>GAM（shapes・gpKernels・gpMaternNu）</a:t>
                       </a:r>
                     </a:p>
                   </a:txBody>
@@ -11808,7 +11610,7 @@
                           <a:ea typeface="BIZ UDGothic"/>
                           <a:cs typeface="BIZ UDGothic"/>
                         </a:rPr>
-                        <a:t>2. Kriging</a:t>
+                        <a:t>2. GAM</a:t>
                       </a:r>
                     </a:p>
                   </a:txBody>
@@ -11859,7 +11661,7 @@
                           <a:ea typeface="BIZ UDGothic"/>
                           <a:cs typeface="BIZ UDGothic"/>
                         </a:rPr>
-                        <a:t>methods.gam</a:t>
+                        <a:t>methods.polynomial ・ rt</a:t>
                       </a:r>
                     </a:p>
                   </a:txBody>
@@ -11908,7 +11710,7 @@
                           <a:ea typeface="BIZ UDGothic"/>
                           <a:cs typeface="BIZ UDGothic"/>
                         </a:rPr>
-                        <a:t>true（スプライン）</a:t>
+                        <a:t>false（5次）・false（K=5）</a:t>
                       </a:r>
                     </a:p>
                   </a:txBody>
@@ -11957,7 +11759,7 @@
                           <a:ea typeface="BIZ UDGothic"/>
                           <a:cs typeface="BIZ UDGothic"/>
                         </a:rPr>
-                        <a:t>GAM（shapes・gpKernels・gpMaternNu）</a:t>
+                        <a:t>XY 多項式の次数（1〜8）・RT モデルの次数</a:t>
                       </a:r>
                     </a:p>
                   </a:txBody>
@@ -12006,7 +11808,7 @@
                           <a:ea typeface="BIZ UDGothic"/>
                           <a:cs typeface="BIZ UDGothic"/>
                         </a:rPr>
-                        <a:t>2. GAM</a:t>
+                        <a:t>2. 多項式・RT</a:t>
                       </a:r>
                     </a:p>
                   </a:txBody>
@@ -12057,7 +11859,7 @@
                           <a:ea typeface="BIZ UDGothic"/>
                           <a:cs typeface="BIZ UDGothic"/>
                         </a:rPr>
-                        <a:t>methods.polynomial ・ rt</a:t>
+                        <a:t>methods.zernike</a:t>
                       </a:r>
                     </a:p>
                   </a:txBody>
@@ -12106,7 +11908,7 @@
                           <a:ea typeface="BIZ UDGothic"/>
                           <a:cs typeface="BIZ UDGothic"/>
                         </a:rPr>
-                        <a:t>true（5次）・true（K=5）</a:t>
+                        <a:t>false（次数 4）</a:t>
                       </a:r>
                     </a:p>
                   </a:txBody>
@@ -12155,205 +11957,7 @@
                           <a:ea typeface="BIZ UDGothic"/>
                           <a:cs typeface="BIZ UDGothic"/>
                         </a:rPr>
-                        <a:t>XY 多項式の次数・RT モデルの次数</a:t>
-                      </a:r>
-                    </a:p>
-                  </a:txBody>
-                  <a:tcPr marL="109728" marR="109728" marT="45720" marB="45720" anchor="ctr">
-                    <a:lnL w="9525" cap="flat" cmpd="sng" algn="ctr">
-                      <a:solidFill>
-                        <a:srgbClr val="DADDE6"/>
-                      </a:solidFill>
-                      <a:prstDash val="solid"/>
-                    </a:lnL>
-                    <a:lnR w="9525" cap="flat" cmpd="sng" algn="ctr">
-                      <a:solidFill>
-                        <a:srgbClr val="DADDE6"/>
-                      </a:solidFill>
-                      <a:prstDash val="solid"/>
-                    </a:lnR>
-                    <a:lnT w="9525" cap="flat" cmpd="sng" algn="ctr">
-                      <a:solidFill>
-                        <a:srgbClr val="DADDE6"/>
-                      </a:solidFill>
-                      <a:prstDash val="solid"/>
-                    </a:lnT>
-                    <a:lnB w="9525" cap="flat" cmpd="sng" algn="ctr">
-                      <a:solidFill>
-                        <a:srgbClr val="DADDE6"/>
-                      </a:solidFill>
-                      <a:prstDash val="solid"/>
-                    </a:lnB>
-                    <a:solidFill>
-                      <a:srgbClr val="FFFFFF"/>
-                    </a:solidFill>
-                  </a:tcPr>
-                </a:tc>
-                <a:tc>
-                  <a:txBody>
-                    <a:bodyPr wrap="square"/>
-                    <a:lstStyle/>
-                    <a:p>
-                      <a:pPr algn="l"/>
-                      <a:r>
-                        <a:rPr sz="1100" b="0">
-                          <a:solidFill>
-                            <a:srgbClr val="22223B"/>
-                          </a:solidFill>
-                          <a:latin typeface="BIZ UDGothic"/>
-                          <a:ea typeface="BIZ UDGothic"/>
-                          <a:cs typeface="BIZ UDGothic"/>
-                        </a:rPr>
-                        <a:t>2. 多項式・RT</a:t>
-                      </a:r>
-                    </a:p>
-                  </a:txBody>
-                  <a:tcPr marL="109728" marR="109728" marT="45720" marB="45720" anchor="ctr">
-                    <a:lnL w="9525" cap="flat" cmpd="sng" algn="ctr">
-                      <a:solidFill>
-                        <a:srgbClr val="DADDE6"/>
-                      </a:solidFill>
-                      <a:prstDash val="solid"/>
-                    </a:lnL>
-                    <a:lnR w="9525" cap="flat" cmpd="sng" algn="ctr">
-                      <a:solidFill>
-                        <a:srgbClr val="DADDE6"/>
-                      </a:solidFill>
-                      <a:prstDash val="solid"/>
-                    </a:lnR>
-                    <a:lnT w="9525" cap="flat" cmpd="sng" algn="ctr">
-                      <a:solidFill>
-                        <a:srgbClr val="DADDE6"/>
-                      </a:solidFill>
-                      <a:prstDash val="solid"/>
-                    </a:lnT>
-                    <a:lnB w="9525" cap="flat" cmpd="sng" algn="ctr">
-                      <a:solidFill>
-                        <a:srgbClr val="DADDE6"/>
-                      </a:solidFill>
-                      <a:prstDash val="solid"/>
-                    </a:lnB>
-                    <a:solidFill>
-                      <a:srgbClr val="FFFFFF"/>
-                    </a:solidFill>
-                  </a:tcPr>
-                </a:tc>
-              </a:tr>
-              <a:tr h="365760">
-                <a:tc>
-                  <a:txBody>
-                    <a:bodyPr wrap="square"/>
-                    <a:lstStyle/>
-                    <a:p>
-                      <a:pPr algn="l"/>
-                      <a:r>
-                        <a:rPr sz="1100" b="0">
-                          <a:solidFill>
-                            <a:srgbClr val="22223B"/>
-                          </a:solidFill>
-                          <a:latin typeface="BIZ UDGothic"/>
-                          <a:ea typeface="BIZ UDGothic"/>
-                          <a:cs typeface="BIZ UDGothic"/>
-                        </a:rPr>
-                        <a:t>methods.zernike</a:t>
-                      </a:r>
-                    </a:p>
-                  </a:txBody>
-                  <a:tcPr marL="109728" marR="109728" marT="45720" marB="45720" anchor="ctr">
-                    <a:lnL w="9525" cap="flat" cmpd="sng" algn="ctr">
-                      <a:solidFill>
-                        <a:srgbClr val="DADDE6"/>
-                      </a:solidFill>
-                      <a:prstDash val="solid"/>
-                    </a:lnL>
-                    <a:lnR w="9525" cap="flat" cmpd="sng" algn="ctr">
-                      <a:solidFill>
-                        <a:srgbClr val="DADDE6"/>
-                      </a:solidFill>
-                      <a:prstDash val="solid"/>
-                    </a:lnR>
-                    <a:lnT w="9525" cap="flat" cmpd="sng" algn="ctr">
-                      <a:solidFill>
-                        <a:srgbClr val="DADDE6"/>
-                      </a:solidFill>
-                      <a:prstDash val="solid"/>
-                    </a:lnT>
-                    <a:lnB w="9525" cap="flat" cmpd="sng" algn="ctr">
-                      <a:solidFill>
-                        <a:srgbClr val="DADDE6"/>
-                      </a:solidFill>
-                      <a:prstDash val="solid"/>
-                    </a:lnB>
-                    <a:solidFill>
-                      <a:srgbClr val="FFFFFF"/>
-                    </a:solidFill>
-                  </a:tcPr>
-                </a:tc>
-                <a:tc>
-                  <a:txBody>
-                    <a:bodyPr wrap="square"/>
-                    <a:lstStyle/>
-                    <a:p>
-                      <a:pPr algn="l"/>
-                      <a:r>
-                        <a:rPr sz="1100" b="0">
-                          <a:solidFill>
-                            <a:srgbClr val="22223B"/>
-                          </a:solidFill>
-                          <a:latin typeface="BIZ UDGothic"/>
-                          <a:ea typeface="BIZ UDGothic"/>
-                          <a:cs typeface="BIZ UDGothic"/>
-                        </a:rPr>
-                        <a:t>false（次数 4）</a:t>
-                      </a:r>
-                    </a:p>
-                  </a:txBody>
-                  <a:tcPr marL="109728" marR="109728" marT="45720" marB="45720" anchor="ctr">
-                    <a:lnL w="9525" cap="flat" cmpd="sng" algn="ctr">
-                      <a:solidFill>
-                        <a:srgbClr val="DADDE6"/>
-                      </a:solidFill>
-                      <a:prstDash val="solid"/>
-                    </a:lnL>
-                    <a:lnR w="9525" cap="flat" cmpd="sng" algn="ctr">
-                      <a:solidFill>
-                        <a:srgbClr val="DADDE6"/>
-                      </a:solidFill>
-                      <a:prstDash val="solid"/>
-                    </a:lnR>
-                    <a:lnT w="9525" cap="flat" cmpd="sng" algn="ctr">
-                      <a:solidFill>
-                        <a:srgbClr val="DADDE6"/>
-                      </a:solidFill>
-                      <a:prstDash val="solid"/>
-                    </a:lnT>
-                    <a:lnB w="9525" cap="flat" cmpd="sng" algn="ctr">
-                      <a:solidFill>
-                        <a:srgbClr val="DADDE6"/>
-                      </a:solidFill>
-                      <a:prstDash val="solid"/>
-                    </a:lnB>
-                    <a:solidFill>
-                      <a:srgbClr val="FFFFFF"/>
-                    </a:solidFill>
-                  </a:tcPr>
-                </a:tc>
-                <a:tc>
-                  <a:txBody>
-                    <a:bodyPr wrap="square"/>
-                    <a:lstStyle/>
-                    <a:p>
-                      <a:pPr algn="l"/>
-                      <a:r>
-                        <a:rPr sz="1100" b="0">
-                          <a:solidFill>
-                            <a:srgbClr val="22223B"/>
-                          </a:solidFill>
-                          <a:latin typeface="BIZ UDGothic"/>
-                          <a:ea typeface="BIZ UDGothic"/>
-                          <a:cs typeface="BIZ UDGothic"/>
-                        </a:rPr>
-                        <a:t>Fringe Zernike（orders：次数 k。factorModes：none・backfit）</a:t>
+                        <a:t>Fringe Zernike（orders：次数 k は 1〜7。factorModes：none・backfit）</a:t>
                       </a:r>
                     </a:p>
                   </a:txBody>
@@ -12572,7 +12176,7 @@
                 <a:ea typeface="BIZ UDGothic"/>
                 <a:cs typeface="BIZ UDGothic"/>
               </a:rPr>
-              <a:t>初期値は推奨の組み合わせ（9 手法）。変えるときは recommendedMethods.m の上の部分を直す（「すべて選ぶ」は "all" の部分）</a:t>
+              <a:t>初期値は GPR だけ（recommendedMethods.m の "default" の部分）。「推奨の組み合わせ」は "recommended"、「すべて選ぶ」は "all" の部分</a:t>
             </a:r>
           </a:p>
         </p:txBody>
@@ -12753,7 +12357,7 @@
         </p:nvGraphicFramePr>
         <p:xfrm>
           <a:off x="548640" y="1371600"/>
-          <a:ext cx="11091672" cy="3621024"/>
+          <a:ext cx="11091672" cy="3657600"/>
         </p:xfrm>
         <a:graphic>
           <a:graphicData uri="http://schemas.openxmlformats.org/drawingml/2006/table">
@@ -12765,7 +12369,7 @@
                 <a:gridCol w="4526280"/>
                 <a:gridCol w="1536192"/>
               </a:tblGrid>
-              <a:tr h="402336">
+              <a:tr h="365760">
                 <a:tc>
                   <a:txBody>
                     <a:bodyPr wrap="square"/>
@@ -12963,7 +12567,7 @@
                   </a:tcPr>
                 </a:tc>
               </a:tr>
-              <a:tr h="402336">
+              <a:tr h="365760">
                 <a:tc>
                   <a:txBody>
                     <a:bodyPr wrap="square"/>
@@ -13077,7 +12681,7 @@
                           <a:ea typeface="BIZ UDGothic"/>
                           <a:cs typeface="BIZ UDGothic"/>
                         </a:rPr>
-                        <a:t>補正の式（asml・canon・nikon。Overlay 計測ルールの式）</a:t>
+                        <a:t>補正の式（asml・canon・nikon：ルールの式、custom：k1〜k38）</a:t>
                       </a:r>
                     </a:p>
                   </a:txBody>
@@ -13161,7 +12765,7 @@
                   </a:tcPr>
                 </a:tc>
               </a:tr>
-              <a:tr h="402336">
+              <a:tr h="365760">
                 <a:tc>
                   <a:txBody>
                     <a:bodyPr wrap="square"/>
@@ -13275,7 +12879,7 @@
                           <a:ea typeface="BIZ UDGothic"/>
                           <a:cs typeface="BIZ UDGothic"/>
                         </a:rPr>
-                        <a:t>common：Wafer 内で共通の1組の k、shot：Shot ごとの k</a:t>
+                        <a:t>k のくくり（common：Wafer 内で共通・scan：Scan 方向ごと・row：行の偶奇ごと・shot：Shot ごと）</a:t>
                       </a:r>
                     </a:p>
                   </a:txBody>
@@ -13324,7 +12928,7 @@
                           <a:ea typeface="BIZ UDGothic"/>
                           <a:cs typeface="BIZ UDGothic"/>
                         </a:rPr>
-                        <a:t>7. 補正の単位</a:t>
+                        <a:t>7. 補正のくくり</a:t>
                       </a:r>
                     </a:p>
                   </a:txBody>
@@ -13359,7 +12963,7 @@
                   </a:tcPr>
                 </a:tc>
               </a:tr>
-              <a:tr h="402336">
+              <a:tr h="365760">
                 <a:tc>
                   <a:txBody>
                     <a:bodyPr wrap="square"/>
@@ -13473,7 +13077,7 @@
                           <a:ea typeface="BIZ UDGothic"/>
                           <a:cs typeface="BIZ UDGothic"/>
                         </a:rPr>
-                        <a:t>common のとき一緒に求める Wafer 成分の次数（0〜3、0 = なし）</a:t>
+                        <a:t>shot のほかで一緒に求める Wafer 成分の次数（0〜3、0 = なし。Wafer で共通）</a:t>
                       </a:r>
                     </a:p>
                   </a:txBody>
@@ -13557,7 +13161,7 @@
                   </a:tcPr>
                 </a:tc>
               </a:tr>
-              <a:tr h="402336">
+              <a:tr h="365760">
                 <a:tc>
                   <a:txBody>
                     <a:bodyPr wrap="square"/>
@@ -13755,7 +13359,7 @@
                   </a:tcPr>
                 </a:tc>
               </a:tr>
-              <a:tr h="402336">
+              <a:tr h="365760">
                 <a:tc>
                   <a:txBody>
                     <a:bodyPr wrap="square"/>
@@ -13953,7 +13557,7 @@
                   </a:tcPr>
                 </a:tc>
               </a:tr>
-              <a:tr h="402336">
+              <a:tr h="365760">
                 <a:tc>
                   <a:txBody>
                     <a:bodyPr wrap="square"/>
@@ -14151,7 +13755,7 @@
                   </a:tcPr>
                 </a:tc>
               </a:tr>
-              <a:tr h="402336">
+              <a:tr h="365760">
                 <a:tc>
                   <a:txBody>
                     <a:bodyPr wrap="square"/>
@@ -14349,7 +13953,7 @@
                   </a:tcPr>
                 </a:tc>
               </a:tr>
-              <a:tr h="402336">
+              <a:tr h="365760">
                 <a:tc>
                   <a:txBody>
                     <a:bodyPr wrap="square"/>
@@ -14513,6 +14117,204 @@
                           <a:cs typeface="BIZ UDGothic"/>
                         </a:rPr>
                         <a:t>7. L2・λ</a:t>
+                      </a:r>
+                    </a:p>
+                  </a:txBody>
+                  <a:tcPr marL="109728" marR="109728" marT="45720" marB="45720" anchor="ctr">
+                    <a:lnL w="9525" cap="flat" cmpd="sng" algn="ctr">
+                      <a:solidFill>
+                        <a:srgbClr val="DADDE6"/>
+                      </a:solidFill>
+                      <a:prstDash val="solid"/>
+                    </a:lnL>
+                    <a:lnR w="9525" cap="flat" cmpd="sng" algn="ctr">
+                      <a:solidFill>
+                        <a:srgbClr val="DADDE6"/>
+                      </a:solidFill>
+                      <a:prstDash val="solid"/>
+                    </a:lnR>
+                    <a:lnT w="9525" cap="flat" cmpd="sng" algn="ctr">
+                      <a:solidFill>
+                        <a:srgbClr val="DADDE6"/>
+                      </a:solidFill>
+                      <a:prstDash val="solid"/>
+                    </a:lnT>
+                    <a:lnB w="9525" cap="flat" cmpd="sng" algn="ctr">
+                      <a:solidFill>
+                        <a:srgbClr val="DADDE6"/>
+                      </a:solidFill>
+                      <a:prstDash val="solid"/>
+                    </a:lnB>
+                    <a:solidFill>
+                      <a:srgbClr val="FFFFFF"/>
+                    </a:solidFill>
+                  </a:tcPr>
+                </a:tc>
+              </a:tr>
+              <a:tr h="365760">
+                <a:tc>
+                  <a:txBody>
+                    <a:bodyPr wrap="square"/>
+                    <a:lstStyle/>
+                    <a:p>
+                      <a:pPr algn="l"/>
+                      <a:r>
+                        <a:rPr sz="1100" b="0">
+                          <a:solidFill>
+                            <a:srgbClr val="22223B"/>
+                          </a:solidFill>
+                          <a:latin typeface="BIZ UDGothic"/>
+                          <a:ea typeface="BIZ UDGothic"/>
+                          <a:cs typeface="BIZ UDGothic"/>
+                        </a:rPr>
+                        <a:t>highOrder.termSets</a:t>
+                      </a:r>
+                    </a:p>
+                  </a:txBody>
+                  <a:tcPr marL="109728" marR="109728" marT="45720" marB="45720" anchor="ctr">
+                    <a:lnL w="9525" cap="flat" cmpd="sng" algn="ctr">
+                      <a:solidFill>
+                        <a:srgbClr val="DADDE6"/>
+                      </a:solidFill>
+                      <a:prstDash val="solid"/>
+                    </a:lnL>
+                    <a:lnR w="9525" cap="flat" cmpd="sng" algn="ctr">
+                      <a:solidFill>
+                        <a:srgbClr val="DADDE6"/>
+                      </a:solidFill>
+                      <a:prstDash val="solid"/>
+                    </a:lnR>
+                    <a:lnT w="9525" cap="flat" cmpd="sng" algn="ctr">
+                      <a:solidFill>
+                        <a:srgbClr val="DADDE6"/>
+                      </a:solidFill>
+                      <a:prstDash val="solid"/>
+                    </a:lnT>
+                    <a:lnB w="9525" cap="flat" cmpd="sng" algn="ctr">
+                      <a:solidFill>
+                        <a:srgbClr val="DADDE6"/>
+                      </a:solidFill>
+                      <a:prstDash val="solid"/>
+                    </a:lnB>
+                    <a:solidFill>
+                      <a:srgbClr val="FFFFFF"/>
+                    </a:solidFill>
+                  </a:tcPr>
+                </a:tc>
+                <a:tc>
+                  <a:txBody>
+                    <a:bodyPr wrap="square"/>
+                    <a:lstStyle/>
+                    <a:p>
+                      <a:pPr algn="l"/>
+                      <a:r>
+                        <a:rPr sz="1100" b="0">
+                          <a:solidFill>
+                            <a:srgbClr val="22223B"/>
+                          </a:solidFill>
+                          <a:latin typeface="BIZ UDGothic"/>
+                          <a:ea typeface="BIZ UDGothic"/>
+                          <a:cs typeface="BIZ UDGothic"/>
+                        </a:rPr>
+                        <a:t>[]（なし）</a:t>
+                      </a:r>
+                    </a:p>
+                  </a:txBody>
+                  <a:tcPr marL="109728" marR="109728" marT="45720" marB="45720" anchor="ctr">
+                    <a:lnL w="9525" cap="flat" cmpd="sng" algn="ctr">
+                      <a:solidFill>
+                        <a:srgbClr val="DADDE6"/>
+                      </a:solidFill>
+                      <a:prstDash val="solid"/>
+                    </a:lnL>
+                    <a:lnR w="9525" cap="flat" cmpd="sng" algn="ctr">
+                      <a:solidFill>
+                        <a:srgbClr val="DADDE6"/>
+                      </a:solidFill>
+                      <a:prstDash val="solid"/>
+                    </a:lnR>
+                    <a:lnT w="9525" cap="flat" cmpd="sng" algn="ctr">
+                      <a:solidFill>
+                        <a:srgbClr val="DADDE6"/>
+                      </a:solidFill>
+                      <a:prstDash val="solid"/>
+                    </a:lnT>
+                    <a:lnB w="9525" cap="flat" cmpd="sng" algn="ctr">
+                      <a:solidFill>
+                        <a:srgbClr val="DADDE6"/>
+                      </a:solidFill>
+                      <a:prstDash val="solid"/>
+                    </a:lnB>
+                    <a:solidFill>
+                      <a:srgbClr val="FFFFFF"/>
+                    </a:solidFill>
+                  </a:tcPr>
+                </a:tc>
+                <a:tc>
+                  <a:txBody>
+                    <a:bodyPr wrap="square"/>
+                    <a:lstStyle/>
+                    <a:p>
+                      <a:pPr algn="l"/>
+                      <a:r>
+                        <a:rPr sz="1100" b="0">
+                          <a:solidFill>
+                            <a:srgbClr val="22223B"/>
+                          </a:solidFill>
+                          <a:latin typeface="BIZ UDGothic"/>
+                          <a:ea typeface="BIZ UDGothic"/>
+                          <a:cs typeface="BIZ UDGothic"/>
+                        </a:rPr>
+                        <a:t>保存した項の組み合わせ（1行 = "名前|式|k の番号 …"）</a:t>
+                      </a:r>
+                    </a:p>
+                  </a:txBody>
+                  <a:tcPr marL="109728" marR="109728" marT="45720" marB="45720" anchor="ctr">
+                    <a:lnL w="9525" cap="flat" cmpd="sng" algn="ctr">
+                      <a:solidFill>
+                        <a:srgbClr val="DADDE6"/>
+                      </a:solidFill>
+                      <a:prstDash val="solid"/>
+                    </a:lnL>
+                    <a:lnR w="9525" cap="flat" cmpd="sng" algn="ctr">
+                      <a:solidFill>
+                        <a:srgbClr val="DADDE6"/>
+                      </a:solidFill>
+                      <a:prstDash val="solid"/>
+                    </a:lnR>
+                    <a:lnT w="9525" cap="flat" cmpd="sng" algn="ctr">
+                      <a:solidFill>
+                        <a:srgbClr val="DADDE6"/>
+                      </a:solidFill>
+                      <a:prstDash val="solid"/>
+                    </a:lnT>
+                    <a:lnB w="9525" cap="flat" cmpd="sng" algn="ctr">
+                      <a:solidFill>
+                        <a:srgbClr val="DADDE6"/>
+                      </a:solidFill>
+                      <a:prstDash val="solid"/>
+                    </a:lnB>
+                    <a:solidFill>
+                      <a:srgbClr val="FFFFFF"/>
+                    </a:solidFill>
+                  </a:tcPr>
+                </a:tc>
+                <a:tc>
+                  <a:txBody>
+                    <a:bodyPr wrap="square"/>
+                    <a:lstStyle/>
+                    <a:p>
+                      <a:pPr algn="l"/>
+                      <a:r>
+                        <a:rPr sz="1100" b="0">
+                          <a:solidFill>
+                            <a:srgbClr val="22223B"/>
+                          </a:solidFill>
+                          <a:latin typeface="BIZ UDGothic"/>
+                          <a:ea typeface="BIZ UDGothic"/>
+                          <a:cs typeface="BIZ UDGothic"/>
+                        </a:rPr>
+                        <a:t>7. 組み合わせ</a:t>
                       </a:r>
                     </a:p>
                   </a:txBody>
@@ -14559,12 +14361,12 @@
         </p:nvSpPr>
         <p:spPr>
           <a:xfrm>
-            <a:off x="548640" y="5120640"/>
-            <a:ext cx="11091672" cy="548640"/>
+            <a:off x="548640" y="5303520"/>
+            <a:ext cx="11091672" cy="512064"/>
           </a:xfrm>
           <a:prstGeom prst="roundRect">
             <a:avLst>
-              <a:gd name="adj" fmla="val 13333"/>
+              <a:gd name="adj" fmla="val 14285"/>
             </a:avLst>
           </a:prstGeom>
           <a:solidFill>
@@ -14605,7 +14407,7 @@
         </p:nvSpPr>
         <p:spPr>
           <a:xfrm>
-            <a:off x="749808" y="5134355"/>
+            <a:off x="749808" y="5298948"/>
             <a:ext cx="521207" cy="521207"/>
           </a:xfrm>
           <a:prstGeom prst="ellipse">
@@ -14660,8 +14462,8 @@
         </p:nvSpPr>
         <p:spPr>
           <a:xfrm>
-            <a:off x="1463040" y="5120640"/>
-            <a:ext cx="9994392" cy="548640"/>
+            <a:off x="1463040" y="5303520"/>
+            <a:ext cx="9994392" cy="512064"/>
           </a:xfrm>
           <a:prstGeom prst="rect">
             <a:avLst/>
@@ -14674,7 +14476,7 @@
           <a:p>
             <a:pPr algn="l"/>
             <a:r>
-              <a:rPr sz="1300" b="1">
+              <a:rPr sz="1200" b="1">
                 <a:solidFill>
                   <a:srgbClr val="22223B"/>
                 </a:solidFill>
@@ -14695,12 +14497,12 @@
         </p:nvSpPr>
         <p:spPr>
           <a:xfrm>
-            <a:off x="548640" y="5806440"/>
-            <a:ext cx="11091672" cy="502920"/>
+            <a:off x="548640" y="5907024"/>
+            <a:ext cx="11091672" cy="512064"/>
           </a:xfrm>
           <a:prstGeom prst="roundRect">
             <a:avLst>
-              <a:gd name="adj" fmla="val 14545"/>
+              <a:gd name="adj" fmla="val 14285"/>
             </a:avLst>
           </a:prstGeom>
           <a:solidFill>
@@ -14741,7 +14543,7 @@
         </p:nvSpPr>
         <p:spPr>
           <a:xfrm>
-            <a:off x="749808" y="5797296"/>
+            <a:off x="749808" y="5902452"/>
             <a:ext cx="521207" cy="521207"/>
           </a:xfrm>
           <a:prstGeom prst="ellipse">
@@ -14796,8 +14598,8 @@
         </p:nvSpPr>
         <p:spPr>
           <a:xfrm>
-            <a:off x="1463040" y="5806440"/>
-            <a:ext cx="9994392" cy="502920"/>
+            <a:off x="1463040" y="5907024"/>
+            <a:ext cx="9994392" cy="512064"/>
           </a:xfrm>
           <a:prstGeom prst="rect">
             <a:avLst/>
@@ -14810,7 +14612,7 @@
           <a:p>
             <a:pPr algn="l"/>
             <a:r>
-              <a:rPr sz="1300" b="1">
+              <a:rPr sz="1200" b="1">
                 <a:solidFill>
                   <a:srgbClr val="22223B"/>
                 </a:solidFill>
@@ -14999,7 +14801,7 @@
         </p:nvGraphicFramePr>
         <p:xfrm>
           <a:off x="548640" y="1371600"/>
-          <a:ext cx="5532120" cy="3657600"/>
+          <a:ext cx="5532120" cy="3291840"/>
         </p:xfrm>
         <a:graphic>
           <a:graphicData uri="http://schemas.openxmlformats.org/drawingml/2006/table">
@@ -15875,106 +15677,6 @@
                           <a:cs typeface="BIZ UDGothic"/>
                         </a:rPr>
                         <a:t>10 ・ 7</a:t>
-                      </a:r>
-                    </a:p>
-                  </a:txBody>
-                  <a:tcPr marL="109728" marR="109728" marT="45720" marB="45720" anchor="ctr">
-                    <a:lnL w="9525" cap="flat" cmpd="sng" algn="ctr">
-                      <a:solidFill>
-                        <a:srgbClr val="DADDE6"/>
-                      </a:solidFill>
-                      <a:prstDash val="solid"/>
-                    </a:lnL>
-                    <a:lnR w="9525" cap="flat" cmpd="sng" algn="ctr">
-                      <a:solidFill>
-                        <a:srgbClr val="DADDE6"/>
-                      </a:solidFill>
-                      <a:prstDash val="solid"/>
-                    </a:lnR>
-                    <a:lnT w="9525" cap="flat" cmpd="sng" algn="ctr">
-                      <a:solidFill>
-                        <a:srgbClr val="DADDE6"/>
-                      </a:solidFill>
-                      <a:prstDash val="solid"/>
-                    </a:lnT>
-                    <a:lnB w="9525" cap="flat" cmpd="sng" algn="ctr">
-                      <a:solidFill>
-                        <a:srgbClr val="DADDE6"/>
-                      </a:solidFill>
-                      <a:prstDash val="solid"/>
-                    </a:lnB>
-                    <a:solidFill>
-                      <a:srgbClr val="FFFFFF"/>
-                    </a:solidFill>
-                  </a:tcPr>
-                </a:tc>
-              </a:tr>
-              <a:tr h="365760">
-                <a:tc>
-                  <a:txBody>
-                    <a:bodyPr wrap="square"/>
-                    <a:lstStyle/>
-                    <a:p>
-                      <a:pPr algn="l"/>
-                      <a:r>
-                        <a:rPr sz="1150" b="0">
-                          <a:solidFill>
-                            <a:srgbClr val="22223B"/>
-                          </a:solidFill>
-                          <a:latin typeface="BIZ UDGothic"/>
-                          <a:ea typeface="BIZ UDGothic"/>
-                          <a:cs typeface="BIZ UDGothic"/>
-                        </a:rPr>
-                        <a:t>rbfeOverlap ・ rbfeMinPoints</a:t>
-                      </a:r>
-                    </a:p>
-                  </a:txBody>
-                  <a:tcPr marL="109728" marR="109728" marT="45720" marB="45720" anchor="ctr">
-                    <a:lnL w="9525" cap="flat" cmpd="sng" algn="ctr">
-                      <a:solidFill>
-                        <a:srgbClr val="DADDE6"/>
-                      </a:solidFill>
-                      <a:prstDash val="solid"/>
-                    </a:lnL>
-                    <a:lnR w="9525" cap="flat" cmpd="sng" algn="ctr">
-                      <a:solidFill>
-                        <a:srgbClr val="DADDE6"/>
-                      </a:solidFill>
-                      <a:prstDash val="solid"/>
-                    </a:lnR>
-                    <a:lnT w="9525" cap="flat" cmpd="sng" algn="ctr">
-                      <a:solidFill>
-                        <a:srgbClr val="DADDE6"/>
-                      </a:solidFill>
-                      <a:prstDash val="solid"/>
-                    </a:lnT>
-                    <a:lnB w="9525" cap="flat" cmpd="sng" algn="ctr">
-                      <a:solidFill>
-                        <a:srgbClr val="DADDE6"/>
-                      </a:solidFill>
-                      <a:prstDash val="solid"/>
-                    </a:lnB>
-                    <a:solidFill>
-                      <a:srgbClr val="FFFFFF"/>
-                    </a:solidFill>
-                  </a:tcPr>
-                </a:tc>
-                <a:tc>
-                  <a:txBody>
-                    <a:bodyPr wrap="square"/>
-                    <a:lstStyle/>
-                    <a:p>
-                      <a:pPr algn="l"/>
-                      <a:r>
-                        <a:rPr sz="1150" b="0">
-                          <a:solidFill>
-                            <a:srgbClr val="22223B"/>
-                          </a:solidFill>
-                          <a:latin typeface="BIZ UDGothic"/>
-                          <a:ea typeface="BIZ UDGothic"/>
-                          <a:cs typeface="BIZ UDGothic"/>
-                        </a:rPr>
-                        <a:t>1.5 ・ 10</a:t>
                       </a:r>
                     </a:p>
                   </a:txBody>
@@ -17068,7 +16770,7 @@
                 <a:ea typeface="BIZ UDGothic"/>
                 <a:cs typeface="BIZ UDGothic"/>
               </a:rPr>
-              <a:t>options（rbfe… を除く）は Python 版と同じ値。変えると推定の結果が変わり、Python 版との照合テスト（TestPythonReference）が合わなくなる</a:t>
+              <a:t>options は Python 版と同じ値。変えると推定の結果が変わり、Python 版との照合テスト（TestPythonReference）が合わなくなる</a:t>
             </a:r>
           </a:p>
         </p:txBody>
@@ -17911,7 +17613,7 @@
                 <a:ea typeface="Courier New"/>
                 <a:cs typeface="Courier New"/>
               </a:rPr>
-              <a:t>% recommendedMethods.m（"recommended" の部分）</a:t>
+              <a:t>% recommendedMethods.m（"default" の部分＝初期設定）</a:t>
             </a:r>
           </a:p>
           <a:p>
@@ -19422,7 +19124,7 @@
                 <a:ea typeface="BIZ UDGothic"/>
                 <a:cs typeface="BIZ UDGothic"/>
               </a:rPr>
-              <a:t>cd tests → runAllTests。「成功 197 件、失敗 0 件、未完了 0 件」（2026-10-29 時点の件数）</a:t>
+              <a:t>cd tests → runAllTests。「成功 199 件、失敗 0 件、未完了 0 件」（2026-10-31 時点の件数）</a:t>
             </a:r>
           </a:p>
         </p:txBody>
@@ -26861,7 +26563,7 @@
                 <a:ea typeface="BIZ UDGothic"/>
                 <a:cs typeface="BIZ UDGothic"/>
               </a:rPr>
-              <a:t>優先順のファイル・人の選択（手動）の Shot、Mark 単位の計画</a:t>
+              <a:t>Excel ファイルで指定した Shot・Mark（パターン・優先順）、Mark 単位の計画</a:t>
             </a:r>
           </a:p>
           <a:p>
@@ -29545,7 +29247,7 @@
                 <a:ea typeface="BIZ UDGothic"/>
                 <a:cs typeface="BIZ UDGothic"/>
               </a:rPr>
-              <a:t>推奨の組み合わせ・すべて・なし と手法の細かい設定（options）</a:t>
+              <a:t>初期設定（GPR だけ）・推奨の組み合わせ・すべて・なし と手法の細かい設定（options）</a:t>
             </a:r>
           </a:p>
         </p:txBody>
@@ -30446,7 +30148,7 @@
                           <a:ea typeface="BIZ UDGothic"/>
                           <a:cs typeface="BIZ UDGothic"/>
                         </a:rPr>
-                        <a:t>比べる手法（推奨の組み合わせ・すべて・なし）と手法の細かい設定 options</a:t>
+                        <a:t>比べる手法（初期設定・推奨の組み合わせ・すべて・なし）と手法の細かい設定 options</a:t>
                       </a:r>
                     </a:p>
                   </a:txBody>

--- a/matlab_app/docs/defaults_guide/デフォルト設定の編集ガイド.pptx
+++ b/matlab_app/docs/defaults_guide/デフォルト設定の編集ガイド.pptx
@@ -869,7 +869,7 @@
           <a:lstStyle/>
           <a:p>
             <a:r>
-              <a:t>「7. Shot高次補正」のタブの初期値。excludedTerms は「VIF で選ぶ」・表の「使う」・点の数による項の絞り込みで変わり、「設定を保存…」の JSON にも入る。termSets は画面の「保存」で増え、MATLAB の設定（getpref）にも残る。unit・λ・保存した組み合わせは「補正の比較」でまとめて並べて比べられる。計算の方法と式は「8. ヘルプ」の「Shot 高次補正の評価」。</a:t>
+              <a:t>「7. Shot高次補正」のタブの初期値。excludedTerms は「VIF で選ぶ」・表の「使う」・点の数による項の絞り込みで変わり、「設定を保存…」の JSON にも入る。termSets は画面の「保存」で増え、MATLAB の設定（getpref）にも残る。unit・λ・回帰・保存した組み合わせは「補正の比較」でまとめて並べて比べられる。outerMaker を none 以外にすると、外周の Shot だけその式で補正する（保存した組み合わせを選ぶと、その使わない項 outerExcludedTerms と名前 outerName も入る）。既定の設定ファイルにも書ける。計算の方法と式は「8. ヘルプ」の「Shot 高次補正の評価」。</a:t>
             </a:r>
           </a:p>
         </p:txBody>
@@ -12357,7 +12357,7 @@
         </p:nvGraphicFramePr>
         <p:xfrm>
           <a:off x="548640" y="1371600"/>
-          <a:ext cx="11091672" cy="3657600"/>
+          <a:ext cx="11091672" cy="3621024"/>
         </p:xfrm>
         <a:graphic>
           <a:graphicData uri="http://schemas.openxmlformats.org/drawingml/2006/table">
@@ -12369,7 +12369,7 @@
                 <a:gridCol w="4526280"/>
                 <a:gridCol w="1536192"/>
               </a:tblGrid>
-              <a:tr h="365760">
+              <a:tr h="329184">
                 <a:tc>
                   <a:txBody>
                     <a:bodyPr wrap="square"/>
@@ -12567,7 +12567,7 @@
                   </a:tcPr>
                 </a:tc>
               </a:tr>
-              <a:tr h="365760">
+              <a:tr h="329184">
                 <a:tc>
                   <a:txBody>
                     <a:bodyPr wrap="square"/>
@@ -12765,7 +12765,7 @@
                   </a:tcPr>
                 </a:tc>
               </a:tr>
-              <a:tr h="365760">
+              <a:tr h="329184">
                 <a:tc>
                   <a:txBody>
                     <a:bodyPr wrap="square"/>
@@ -12879,7 +12879,7 @@
                           <a:ea typeface="BIZ UDGothic"/>
                           <a:cs typeface="BIZ UDGothic"/>
                         </a:rPr>
-                        <a:t>k のくくり（common：Wafer 内で共通・scan：Scan 方向ごと・row：行の偶奇ごと・shot：Shot ごと）</a:t>
+                        <a:t>k のくくり（common：共通・scan：Scan 方向・row：行の偶奇・shot）</a:t>
                       </a:r>
                     </a:p>
                   </a:txBody>
@@ -12963,7 +12963,7 @@
                   </a:tcPr>
                 </a:tc>
               </a:tr>
-              <a:tr h="365760">
+              <a:tr h="329184">
                 <a:tc>
                   <a:txBody>
                     <a:bodyPr wrap="square"/>
@@ -13077,7 +13077,7 @@
                           <a:ea typeface="BIZ UDGothic"/>
                           <a:cs typeface="BIZ UDGothic"/>
                         </a:rPr>
-                        <a:t>shot のほかで一緒に求める Wafer 成分の次数（0〜3、0 = なし。Wafer で共通）</a:t>
+                        <a:t>Wafer 成分の次数（0〜5、0 = なし。shot は先に求めて引く）</a:t>
                       </a:r>
                     </a:p>
                   </a:txBody>
@@ -13161,7 +13161,7 @@
                   </a:tcPr>
                 </a:tc>
               </a:tr>
-              <a:tr h="365760">
+              <a:tr h="329184">
                 <a:tc>
                   <a:txBody>
                     <a:bodyPr wrap="square"/>
@@ -13359,7 +13359,7 @@
                   </a:tcPr>
                 </a:tc>
               </a:tr>
-              <a:tr h="365760">
+              <a:tr h="329184">
                 <a:tc>
                   <a:txBody>
                     <a:bodyPr wrap="square"/>
@@ -13375,6 +13375,402 @@
                           <a:ea typeface="BIZ UDGothic"/>
                           <a:cs typeface="BIZ UDGothic"/>
                         </a:rPr>
+                        <a:t>highOrder.outerRadiusMm</a:t>
+                      </a:r>
+                    </a:p>
+                  </a:txBody>
+                  <a:tcPr marL="109728" marR="109728" marT="45720" marB="45720" anchor="ctr">
+                    <a:lnL w="9525" cap="flat" cmpd="sng" algn="ctr">
+                      <a:solidFill>
+                        <a:srgbClr val="DADDE6"/>
+                      </a:solidFill>
+                      <a:prstDash val="solid"/>
+                    </a:lnL>
+                    <a:lnR w="9525" cap="flat" cmpd="sng" algn="ctr">
+                      <a:solidFill>
+                        <a:srgbClr val="DADDE6"/>
+                      </a:solidFill>
+                      <a:prstDash val="solid"/>
+                    </a:lnR>
+                    <a:lnT w="9525" cap="flat" cmpd="sng" algn="ctr">
+                      <a:solidFill>
+                        <a:srgbClr val="DADDE6"/>
+                      </a:solidFill>
+                      <a:prstDash val="solid"/>
+                    </a:lnT>
+                    <a:lnB w="9525" cap="flat" cmpd="sng" algn="ctr">
+                      <a:solidFill>
+                        <a:srgbClr val="DADDE6"/>
+                      </a:solidFill>
+                      <a:prstDash val="solid"/>
+                    </a:lnB>
+                    <a:solidFill>
+                      <a:srgbClr val="FFFFFF"/>
+                    </a:solidFill>
+                  </a:tcPr>
+                </a:tc>
+                <a:tc>
+                  <a:txBody>
+                    <a:bodyPr wrap="square"/>
+                    <a:lstStyle/>
+                    <a:p>
+                      <a:pPr algn="l"/>
+                      <a:r>
+                        <a:rPr sz="1100" b="0">
+                          <a:solidFill>
+                            <a:srgbClr val="22223B"/>
+                          </a:solidFill>
+                          <a:latin typeface="BIZ UDGothic"/>
+                          <a:ea typeface="BIZ UDGothic"/>
+                          <a:cs typeface="BIZ UDGothic"/>
+                        </a:rPr>
+                        <a:t>120</a:t>
+                      </a:r>
+                    </a:p>
+                  </a:txBody>
+                  <a:tcPr marL="109728" marR="109728" marT="45720" marB="45720" anchor="ctr">
+                    <a:lnL w="9525" cap="flat" cmpd="sng" algn="ctr">
+                      <a:solidFill>
+                        <a:srgbClr val="DADDE6"/>
+                      </a:solidFill>
+                      <a:prstDash val="solid"/>
+                    </a:lnL>
+                    <a:lnR w="9525" cap="flat" cmpd="sng" algn="ctr">
+                      <a:solidFill>
+                        <a:srgbClr val="DADDE6"/>
+                      </a:solidFill>
+                      <a:prstDash val="solid"/>
+                    </a:lnR>
+                    <a:lnT w="9525" cap="flat" cmpd="sng" algn="ctr">
+                      <a:solidFill>
+                        <a:srgbClr val="DADDE6"/>
+                      </a:solidFill>
+                      <a:prstDash val="solid"/>
+                    </a:lnT>
+                    <a:lnB w="9525" cap="flat" cmpd="sng" algn="ctr">
+                      <a:solidFill>
+                        <a:srgbClr val="DADDE6"/>
+                      </a:solidFill>
+                      <a:prstDash val="solid"/>
+                    </a:lnB>
+                    <a:solidFill>
+                      <a:srgbClr val="FFFFFF"/>
+                    </a:solidFill>
+                  </a:tcPr>
+                </a:tc>
+                <a:tc>
+                  <a:txBody>
+                    <a:bodyPr wrap="square"/>
+                    <a:lstStyle/>
+                    <a:p>
+                      <a:pPr algn="l"/>
+                      <a:r>
+                        <a:rPr sz="1100" b="0">
+                          <a:solidFill>
+                            <a:srgbClr val="22223B"/>
+                          </a:solidFill>
+                          <a:latin typeface="BIZ UDGothic"/>
+                          <a:ea typeface="BIZ UDGothic"/>
+                          <a:cs typeface="BIZ UDGothic"/>
+                        </a:rPr>
+                        <a:t>外周の Shot（Shot 中心の半径 [mm] がこの値以上）</a:t>
+                      </a:r>
+                    </a:p>
+                  </a:txBody>
+                  <a:tcPr marL="109728" marR="109728" marT="45720" marB="45720" anchor="ctr">
+                    <a:lnL w="9525" cap="flat" cmpd="sng" algn="ctr">
+                      <a:solidFill>
+                        <a:srgbClr val="DADDE6"/>
+                      </a:solidFill>
+                      <a:prstDash val="solid"/>
+                    </a:lnL>
+                    <a:lnR w="9525" cap="flat" cmpd="sng" algn="ctr">
+                      <a:solidFill>
+                        <a:srgbClr val="DADDE6"/>
+                      </a:solidFill>
+                      <a:prstDash val="solid"/>
+                    </a:lnR>
+                    <a:lnT w="9525" cap="flat" cmpd="sng" algn="ctr">
+                      <a:solidFill>
+                        <a:srgbClr val="DADDE6"/>
+                      </a:solidFill>
+                      <a:prstDash val="solid"/>
+                    </a:lnT>
+                    <a:lnB w="9525" cap="flat" cmpd="sng" algn="ctr">
+                      <a:solidFill>
+                        <a:srgbClr val="DADDE6"/>
+                      </a:solidFill>
+                      <a:prstDash val="solid"/>
+                    </a:lnB>
+                    <a:solidFill>
+                      <a:srgbClr val="FFFFFF"/>
+                    </a:solidFill>
+                  </a:tcPr>
+                </a:tc>
+                <a:tc>
+                  <a:txBody>
+                    <a:bodyPr wrap="square"/>
+                    <a:lstStyle/>
+                    <a:p>
+                      <a:pPr algn="l"/>
+                      <a:r>
+                        <a:rPr sz="1100" b="0">
+                          <a:solidFill>
+                            <a:srgbClr val="22223B"/>
+                          </a:solidFill>
+                          <a:latin typeface="BIZ UDGothic"/>
+                          <a:ea typeface="BIZ UDGothic"/>
+                          <a:cs typeface="BIZ UDGothic"/>
+                        </a:rPr>
+                        <a:t>7. 外周の半径</a:t>
+                      </a:r>
+                    </a:p>
+                  </a:txBody>
+                  <a:tcPr marL="109728" marR="109728" marT="45720" marB="45720" anchor="ctr">
+                    <a:lnL w="9525" cap="flat" cmpd="sng" algn="ctr">
+                      <a:solidFill>
+                        <a:srgbClr val="DADDE6"/>
+                      </a:solidFill>
+                      <a:prstDash val="solid"/>
+                    </a:lnL>
+                    <a:lnR w="9525" cap="flat" cmpd="sng" algn="ctr">
+                      <a:solidFill>
+                        <a:srgbClr val="DADDE6"/>
+                      </a:solidFill>
+                      <a:prstDash val="solid"/>
+                    </a:lnR>
+                    <a:lnT w="9525" cap="flat" cmpd="sng" algn="ctr">
+                      <a:solidFill>
+                        <a:srgbClr val="DADDE6"/>
+                      </a:solidFill>
+                      <a:prstDash val="solid"/>
+                    </a:lnT>
+                    <a:lnB w="9525" cap="flat" cmpd="sng" algn="ctr">
+                      <a:solidFill>
+                        <a:srgbClr val="DADDE6"/>
+                      </a:solidFill>
+                      <a:prstDash val="solid"/>
+                    </a:lnB>
+                    <a:solidFill>
+                      <a:srgbClr val="FFFFFF"/>
+                    </a:solidFill>
+                  </a:tcPr>
+                </a:tc>
+              </a:tr>
+              <a:tr h="329184">
+                <a:tc>
+                  <a:txBody>
+                    <a:bodyPr wrap="square"/>
+                    <a:lstStyle/>
+                    <a:p>
+                      <a:pPr algn="l"/>
+                      <a:r>
+                        <a:rPr sz="1100" b="0">
+                          <a:solidFill>
+                            <a:srgbClr val="22223B"/>
+                          </a:solidFill>
+                          <a:latin typeface="BIZ UDGothic"/>
+                          <a:ea typeface="BIZ UDGothic"/>
+                          <a:cs typeface="BIZ UDGothic"/>
+                        </a:rPr>
+                        <a:t>highOrder.outerMaker ・ outerName</a:t>
+                      </a:r>
+                    </a:p>
+                  </a:txBody>
+                  <a:tcPr marL="109728" marR="109728" marT="45720" marB="45720" anchor="ctr">
+                    <a:lnL w="9525" cap="flat" cmpd="sng" algn="ctr">
+                      <a:solidFill>
+                        <a:srgbClr val="DADDE6"/>
+                      </a:solidFill>
+                      <a:prstDash val="solid"/>
+                    </a:lnL>
+                    <a:lnR w="9525" cap="flat" cmpd="sng" algn="ctr">
+                      <a:solidFill>
+                        <a:srgbClr val="DADDE6"/>
+                      </a:solidFill>
+                      <a:prstDash val="solid"/>
+                    </a:lnR>
+                    <a:lnT w="9525" cap="flat" cmpd="sng" algn="ctr">
+                      <a:solidFill>
+                        <a:srgbClr val="DADDE6"/>
+                      </a:solidFill>
+                      <a:prstDash val="solid"/>
+                    </a:lnT>
+                    <a:lnB w="9525" cap="flat" cmpd="sng" algn="ctr">
+                      <a:solidFill>
+                        <a:srgbClr val="DADDE6"/>
+                      </a:solidFill>
+                      <a:prstDash val="solid"/>
+                    </a:lnB>
+                    <a:solidFill>
+                      <a:srgbClr val="FFFFFF"/>
+                    </a:solidFill>
+                  </a:tcPr>
+                </a:tc>
+                <a:tc>
+                  <a:txBody>
+                    <a:bodyPr wrap="square"/>
+                    <a:lstStyle/>
+                    <a:p>
+                      <a:pPr algn="l"/>
+                      <a:r>
+                        <a:rPr sz="1100" b="0">
+                          <a:solidFill>
+                            <a:srgbClr val="22223B"/>
+                          </a:solidFill>
+                          <a:latin typeface="BIZ UDGothic"/>
+                          <a:ea typeface="BIZ UDGothic"/>
+                          <a:cs typeface="BIZ UDGothic"/>
+                        </a:rPr>
+                        <a:t>"none" ・ ""</a:t>
+                      </a:r>
+                    </a:p>
+                  </a:txBody>
+                  <a:tcPr marL="109728" marR="109728" marT="45720" marB="45720" anchor="ctr">
+                    <a:lnL w="9525" cap="flat" cmpd="sng" algn="ctr">
+                      <a:solidFill>
+                        <a:srgbClr val="DADDE6"/>
+                      </a:solidFill>
+                      <a:prstDash val="solid"/>
+                    </a:lnL>
+                    <a:lnR w="9525" cap="flat" cmpd="sng" algn="ctr">
+                      <a:solidFill>
+                        <a:srgbClr val="DADDE6"/>
+                      </a:solidFill>
+                      <a:prstDash val="solid"/>
+                    </a:lnR>
+                    <a:lnT w="9525" cap="flat" cmpd="sng" algn="ctr">
+                      <a:solidFill>
+                        <a:srgbClr val="DADDE6"/>
+                      </a:solidFill>
+                      <a:prstDash val="solid"/>
+                    </a:lnT>
+                    <a:lnB w="9525" cap="flat" cmpd="sng" algn="ctr">
+                      <a:solidFill>
+                        <a:srgbClr val="DADDE6"/>
+                      </a:solidFill>
+                      <a:prstDash val="solid"/>
+                    </a:lnB>
+                    <a:solidFill>
+                      <a:srgbClr val="FFFFFF"/>
+                    </a:solidFill>
+                  </a:tcPr>
+                </a:tc>
+                <a:tc>
+                  <a:txBody>
+                    <a:bodyPr wrap="square"/>
+                    <a:lstStyle/>
+                    <a:p>
+                      <a:pPr algn="l"/>
+                      <a:r>
+                        <a:rPr sz="1100" b="0">
+                          <a:solidFill>
+                            <a:srgbClr val="22223B"/>
+                          </a:solidFill>
+                          <a:latin typeface="BIZ UDGothic"/>
+                          <a:ea typeface="BIZ UDGothic"/>
+                          <a:cs typeface="BIZ UDGothic"/>
+                        </a:rPr>
+                        <a:t>外周の式（none：分けない）・選んだ組み合わせの名前</a:t>
+                      </a:r>
+                    </a:p>
+                  </a:txBody>
+                  <a:tcPr marL="109728" marR="109728" marT="45720" marB="45720" anchor="ctr">
+                    <a:lnL w="9525" cap="flat" cmpd="sng" algn="ctr">
+                      <a:solidFill>
+                        <a:srgbClr val="DADDE6"/>
+                      </a:solidFill>
+                      <a:prstDash val="solid"/>
+                    </a:lnL>
+                    <a:lnR w="9525" cap="flat" cmpd="sng" algn="ctr">
+                      <a:solidFill>
+                        <a:srgbClr val="DADDE6"/>
+                      </a:solidFill>
+                      <a:prstDash val="solid"/>
+                    </a:lnR>
+                    <a:lnT w="9525" cap="flat" cmpd="sng" algn="ctr">
+                      <a:solidFill>
+                        <a:srgbClr val="DADDE6"/>
+                      </a:solidFill>
+                      <a:prstDash val="solid"/>
+                    </a:lnT>
+                    <a:lnB w="9525" cap="flat" cmpd="sng" algn="ctr">
+                      <a:solidFill>
+                        <a:srgbClr val="DADDE6"/>
+                      </a:solidFill>
+                      <a:prstDash val="solid"/>
+                    </a:lnB>
+                    <a:solidFill>
+                      <a:srgbClr val="FFFFFF"/>
+                    </a:solidFill>
+                  </a:tcPr>
+                </a:tc>
+                <a:tc>
+                  <a:txBody>
+                    <a:bodyPr wrap="square"/>
+                    <a:lstStyle/>
+                    <a:p>
+                      <a:pPr algn="l"/>
+                      <a:r>
+                        <a:rPr sz="1100" b="0">
+                          <a:solidFill>
+                            <a:srgbClr val="22223B"/>
+                          </a:solidFill>
+                          <a:latin typeface="BIZ UDGothic"/>
+                          <a:ea typeface="BIZ UDGothic"/>
+                          <a:cs typeface="BIZ UDGothic"/>
+                        </a:rPr>
+                        <a:t>7. 外周の式</a:t>
+                      </a:r>
+                    </a:p>
+                  </a:txBody>
+                  <a:tcPr marL="109728" marR="109728" marT="45720" marB="45720" anchor="ctr">
+                    <a:lnL w="9525" cap="flat" cmpd="sng" algn="ctr">
+                      <a:solidFill>
+                        <a:srgbClr val="DADDE6"/>
+                      </a:solidFill>
+                      <a:prstDash val="solid"/>
+                    </a:lnL>
+                    <a:lnR w="9525" cap="flat" cmpd="sng" algn="ctr">
+                      <a:solidFill>
+                        <a:srgbClr val="DADDE6"/>
+                      </a:solidFill>
+                      <a:prstDash val="solid"/>
+                    </a:lnR>
+                    <a:lnT w="9525" cap="flat" cmpd="sng" algn="ctr">
+                      <a:solidFill>
+                        <a:srgbClr val="DADDE6"/>
+                      </a:solidFill>
+                      <a:prstDash val="solid"/>
+                    </a:lnT>
+                    <a:lnB w="9525" cap="flat" cmpd="sng" algn="ctr">
+                      <a:solidFill>
+                        <a:srgbClr val="DADDE6"/>
+                      </a:solidFill>
+                      <a:prstDash val="solid"/>
+                    </a:lnB>
+                    <a:solidFill>
+                      <a:srgbClr val="FFFFFF"/>
+                    </a:solidFill>
+                  </a:tcPr>
+                </a:tc>
+              </a:tr>
+              <a:tr h="329184">
+                <a:tc>
+                  <a:txBody>
+                    <a:bodyPr wrap="square"/>
+                    <a:lstStyle/>
+                    <a:p>
+                      <a:pPr algn="l"/>
+                      <a:r>
+                        <a:rPr sz="1100" b="0">
+                          <a:solidFill>
+                            <a:srgbClr val="22223B"/>
+                          </a:solidFill>
+                          <a:latin typeface="BIZ UDGothic"/>
+                          <a:ea typeface="BIZ UDGothic"/>
+                          <a:cs typeface="BIZ UDGothic"/>
+                        </a:rPr>
                         <a:t>highOrder.vifThreshold</a:t>
                       </a:r>
                     </a:p>
@@ -13557,7 +13953,7 @@
                   </a:tcPr>
                 </a:tc>
               </a:tr>
-              <a:tr h="365760">
+              <a:tr h="329184">
                 <a:tc>
                   <a:txBody>
                     <a:bodyPr wrap="square"/>
@@ -13573,7 +13969,7 @@
                           <a:ea typeface="BIZ UDGothic"/>
                           <a:cs typeface="BIZ UDGothic"/>
                         </a:rPr>
-                        <a:t>highOrder.loss</a:t>
+                        <a:t>highOrder.loss ・ huberTuning</a:t>
                       </a:r>
                     </a:p>
                   </a:txBody>
@@ -13622,7 +14018,7 @@
                           <a:ea typeface="BIZ UDGothic"/>
                           <a:cs typeface="BIZ UDGothic"/>
                         </a:rPr>
-                        <a:t>"huber"</a:t>
+                        <a:t>"huber" ・ 1.345</a:t>
                       </a:r>
                     </a:p>
                   </a:txBody>
@@ -13671,7 +14067,7 @@
                           <a:ea typeface="BIZ UDGothic"/>
                           <a:cs typeface="BIZ UDGothic"/>
                         </a:rPr>
-                        <a:t>損失関数（ols：最小二乗、huber・lad：ロバスト回帰）</a:t>
+                        <a:t>損失関数（ols・huber・lad）・Huber の定数 c</a:t>
                       </a:r>
                     </a:p>
                   </a:txBody>
@@ -13720,7 +14116,7 @@
                           <a:ea typeface="BIZ UDGothic"/>
                           <a:cs typeface="BIZ UDGothic"/>
                         </a:rPr>
-                        <a:t>7. 回帰</a:t>
+                        <a:t>7. 回帰・Huber</a:t>
                       </a:r>
                     </a:p>
                   </a:txBody>
@@ -13755,7 +14151,7 @@
                   </a:tcPr>
                 </a:tc>
               </a:tr>
-              <a:tr h="365760">
+              <a:tr h="329184">
                 <a:tc>
                   <a:txBody>
                     <a:bodyPr wrap="square"/>
@@ -13771,7 +14167,7 @@
                           <a:ea typeface="BIZ UDGothic"/>
                           <a:cs typeface="BIZ UDGothic"/>
                         </a:rPr>
-                        <a:t>highOrder.huberTuning</a:t>
+                        <a:t>highOrder.l2 ・ lambda</a:t>
                       </a:r>
                     </a:p>
                   </a:txBody>
@@ -13820,7 +14216,7 @@
                           <a:ea typeface="BIZ UDGothic"/>
                           <a:cs typeface="BIZ UDGothic"/>
                         </a:rPr>
-                        <a:t>1.345</a:t>
+                        <a:t>true ・ 0.1</a:t>
                       </a:r>
                     </a:p>
                   </a:txBody>
@@ -13869,7 +14265,7 @@
                           <a:ea typeface="BIZ UDGothic"/>
                           <a:cs typeface="BIZ UDGothic"/>
                         </a:rPr>
-                        <a:t>Huber の定数 c（正規分布の誤差で効率 95%）</a:t>
+                        <a:t>高次項（2次以上）だけに L2 正則化をかけるか・強さ λ</a:t>
                       </a:r>
                     </a:p>
                   </a:txBody>
@@ -13918,7 +14314,7 @@
                           <a:ea typeface="BIZ UDGothic"/>
                           <a:cs typeface="BIZ UDGothic"/>
                         </a:rPr>
-                        <a:t>7. Huber の c</a:t>
+                        <a:t>7. L2・λ</a:t>
                       </a:r>
                     </a:p>
                   </a:txBody>
@@ -13953,205 +14349,7 @@
                   </a:tcPr>
                 </a:tc>
               </a:tr>
-              <a:tr h="365760">
-                <a:tc>
-                  <a:txBody>
-                    <a:bodyPr wrap="square"/>
-                    <a:lstStyle/>
-                    <a:p>
-                      <a:pPr algn="l"/>
-                      <a:r>
-                        <a:rPr sz="1100" b="0">
-                          <a:solidFill>
-                            <a:srgbClr val="22223B"/>
-                          </a:solidFill>
-                          <a:latin typeface="BIZ UDGothic"/>
-                          <a:ea typeface="BIZ UDGothic"/>
-                          <a:cs typeface="BIZ UDGothic"/>
-                        </a:rPr>
-                        <a:t>highOrder.l2 ・ lambda</a:t>
-                      </a:r>
-                    </a:p>
-                  </a:txBody>
-                  <a:tcPr marL="109728" marR="109728" marT="45720" marB="45720" anchor="ctr">
-                    <a:lnL w="9525" cap="flat" cmpd="sng" algn="ctr">
-                      <a:solidFill>
-                        <a:srgbClr val="DADDE6"/>
-                      </a:solidFill>
-                      <a:prstDash val="solid"/>
-                    </a:lnL>
-                    <a:lnR w="9525" cap="flat" cmpd="sng" algn="ctr">
-                      <a:solidFill>
-                        <a:srgbClr val="DADDE6"/>
-                      </a:solidFill>
-                      <a:prstDash val="solid"/>
-                    </a:lnR>
-                    <a:lnT w="9525" cap="flat" cmpd="sng" algn="ctr">
-                      <a:solidFill>
-                        <a:srgbClr val="DADDE6"/>
-                      </a:solidFill>
-                      <a:prstDash val="solid"/>
-                    </a:lnT>
-                    <a:lnB w="9525" cap="flat" cmpd="sng" algn="ctr">
-                      <a:solidFill>
-                        <a:srgbClr val="DADDE6"/>
-                      </a:solidFill>
-                      <a:prstDash val="solid"/>
-                    </a:lnB>
-                    <a:solidFill>
-                      <a:srgbClr val="FFFFFF"/>
-                    </a:solidFill>
-                  </a:tcPr>
-                </a:tc>
-                <a:tc>
-                  <a:txBody>
-                    <a:bodyPr wrap="square"/>
-                    <a:lstStyle/>
-                    <a:p>
-                      <a:pPr algn="l"/>
-                      <a:r>
-                        <a:rPr sz="1100" b="0">
-                          <a:solidFill>
-                            <a:srgbClr val="22223B"/>
-                          </a:solidFill>
-                          <a:latin typeface="BIZ UDGothic"/>
-                          <a:ea typeface="BIZ UDGothic"/>
-                          <a:cs typeface="BIZ UDGothic"/>
-                        </a:rPr>
-                        <a:t>true ・ 0.1</a:t>
-                      </a:r>
-                    </a:p>
-                  </a:txBody>
-                  <a:tcPr marL="109728" marR="109728" marT="45720" marB="45720" anchor="ctr">
-                    <a:lnL w="9525" cap="flat" cmpd="sng" algn="ctr">
-                      <a:solidFill>
-                        <a:srgbClr val="DADDE6"/>
-                      </a:solidFill>
-                      <a:prstDash val="solid"/>
-                    </a:lnL>
-                    <a:lnR w="9525" cap="flat" cmpd="sng" algn="ctr">
-                      <a:solidFill>
-                        <a:srgbClr val="DADDE6"/>
-                      </a:solidFill>
-                      <a:prstDash val="solid"/>
-                    </a:lnR>
-                    <a:lnT w="9525" cap="flat" cmpd="sng" algn="ctr">
-                      <a:solidFill>
-                        <a:srgbClr val="DADDE6"/>
-                      </a:solidFill>
-                      <a:prstDash val="solid"/>
-                    </a:lnT>
-                    <a:lnB w="9525" cap="flat" cmpd="sng" algn="ctr">
-                      <a:solidFill>
-                        <a:srgbClr val="DADDE6"/>
-                      </a:solidFill>
-                      <a:prstDash val="solid"/>
-                    </a:lnB>
-                    <a:solidFill>
-                      <a:srgbClr val="FFFFFF"/>
-                    </a:solidFill>
-                  </a:tcPr>
-                </a:tc>
-                <a:tc>
-                  <a:txBody>
-                    <a:bodyPr wrap="square"/>
-                    <a:lstStyle/>
-                    <a:p>
-                      <a:pPr algn="l"/>
-                      <a:r>
-                        <a:rPr sz="1100" b="0">
-                          <a:solidFill>
-                            <a:srgbClr val="22223B"/>
-                          </a:solidFill>
-                          <a:latin typeface="BIZ UDGothic"/>
-                          <a:ea typeface="BIZ UDGothic"/>
-                          <a:cs typeface="BIZ UDGothic"/>
-                        </a:rPr>
-                        <a:t>高次項（2次以上）だけに L2 正則化をかけるか・強さ λ</a:t>
-                      </a:r>
-                    </a:p>
-                  </a:txBody>
-                  <a:tcPr marL="109728" marR="109728" marT="45720" marB="45720" anchor="ctr">
-                    <a:lnL w="9525" cap="flat" cmpd="sng" algn="ctr">
-                      <a:solidFill>
-                        <a:srgbClr val="DADDE6"/>
-                      </a:solidFill>
-                      <a:prstDash val="solid"/>
-                    </a:lnL>
-                    <a:lnR w="9525" cap="flat" cmpd="sng" algn="ctr">
-                      <a:solidFill>
-                        <a:srgbClr val="DADDE6"/>
-                      </a:solidFill>
-                      <a:prstDash val="solid"/>
-                    </a:lnR>
-                    <a:lnT w="9525" cap="flat" cmpd="sng" algn="ctr">
-                      <a:solidFill>
-                        <a:srgbClr val="DADDE6"/>
-                      </a:solidFill>
-                      <a:prstDash val="solid"/>
-                    </a:lnT>
-                    <a:lnB w="9525" cap="flat" cmpd="sng" algn="ctr">
-                      <a:solidFill>
-                        <a:srgbClr val="DADDE6"/>
-                      </a:solidFill>
-                      <a:prstDash val="solid"/>
-                    </a:lnB>
-                    <a:solidFill>
-                      <a:srgbClr val="FFFFFF"/>
-                    </a:solidFill>
-                  </a:tcPr>
-                </a:tc>
-                <a:tc>
-                  <a:txBody>
-                    <a:bodyPr wrap="square"/>
-                    <a:lstStyle/>
-                    <a:p>
-                      <a:pPr algn="l"/>
-                      <a:r>
-                        <a:rPr sz="1100" b="0">
-                          <a:solidFill>
-                            <a:srgbClr val="22223B"/>
-                          </a:solidFill>
-                          <a:latin typeface="BIZ UDGothic"/>
-                          <a:ea typeface="BIZ UDGothic"/>
-                          <a:cs typeface="BIZ UDGothic"/>
-                        </a:rPr>
-                        <a:t>7. L2・λ</a:t>
-                      </a:r>
-                    </a:p>
-                  </a:txBody>
-                  <a:tcPr marL="109728" marR="109728" marT="45720" marB="45720" anchor="ctr">
-                    <a:lnL w="9525" cap="flat" cmpd="sng" algn="ctr">
-                      <a:solidFill>
-                        <a:srgbClr val="DADDE6"/>
-                      </a:solidFill>
-                      <a:prstDash val="solid"/>
-                    </a:lnL>
-                    <a:lnR w="9525" cap="flat" cmpd="sng" algn="ctr">
-                      <a:solidFill>
-                        <a:srgbClr val="DADDE6"/>
-                      </a:solidFill>
-                      <a:prstDash val="solid"/>
-                    </a:lnR>
-                    <a:lnT w="9525" cap="flat" cmpd="sng" algn="ctr">
-                      <a:solidFill>
-                        <a:srgbClr val="DADDE6"/>
-                      </a:solidFill>
-                      <a:prstDash val="solid"/>
-                    </a:lnT>
-                    <a:lnB w="9525" cap="flat" cmpd="sng" algn="ctr">
-                      <a:solidFill>
-                        <a:srgbClr val="DADDE6"/>
-                      </a:solidFill>
-                      <a:prstDash val="solid"/>
-                    </a:lnB>
-                    <a:solidFill>
-                      <a:srgbClr val="FFFFFF"/>
-                    </a:solidFill>
-                  </a:tcPr>
-                </a:tc>
-              </a:tr>
-              <a:tr h="365760">
+              <a:tr h="329184">
                 <a:tc>
                   <a:txBody>
                     <a:bodyPr wrap="square"/>
@@ -14361,12 +14559,12 @@
         </p:nvSpPr>
         <p:spPr>
           <a:xfrm>
-            <a:off x="548640" y="5303520"/>
-            <a:ext cx="11091672" cy="512064"/>
+            <a:off x="548640" y="5596128"/>
+            <a:ext cx="11091672" cy="640080"/>
           </a:xfrm>
           <a:prstGeom prst="roundRect">
             <a:avLst>
-              <a:gd name="adj" fmla="val 14285"/>
+              <a:gd name="adj" fmla="val 11428"/>
             </a:avLst>
           </a:prstGeom>
           <a:solidFill>
@@ -14407,7 +14605,7 @@
         </p:nvSpPr>
         <p:spPr>
           <a:xfrm>
-            <a:off x="749808" y="5298948"/>
+            <a:off x="749808" y="5655564"/>
             <a:ext cx="521207" cy="521207"/>
           </a:xfrm>
           <a:prstGeom prst="ellipse">
@@ -14462,8 +14660,8 @@
         </p:nvSpPr>
         <p:spPr>
           <a:xfrm>
-            <a:off x="1463040" y="5303520"/>
-            <a:ext cx="9994392" cy="512064"/>
+            <a:off x="1463040" y="5596128"/>
+            <a:ext cx="9994392" cy="640080"/>
           </a:xfrm>
           <a:prstGeom prst="rect">
             <a:avLst/>
@@ -14484,143 +14682,7 @@
                 <a:ea typeface="BIZ UDGothic"/>
                 <a:cs typeface="BIZ UDGothic"/>
               </a:rPr>
-              <a:t>λ はそろえた係数に対する値。過去のシミュレーション（1 Shot 7×11 点）の標準が 0.1、点を減らすときは λ × √(77 / 点の数) が目安</a:t>
-            </a:r>
-          </a:p>
-        </p:txBody>
-      </p:sp>
-      <p:sp>
-        <p:nvSpPr>
-          <p:cNvPr id="10" name="Rounded Rectangle 9"/>
-          <p:cNvSpPr/>
-          <p:nvPr/>
-        </p:nvSpPr>
-        <p:spPr>
-          <a:xfrm>
-            <a:off x="548640" y="5907024"/>
-            <a:ext cx="11091672" cy="512064"/>
-          </a:xfrm>
-          <a:prstGeom prst="roundRect">
-            <a:avLst>
-              <a:gd name="adj" fmla="val 14285"/>
-            </a:avLst>
-          </a:prstGeom>
-          <a:solidFill>
-            <a:srgbClr val="FFFFFF"/>
-          </a:solidFill>
-          <a:ln w="9525">
-            <a:solidFill>
-              <a:srgbClr val="DADDE6"/>
-            </a:solidFill>
-          </a:ln>
-          <a:effectLst/>
-        </p:spPr>
-        <p:style>
-          <a:lnRef idx="1">
-            <a:schemeClr val="accent1"/>
-          </a:lnRef>
-          <a:fillRef idx="3">
-            <a:schemeClr val="accent1"/>
-          </a:fillRef>
-          <a:effectRef idx="2">
-            <a:schemeClr val="accent1"/>
-          </a:effectRef>
-          <a:fontRef idx="minor">
-            <a:schemeClr val="lt1"/>
-          </a:fontRef>
-        </p:style>
-        <p:txBody>
-          <a:bodyPr rtlCol="0" anchor="ctr"/>
-          <a:lstStyle/>
-          <a:p/>
-        </p:txBody>
-      </p:sp>
-      <p:sp>
-        <p:nvSpPr>
-          <p:cNvPr id="11" name="Oval 10"/>
-          <p:cNvSpPr/>
-          <p:nvPr/>
-        </p:nvSpPr>
-        <p:spPr>
-          <a:xfrm>
-            <a:off x="749808" y="5902452"/>
-            <a:ext cx="521207" cy="521207"/>
-          </a:xfrm>
-          <a:prstGeom prst="ellipse">
-            <a:avLst/>
-          </a:prstGeom>
-          <a:solidFill>
-            <a:srgbClr val="4A4E69"/>
-          </a:solidFill>
-          <a:ln>
-            <a:noFill/>
-          </a:ln>
-          <a:effectLst/>
-        </p:spPr>
-        <p:style>
-          <a:lnRef idx="1">
-            <a:schemeClr val="accent1"/>
-          </a:lnRef>
-          <a:fillRef idx="3">
-            <a:schemeClr val="accent1"/>
-          </a:fillRef>
-          <a:effectRef idx="2">
-            <a:schemeClr val="accent1"/>
-          </a:effectRef>
-          <a:fontRef idx="minor">
-            <a:schemeClr val="lt1"/>
-          </a:fontRef>
-        </p:style>
-        <p:txBody>
-          <a:bodyPr rtlCol="0" anchor="ctr" lIns="0" rIns="0" tIns="0" bIns="0"/>
-          <a:lstStyle/>
-          <a:p>
-            <a:pPr algn="ctr"/>
-            <a:r>
-              <a:rPr sz="1600" b="1">
-                <a:solidFill>
-                  <a:srgbClr val="FFFFFF"/>
-                </a:solidFill>
-                <a:latin typeface="BIZ UDGothic"/>
-                <a:ea typeface="BIZ UDGothic"/>
-                <a:cs typeface="BIZ UDGothic"/>
-              </a:rPr>
-              <a:t>i</a:t>
-            </a:r>
-          </a:p>
-        </p:txBody>
-      </p:sp>
-      <p:sp>
-        <p:nvSpPr>
-          <p:cNvPr id="12" name="TextBox 11"/>
-          <p:cNvSpPr txBox="1"/>
-          <p:nvPr/>
-        </p:nvSpPr>
-        <p:spPr>
-          <a:xfrm>
-            <a:off x="1463040" y="5907024"/>
-            <a:ext cx="9994392" cy="512064"/>
-          </a:xfrm>
-          <a:prstGeom prst="rect">
-            <a:avLst/>
-          </a:prstGeom>
-          <a:noFill/>
-        </p:spPr>
-        <p:txBody>
-          <a:bodyPr wrap="square" lIns="45720" rIns="45720" tIns="18288" bIns="18288" anchor="ctr"/>
-          <a:lstStyle/>
-          <a:p>
-            <a:pPr algn="l"/>
-            <a:r>
-              <a:rPr sz="1200" b="1">
-                <a:solidFill>
-                  <a:srgbClr val="22223B"/>
-                </a:solidFill>
-                <a:latin typeface="BIZ UDGothic"/>
-                <a:ea typeface="BIZ UDGothic"/>
-                <a:cs typeface="BIZ UDGothic"/>
-              </a:rPr>
-              <a:t>highOrder は評価の結果を変えない（「続きから再開」の比較にも使わない）。既定の設定ファイルにも書ける</a:t>
+              <a:t>λ はそろえた係数に対する値（1 Shot 7×11 点の標準 0.1。点を減らすときは λ × √(77 / 点の数)）。highOrder は評価の結果を変えない（「続きから再開」の比較にも使わない）</a:t>
             </a:r>
           </a:p>
         </p:txBody>
@@ -19124,7 +19186,7 @@
                 <a:ea typeface="BIZ UDGothic"/>
                 <a:cs typeface="BIZ UDGothic"/>
               </a:rPr>
-              <a:t>cd tests → runAllTests。「成功 199 件、失敗 0 件、未完了 0 件」（2026-10-31 時点の件数）</a:t>
+              <a:t>cd tests → runAllTests。「成功 205 件、失敗 0 件、未完了 0 件」（2026-10-31 時点の件数）</a:t>
             </a:r>
           </a:p>
         </p:txBody>

--- a/matlab_app/docs/defaults_guide/デフォルト設定の編集ガイド.pptx
+++ b/matlab_app/docs/defaults_guide/デフォルト設定の編集ガイド.pptx
@@ -869,7 +869,7 @@
           <a:lstStyle/>
           <a:p>
             <a:r>
-              <a:t>「7. Shot高次補正」のタブの初期値。excludedTerms は「VIF で選ぶ」・表の「使う」・点の数による項の絞り込みで変わり、「設定を保存…」の JSON にも入る。termSets は画面の「保存」で増え、MATLAB の設定（getpref）にも残る。unit・λ・回帰・保存した組み合わせは「補正の比較」でまとめて並べて比べられる。outerMaker を none 以外にすると、外周の Shot だけその式で補正する（保存した組み合わせを選ぶと、その使わない項 outerExcludedTerms と名前 outerName も入る）。既定の設定ファイルにも書ける。計算の方法と式は「8. ヘルプ」の「Shot 高次補正の評価」。</a:t>
+              <a:t>「7. Shot高次補正」のタブの初期値。excludedTerms は「VIF で選ぶ」・表の「使う」・点の数による項の絞り込みで変わり、「設定を保存…」の JSON にも入る。termSets は画面の「保存」で増え、MATLAB の設定（getpref）にも残る。以前の設定ファイルの l2（true・false）は、regularization の l2・none として読む。unit・λ・回帰・保存した組み合わせは「補正の比較」でまとめて並べて比べられる。outerMaker を none 以外にすると、外周の Shot だけその式で補正する（保存した組み合わせを選ぶと、その使わない項 outerExcludedTerms と名前 outerName も入る）。既定の設定ファイルにも書ける。計算の方法と式は「8. ヘルプ」の「Shot 高次補正の評価」。</a:t>
             </a:r>
           </a:p>
         </p:txBody>
@@ -14167,7 +14167,7 @@
                           <a:ea typeface="BIZ UDGothic"/>
                           <a:cs typeface="BIZ UDGothic"/>
                         </a:rPr>
-                        <a:t>highOrder.l2 ・ lambda</a:t>
+                        <a:t>highOrder.regularization ・ penaltyOrders ・ lambda</a:t>
                       </a:r>
                     </a:p>
                   </a:txBody>
@@ -14216,7 +14216,7 @@
                           <a:ea typeface="BIZ UDGothic"/>
                           <a:cs typeface="BIZ UDGothic"/>
                         </a:rPr>
-                        <a:t>true ・ 0.1</a:t>
+                        <a:t>"l2" ・ [2〜6] ・ 0.1</a:t>
                       </a:r>
                     </a:p>
                   </a:txBody>
@@ -14265,7 +14265,7 @@
                           <a:ea typeface="BIZ UDGothic"/>
                           <a:cs typeface="BIZ UDGothic"/>
                         </a:rPr>
-                        <a:t>高次項（2次以上）だけに L2 正則化をかけるか・強さ λ</a:t>
+                        <a:t>正則化（none・l2・l1）・かける次数（1〜6）・強さ λ</a:t>
                       </a:r>
                     </a:p>
                   </a:txBody>
@@ -14314,7 +14314,7 @@
                           <a:ea typeface="BIZ UDGothic"/>
                           <a:cs typeface="BIZ UDGothic"/>
                         </a:rPr>
-                        <a:t>7. L2・λ</a:t>
+                        <a:t>7. 正則化・λ</a:t>
                       </a:r>
                     </a:p>
                   </a:txBody>
@@ -14682,7 +14682,7 @@
                 <a:ea typeface="BIZ UDGothic"/>
                 <a:cs typeface="BIZ UDGothic"/>
               </a:rPr>
-              <a:t>λ はそろえた係数に対する値（1 Shot 7×11 点の標準 0.1。点を減らすときは λ × √(77 / 点の数)）。highOrder は評価の結果を変えない（「続きから再開」の比較にも使わない）</a:t>
+              <a:t>λ はそろえた係数に対する値（L2 は 1 Shot 7×11 点の標準 0.1。点を減らすときは λ × √(77 / 点の数)）。highOrder は評価の結果を変えない（「続きから再開」の比較にも使わない）</a:t>
             </a:r>
           </a:p>
         </p:txBody>
@@ -19186,7 +19186,7 @@
                 <a:ea typeface="BIZ UDGothic"/>
                 <a:cs typeface="BIZ UDGothic"/>
               </a:rPr>
-              <a:t>cd tests → runAllTests。「成功 205 件、失敗 0 件、未完了 0 件」（2026-10-31 時点の件数）</a:t>
+              <a:t>cd tests → runAllTests。「成功 209 件、失敗 0 件、未完了 0 件」（2026-10-31 時点の件数）</a:t>
             </a:r>
           </a:p>
         </p:txBody>
